--- a/lecons/LSA/Meteorology/17_LSA_MET_L17_Local_Winds.pptx
+++ b/lecons/LSA/Meteorology/17_LSA_MET_L17_Local_Winds.pptx
@@ -65,9 +65,14 @@
     <p:sldId id="313" r:id="rId59"/>
     <p:sldId id="314" r:id="rId60"/>
     <p:sldId id="315" r:id="rId61"/>
+    <p:sldId id="316" r:id="rId62"/>
+    <p:sldId id="317" r:id="rId63"/>
+    <p:sldId id="318" r:id="rId64"/>
+    <p:sldId id="319" r:id="rId65"/>
+    <p:sldId id="320" r:id="rId66"/>
   </p:sldIdLst>
   <p:notesMasterIdLst>
-    <p:notesMasterId r:id="rId62"/>
+    <p:notesMasterId r:id="rId67"/>
   </p:notesMasterIdLst>
   <p:sldSz cx="12192000" cy="6858000"/>
   <p:notesSz cx="6858000" cy="12192000"/>
@@ -3377,7 +3382,7 @@
           <a:p>
             <a:r>
               <a:rPr lang="en-US" dirty="0"/>
-              <a:t>Let us copy Land and Sea Breezes. Land and sea breezes form as follows. Copy the point on Sea breeze (day) on the left, then draw the diagram on the right: the sea breeze. Give it a title and label it clearly.</a:t>
+              <a:t>Let us copy Meaning and Categories of Local Winds. Local winds are explained as follows. Copy the point on Meaning: write the key term first, then its explanation.</a:t>
             </a:r>
             <a:endParaRPr lang="en-US" dirty="0"/>
           </a:p>
@@ -3553,7 +3558,7 @@
           <a:p>
             <a:r>
               <a:rPr lang="en-US" dirty="0"/>
-              <a:t>We continue with Land and Sea Breezes. On this slide we have Land breeze (night). Write each point on a new line, with the key term first, and explain it in your own words when we revise.</a:t>
+              <a:t>Copy the point on Categories on the left, then draw the diagram on the right: local winds. Give it a title and label it clearly.</a:t>
             </a:r>
             <a:endParaRPr lang="en-US" dirty="0"/>
           </a:p>
@@ -3641,7 +3646,7 @@
           <a:p>
             <a:r>
               <a:rPr lang="en-US" dirty="0"/>
-              <a:t>Copy the point on Example on the left, then draw the diagram on the right: fishermen at sea. Give it a title and label it clearly.</a:t>
+              <a:t>Let us copy Land and Sea Breezes. Land and sea breezes form as follows. Copy the point on Sea breeze (by day) on the left, then draw the diagram on the right: the sea breeze. Give it a title and label it clearly.</a:t>
             </a:r>
             <a:endParaRPr lang="en-US" dirty="0"/>
           </a:p>
@@ -3729,7 +3734,7 @@
           <a:p>
             <a:r>
               <a:rPr lang="en-US" dirty="0"/>
-              <a:t>Let us copy Valley and Mountain Winds. Valley and mountain winds form as follows. Copy the point on Anabatic (valley) wind on the left, then draw the diagram on the right: anabatic and katabatic winds. Give it a title and label it clearly.</a:t>
+              <a:t>We continue with Land and Sea Breezes. Copy the point on Land breeze (at night): write the key term first, then its explanation.</a:t>
             </a:r>
             <a:endParaRPr lang="en-US" dirty="0"/>
           </a:p>
@@ -3817,7 +3822,7 @@
           <a:p>
             <a:r>
               <a:rPr lang="en-US" dirty="0"/>
-              <a:t>We continue with Valley and Mountain Winds. On this slide we have Katabatic (mountain) wind and Example. Write each point on a new line, with the key term first, and explain it in your own words when we revise.</a:t>
+              <a:t>Copy the point on Examples and effects on the left, then draw the diagram on the right: fishing canoes. Give it a title and label it clearly.</a:t>
             </a:r>
             <a:endParaRPr lang="en-US" dirty="0"/>
           </a:p>
@@ -3905,7 +3910,7 @@
           <a:p>
             <a:r>
               <a:rPr lang="en-US" dirty="0"/>
-              <a:t>Let us copy Foehn Winds. Foehn winds form as follows. Copy the point on Windward side on the left, then draw the diagram on the right: the foehn effect. Give it a title and label it clearly.</a:t>
+              <a:t>Let us copy Anabatic and Katabatic Winds. Winds on mountain slopes form as follows. Copy the point on Anabatic (valley) wind on the left, then draw the diagram on the right: anabatic and katabatic winds. Give it a title and label it clearly.</a:t>
             </a:r>
             <a:endParaRPr lang="en-US" dirty="0"/>
           </a:p>
@@ -3993,7 +3998,7 @@
           <a:p>
             <a:r>
               <a:rPr lang="en-US" dirty="0"/>
-              <a:t>We continue with Foehn Winds. On this slide we have Leeward side, Examples and Effects. Write each point on a new line, with the key term first, and explain it in your own words when we revise.</a:t>
+              <a:t>We continue with Anabatic and Katabatic Winds. Copy the point on Katabatic (mountain) wind: write the key term first, then its explanation.</a:t>
             </a:r>
             <a:endParaRPr lang="en-US" dirty="0"/>
           </a:p>
@@ -4081,7 +4086,7 @@
           <a:p>
             <a:r>
               <a:rPr lang="en-US" dirty="0"/>
-              <a:t>Let us copy Effects of Local Winds on Weather and Man. Local winds have the following effects. Copy the point on Temperature on the left, then draw the diagram on the right: the local winds. Give it a title and label it clearly.</a:t>
+              <a:t>We continue with Anabatic and Katabatic Winds. Copy the point on Examples and effects: write the key term first, then its explanation.</a:t>
             </a:r>
             <a:endParaRPr lang="en-US" dirty="0"/>
           </a:p>
@@ -4169,7 +4174,7 @@
           <a:p>
             <a:r>
               <a:rPr lang="en-US" dirty="0"/>
-              <a:t>We continue with Effects of Local Winds on Weather and Man. On this slide we have Agriculture and Pollution. Write each point on a new line, with the key term first, and explain it in your own words when we revise. When you finish, we go to the next slide.</a:t>
+              <a:t>Let us copy Foehn Winds. Foehn winds form as follows. Copy the point on On the windward side on the left, then draw the diagram on the right: the Foehn wind. Give it a title and label it clearly.</a:t>
             </a:r>
             <a:endParaRPr lang="en-US" dirty="0"/>
           </a:p>
@@ -4257,7 +4262,7 @@
           <a:p>
             <a:r>
               <a:rPr lang="en-US" dirty="0"/>
-              <a:t>We continue with Effects of Local Winds on Weather and Man. On this slide we have Comfort and energy. Write each point on a new line, with the key term first, and explain it in your own words when we revise.</a:t>
+              <a:t>We continue with Foehn Winds. Copy the point on On the leeward side: write the key term first, then its explanation.</a:t>
             </a:r>
             <a:endParaRPr lang="en-US" dirty="0"/>
           </a:p>
@@ -4345,7 +4350,7 @@
           <a:p>
             <a:r>
               <a:rPr lang="en-US" dirty="0"/>
-              <a:t>Now let us check what you have understood. Question 1: Explain why a sea breeze differs from a land breeze. Answer in your exercise book.</a:t>
+              <a:t>We continue with Foehn Winds. Copy the point on Examples and effects: write the key term first, then its explanation.</a:t>
             </a:r>
             <a:endParaRPr lang="en-US" dirty="0"/>
           </a:p>
@@ -4521,7 +4526,7 @@
           <a:p>
             <a:r>
               <a:rPr lang="en-US" dirty="0"/>
-              <a:t>The expected answer is: by day the land is hotter than the sea and wind blows from the sea; at night the land is cooler and wind blows from the land. If you got it right, well done.</a:t>
+              <a:t>Let us copy Effects of Winds on Weather and Man. Local winds have the following effects on weather and man. Copy the point on On temperature and comfort: write the key term first, then its explanation.</a:t>
             </a:r>
             <a:endParaRPr lang="en-US" dirty="0"/>
           </a:p>
@@ -4609,7 +4614,7 @@
           <a:p>
             <a:r>
               <a:rPr lang="en-US" dirty="0"/>
-              <a:t>Now let us check what you have understood. Question 2: Why is a katabatic wind cold? Answer in your exercise book.</a:t>
+              <a:t>We continue with Effects of Winds on Weather and Man. Copy the point on On clouds and rain: write the key term first, then its explanation.</a:t>
             </a:r>
             <a:endParaRPr lang="en-US" dirty="0"/>
           </a:p>
@@ -4697,7 +4702,7 @@
           <a:p>
             <a:r>
               <a:rPr lang="en-US" dirty="0"/>
-              <a:t>The expected answer is: it is air cooled on the slopes at night, which becomes heavy and flows down. If you got it right, well done.</a:t>
+              <a:t>We continue with Effects of Winds on Weather and Man. Copy the point on On agriculture: write the key term first, then its explanation.</a:t>
             </a:r>
             <a:endParaRPr lang="en-US" dirty="0"/>
           </a:p>
@@ -4785,7 +4790,7 @@
           <a:p>
             <a:r>
               <a:rPr lang="en-US" dirty="0"/>
-              <a:t>For those who need more practice, fill in the blanks in your exercise book. The answers are: number 1, breeze; number 2, katabatic; number 3, foehn.</a:t>
+              <a:t>We continue with Effects of Winds on Weather and Man. Copy the point on On fishing and energy: write the key term first, then its explanation.</a:t>
             </a:r>
             <a:endParaRPr lang="en-US" dirty="0"/>
           </a:p>
@@ -4873,7 +4878,7 @@
           <a:p>
             <a:r>
               <a:rPr lang="en-US" dirty="0"/>
-              <a:t>For your homework: Define an air mass. We shall correct it at the beginning of our next lesson.</a:t>
+              <a:t>Now let us check what you have understood. Question 1: Explain why a sea breeze differs from a land breeze. Answer in your exercise book.</a:t>
             </a:r>
             <a:endParaRPr lang="en-US" dirty="0"/>
           </a:p>
@@ -4961,7 +4966,7 @@
           <a:p>
             <a:r>
               <a:rPr lang="en-US" dirty="0"/>
-              <a:t>Our next lesson will be on Lesson 18: Air Masses. Thank you for your attention, and see you next time.</a:t>
+              <a:t>The expected answer is: by day the land is hotter than the sea and wind blows from the sea; at night the land is cooler and wind blows from the land. If you got it right, well done.</a:t>
             </a:r>
             <a:endParaRPr lang="en-US" dirty="0"/>
           </a:p>
@@ -5049,7 +5054,7 @@
           <a:p>
             <a:r>
               <a:rPr lang="en-US" dirty="0"/>
-              <a:t>Let us play the bilingual game. I say a word in English, and you give me the French word. Then we do the reverse.</a:t>
+              <a:t>Now let us check what you have understood. Question 2: Why is a katabatic wind cold? Answer in your exercise book.</a:t>
             </a:r>
             <a:endParaRPr lang="en-US" dirty="0"/>
           </a:p>
@@ -5137,7 +5142,7 @@
           <a:p>
             <a:r>
               <a:rPr lang="en-US" dirty="0"/>
-              <a:t>I record this information in the official logbook of the class after the lesson.</a:t>
+              <a:t>The expected answer is: it is air cooled on the slopes at night, which becomes heavy and flows down. If you got it right, well done.</a:t>
             </a:r>
             <a:endParaRPr lang="en-US" dirty="0"/>
           </a:p>
@@ -5225,7 +5230,7 @@
           <a:p>
             <a:r>
               <a:rPr lang="en-US" dirty="0"/>
-              <a:t>I complete the second page of the logbook: the matter taught, the evaluation, the homework and the attendance.</a:t>
+              <a:t>For those who need more practice, fill in the blanks in your exercise book. The answers are: number 1, breeze; number 2, katabatic; number 3, foehn.</a:t>
             </a:r>
             <a:endParaRPr lang="en-US" dirty="0"/>
           </a:p>
@@ -5313,7 +5318,7 @@
           <a:p>
             <a:r>
               <a:rPr lang="en-US" dirty="0"/>
-              <a:t>This slide is for me, the teacher: it gives the timing of the lesson and what to do if the projector is not available.</a:t>
+              <a:t>For your homework: Define an air mass. We shall correct it at the beginning of our next lesson.</a:t>
             </a:r>
             <a:endParaRPr lang="en-US" dirty="0"/>
           </a:p>
@@ -5489,7 +5494,7 @@
           <a:p>
             <a:r>
               <a:rPr lang="en-US" dirty="0"/>
-              <a:t>These are the references and picture credits used to prepare this lesson.</a:t>
+              <a:t>Our next lesson will be on Lesson 18: Air Masses. Thank you for your attention, and see you next time.</a:t>
             </a:r>
             <a:endParaRPr lang="en-US" dirty="0"/>
           </a:p>
@@ -5513,6 +5518,446 @@
             <a:fld id="{F7021451-1387-4CA6-816F-3879F97B5CBC}" type="slidenum">
               <a:rPr lang="en-US"/>
               <a:t>60</a:t>
+            </a:fld>
+            <a:endParaRPr lang="en-US"/>
+          </a:p>
+        </p:txBody>
+      </p:sp>
+    </p:spTree>
+    <p:extLst>
+      <p:ext uri="{BB962C8B-B14F-4D97-AF65-F5344CB8AC3E}">
+        <p14:creationId xmlns:p14="http://schemas.microsoft.com/office/powerpoint/2010/main" val="1024086991"/>
+      </p:ext>
+    </p:extLst>
+  </p:cSld>
+  <p:clrMapOvr>
+    <a:masterClrMapping/>
+  </p:clrMapOvr>
+</p:notes>
+</file>
+
+<file path=ppt/notesSlides/notesSlide61.xml><?xml version="1.0" encoding="utf-8"?>
+<p:notes xmlns:a="http://schemas.openxmlformats.org/drawingml/2006/main" xmlns:r="http://schemas.openxmlformats.org/officeDocument/2006/relationships" xmlns:p="http://schemas.openxmlformats.org/presentationml/2006/main">
+  <p:cSld>
+    <p:spTree>
+      <p:nvGrpSpPr>
+        <p:cNvPr id="1" name=""/>
+        <p:cNvGrpSpPr/>
+        <p:nvPr/>
+      </p:nvGrpSpPr>
+      <p:grpSpPr>
+        <a:xfrm>
+          <a:off x="0" y="0"/>
+          <a:ext cx="0" cy="0"/>
+          <a:chOff x="0" y="0"/>
+          <a:chExt cx="0" cy="0"/>
+        </a:xfrm>
+      </p:grpSpPr>
+      <p:sp>
+        <p:nvSpPr>
+          <p:cNvPr id="2" name="Slide Image Placeholder 1"/>
+          <p:cNvSpPr>
+            <a:spLocks noGrp="1" noRot="1" noChangeAspect="1"/>
+          </p:cNvSpPr>
+          <p:nvPr>
+            <p:ph type="sldImg"/>
+          </p:nvPr>
+        </p:nvSpPr>
+        <p:spPr/>
+      </p:sp>
+      <p:sp>
+        <p:nvSpPr>
+          <p:cNvPr id="3" name="Notes Placeholder 2"/>
+          <p:cNvSpPr>
+            <a:spLocks noGrp="1"/>
+          </p:cNvSpPr>
+          <p:nvPr>
+            <p:ph type="body" idx="1"/>
+          </p:nvPr>
+        </p:nvSpPr>
+        <p:spPr/>
+        <p:txBody>
+          <a:bodyPr/>
+          <a:lstStyle/>
+          <a:p>
+            <a:r>
+              <a:rPr lang="en-US" dirty="0"/>
+              <a:t>Let us play the bilingual game. I say a word in English, and you give me the French word. Then we do the reverse.</a:t>
+            </a:r>
+            <a:endParaRPr lang="en-US" dirty="0"/>
+          </a:p>
+        </p:txBody>
+      </p:sp>
+      <p:sp>
+        <p:nvSpPr>
+          <p:cNvPr id="4" name="Slide Number Placeholder 3"/>
+          <p:cNvSpPr>
+            <a:spLocks noGrp="1"/>
+          </p:cNvSpPr>
+          <p:nvPr>
+            <p:ph type="sldNum" sz="quarter" idx="10"/>
+          </p:nvPr>
+        </p:nvSpPr>
+        <p:spPr/>
+        <p:txBody>
+          <a:bodyPr/>
+          <a:lstStyle/>
+          <a:p>
+            <a:fld id="{F7021451-1387-4CA6-816F-3879F97B5CBC}" type="slidenum">
+              <a:rPr lang="en-US"/>
+              <a:t>61</a:t>
+            </a:fld>
+            <a:endParaRPr lang="en-US"/>
+          </a:p>
+        </p:txBody>
+      </p:sp>
+    </p:spTree>
+    <p:extLst>
+      <p:ext uri="{BB962C8B-B14F-4D97-AF65-F5344CB8AC3E}">
+        <p14:creationId xmlns:p14="http://schemas.microsoft.com/office/powerpoint/2010/main" val="1024086991"/>
+      </p:ext>
+    </p:extLst>
+  </p:cSld>
+  <p:clrMapOvr>
+    <a:masterClrMapping/>
+  </p:clrMapOvr>
+</p:notes>
+</file>
+
+<file path=ppt/notesSlides/notesSlide62.xml><?xml version="1.0" encoding="utf-8"?>
+<p:notes xmlns:a="http://schemas.openxmlformats.org/drawingml/2006/main" xmlns:r="http://schemas.openxmlformats.org/officeDocument/2006/relationships" xmlns:p="http://schemas.openxmlformats.org/presentationml/2006/main">
+  <p:cSld>
+    <p:spTree>
+      <p:nvGrpSpPr>
+        <p:cNvPr id="1" name=""/>
+        <p:cNvGrpSpPr/>
+        <p:nvPr/>
+      </p:nvGrpSpPr>
+      <p:grpSpPr>
+        <a:xfrm>
+          <a:off x="0" y="0"/>
+          <a:ext cx="0" cy="0"/>
+          <a:chOff x="0" y="0"/>
+          <a:chExt cx="0" cy="0"/>
+        </a:xfrm>
+      </p:grpSpPr>
+      <p:sp>
+        <p:nvSpPr>
+          <p:cNvPr id="2" name="Slide Image Placeholder 1"/>
+          <p:cNvSpPr>
+            <a:spLocks noGrp="1" noRot="1" noChangeAspect="1"/>
+          </p:cNvSpPr>
+          <p:nvPr>
+            <p:ph type="sldImg"/>
+          </p:nvPr>
+        </p:nvSpPr>
+        <p:spPr/>
+      </p:sp>
+      <p:sp>
+        <p:nvSpPr>
+          <p:cNvPr id="3" name="Notes Placeholder 2"/>
+          <p:cNvSpPr>
+            <a:spLocks noGrp="1"/>
+          </p:cNvSpPr>
+          <p:nvPr>
+            <p:ph type="body" idx="1"/>
+          </p:nvPr>
+        </p:nvSpPr>
+        <p:spPr/>
+        <p:txBody>
+          <a:bodyPr/>
+          <a:lstStyle/>
+          <a:p>
+            <a:r>
+              <a:rPr lang="en-US" dirty="0"/>
+              <a:t>I record this information in the official logbook of the class after the lesson.</a:t>
+            </a:r>
+            <a:endParaRPr lang="en-US" dirty="0"/>
+          </a:p>
+        </p:txBody>
+      </p:sp>
+      <p:sp>
+        <p:nvSpPr>
+          <p:cNvPr id="4" name="Slide Number Placeholder 3"/>
+          <p:cNvSpPr>
+            <a:spLocks noGrp="1"/>
+          </p:cNvSpPr>
+          <p:nvPr>
+            <p:ph type="sldNum" sz="quarter" idx="10"/>
+          </p:nvPr>
+        </p:nvSpPr>
+        <p:spPr/>
+        <p:txBody>
+          <a:bodyPr/>
+          <a:lstStyle/>
+          <a:p>
+            <a:fld id="{F7021451-1387-4CA6-816F-3879F97B5CBC}" type="slidenum">
+              <a:rPr lang="en-US"/>
+              <a:t>62</a:t>
+            </a:fld>
+            <a:endParaRPr lang="en-US"/>
+          </a:p>
+        </p:txBody>
+      </p:sp>
+    </p:spTree>
+    <p:extLst>
+      <p:ext uri="{BB962C8B-B14F-4D97-AF65-F5344CB8AC3E}">
+        <p14:creationId xmlns:p14="http://schemas.microsoft.com/office/powerpoint/2010/main" val="1024086991"/>
+      </p:ext>
+    </p:extLst>
+  </p:cSld>
+  <p:clrMapOvr>
+    <a:masterClrMapping/>
+  </p:clrMapOvr>
+</p:notes>
+</file>
+
+<file path=ppt/notesSlides/notesSlide63.xml><?xml version="1.0" encoding="utf-8"?>
+<p:notes xmlns:a="http://schemas.openxmlformats.org/drawingml/2006/main" xmlns:r="http://schemas.openxmlformats.org/officeDocument/2006/relationships" xmlns:p="http://schemas.openxmlformats.org/presentationml/2006/main">
+  <p:cSld>
+    <p:spTree>
+      <p:nvGrpSpPr>
+        <p:cNvPr id="1" name=""/>
+        <p:cNvGrpSpPr/>
+        <p:nvPr/>
+      </p:nvGrpSpPr>
+      <p:grpSpPr>
+        <a:xfrm>
+          <a:off x="0" y="0"/>
+          <a:ext cx="0" cy="0"/>
+          <a:chOff x="0" y="0"/>
+          <a:chExt cx="0" cy="0"/>
+        </a:xfrm>
+      </p:grpSpPr>
+      <p:sp>
+        <p:nvSpPr>
+          <p:cNvPr id="2" name="Slide Image Placeholder 1"/>
+          <p:cNvSpPr>
+            <a:spLocks noGrp="1" noRot="1" noChangeAspect="1"/>
+          </p:cNvSpPr>
+          <p:nvPr>
+            <p:ph type="sldImg"/>
+          </p:nvPr>
+        </p:nvSpPr>
+        <p:spPr/>
+      </p:sp>
+      <p:sp>
+        <p:nvSpPr>
+          <p:cNvPr id="3" name="Notes Placeholder 2"/>
+          <p:cNvSpPr>
+            <a:spLocks noGrp="1"/>
+          </p:cNvSpPr>
+          <p:nvPr>
+            <p:ph type="body" idx="1"/>
+          </p:nvPr>
+        </p:nvSpPr>
+        <p:spPr/>
+        <p:txBody>
+          <a:bodyPr/>
+          <a:lstStyle/>
+          <a:p>
+            <a:r>
+              <a:rPr lang="en-US" dirty="0"/>
+              <a:t>I complete the second page of the logbook: the matter taught, the evaluation, the homework and the attendance.</a:t>
+            </a:r>
+            <a:endParaRPr lang="en-US" dirty="0"/>
+          </a:p>
+        </p:txBody>
+      </p:sp>
+      <p:sp>
+        <p:nvSpPr>
+          <p:cNvPr id="4" name="Slide Number Placeholder 3"/>
+          <p:cNvSpPr>
+            <a:spLocks noGrp="1"/>
+          </p:cNvSpPr>
+          <p:nvPr>
+            <p:ph type="sldNum" sz="quarter" idx="10"/>
+          </p:nvPr>
+        </p:nvSpPr>
+        <p:spPr/>
+        <p:txBody>
+          <a:bodyPr/>
+          <a:lstStyle/>
+          <a:p>
+            <a:fld id="{F7021451-1387-4CA6-816F-3879F97B5CBC}" type="slidenum">
+              <a:rPr lang="en-US"/>
+              <a:t>63</a:t>
+            </a:fld>
+            <a:endParaRPr lang="en-US"/>
+          </a:p>
+        </p:txBody>
+      </p:sp>
+    </p:spTree>
+    <p:extLst>
+      <p:ext uri="{BB962C8B-B14F-4D97-AF65-F5344CB8AC3E}">
+        <p14:creationId xmlns:p14="http://schemas.microsoft.com/office/powerpoint/2010/main" val="1024086991"/>
+      </p:ext>
+    </p:extLst>
+  </p:cSld>
+  <p:clrMapOvr>
+    <a:masterClrMapping/>
+  </p:clrMapOvr>
+</p:notes>
+</file>
+
+<file path=ppt/notesSlides/notesSlide64.xml><?xml version="1.0" encoding="utf-8"?>
+<p:notes xmlns:a="http://schemas.openxmlformats.org/drawingml/2006/main" xmlns:r="http://schemas.openxmlformats.org/officeDocument/2006/relationships" xmlns:p="http://schemas.openxmlformats.org/presentationml/2006/main">
+  <p:cSld>
+    <p:spTree>
+      <p:nvGrpSpPr>
+        <p:cNvPr id="1" name=""/>
+        <p:cNvGrpSpPr/>
+        <p:nvPr/>
+      </p:nvGrpSpPr>
+      <p:grpSpPr>
+        <a:xfrm>
+          <a:off x="0" y="0"/>
+          <a:ext cx="0" cy="0"/>
+          <a:chOff x="0" y="0"/>
+          <a:chExt cx="0" cy="0"/>
+        </a:xfrm>
+      </p:grpSpPr>
+      <p:sp>
+        <p:nvSpPr>
+          <p:cNvPr id="2" name="Slide Image Placeholder 1"/>
+          <p:cNvSpPr>
+            <a:spLocks noGrp="1" noRot="1" noChangeAspect="1"/>
+          </p:cNvSpPr>
+          <p:nvPr>
+            <p:ph type="sldImg"/>
+          </p:nvPr>
+        </p:nvSpPr>
+        <p:spPr/>
+      </p:sp>
+      <p:sp>
+        <p:nvSpPr>
+          <p:cNvPr id="3" name="Notes Placeholder 2"/>
+          <p:cNvSpPr>
+            <a:spLocks noGrp="1"/>
+          </p:cNvSpPr>
+          <p:nvPr>
+            <p:ph type="body" idx="1"/>
+          </p:nvPr>
+        </p:nvSpPr>
+        <p:spPr/>
+        <p:txBody>
+          <a:bodyPr/>
+          <a:lstStyle/>
+          <a:p>
+            <a:r>
+              <a:rPr lang="en-US" dirty="0"/>
+              <a:t>This slide is for me, the teacher: it gives the timing of the lesson and what to do if the projector is not available.</a:t>
+            </a:r>
+            <a:endParaRPr lang="en-US" dirty="0"/>
+          </a:p>
+        </p:txBody>
+      </p:sp>
+      <p:sp>
+        <p:nvSpPr>
+          <p:cNvPr id="4" name="Slide Number Placeholder 3"/>
+          <p:cNvSpPr>
+            <a:spLocks noGrp="1"/>
+          </p:cNvSpPr>
+          <p:nvPr>
+            <p:ph type="sldNum" sz="quarter" idx="10"/>
+          </p:nvPr>
+        </p:nvSpPr>
+        <p:spPr/>
+        <p:txBody>
+          <a:bodyPr/>
+          <a:lstStyle/>
+          <a:p>
+            <a:fld id="{F7021451-1387-4CA6-816F-3879F97B5CBC}" type="slidenum">
+              <a:rPr lang="en-US"/>
+              <a:t>64</a:t>
+            </a:fld>
+            <a:endParaRPr lang="en-US"/>
+          </a:p>
+        </p:txBody>
+      </p:sp>
+    </p:spTree>
+    <p:extLst>
+      <p:ext uri="{BB962C8B-B14F-4D97-AF65-F5344CB8AC3E}">
+        <p14:creationId xmlns:p14="http://schemas.microsoft.com/office/powerpoint/2010/main" val="1024086991"/>
+      </p:ext>
+    </p:extLst>
+  </p:cSld>
+  <p:clrMapOvr>
+    <a:masterClrMapping/>
+  </p:clrMapOvr>
+</p:notes>
+</file>
+
+<file path=ppt/notesSlides/notesSlide65.xml><?xml version="1.0" encoding="utf-8"?>
+<p:notes xmlns:a="http://schemas.openxmlformats.org/drawingml/2006/main" xmlns:r="http://schemas.openxmlformats.org/officeDocument/2006/relationships" xmlns:p="http://schemas.openxmlformats.org/presentationml/2006/main">
+  <p:cSld>
+    <p:spTree>
+      <p:nvGrpSpPr>
+        <p:cNvPr id="1" name=""/>
+        <p:cNvGrpSpPr/>
+        <p:nvPr/>
+      </p:nvGrpSpPr>
+      <p:grpSpPr>
+        <a:xfrm>
+          <a:off x="0" y="0"/>
+          <a:ext cx="0" cy="0"/>
+          <a:chOff x="0" y="0"/>
+          <a:chExt cx="0" cy="0"/>
+        </a:xfrm>
+      </p:grpSpPr>
+      <p:sp>
+        <p:nvSpPr>
+          <p:cNvPr id="2" name="Slide Image Placeholder 1"/>
+          <p:cNvSpPr>
+            <a:spLocks noGrp="1" noRot="1" noChangeAspect="1"/>
+          </p:cNvSpPr>
+          <p:nvPr>
+            <p:ph type="sldImg"/>
+          </p:nvPr>
+        </p:nvSpPr>
+        <p:spPr/>
+      </p:sp>
+      <p:sp>
+        <p:nvSpPr>
+          <p:cNvPr id="3" name="Notes Placeholder 2"/>
+          <p:cNvSpPr>
+            <a:spLocks noGrp="1"/>
+          </p:cNvSpPr>
+          <p:nvPr>
+            <p:ph type="body" idx="1"/>
+          </p:nvPr>
+        </p:nvSpPr>
+        <p:spPr/>
+        <p:txBody>
+          <a:bodyPr/>
+          <a:lstStyle/>
+          <a:p>
+            <a:r>
+              <a:rPr lang="en-US" dirty="0"/>
+              <a:t>These are the references and picture credits used to prepare this lesson.</a:t>
+            </a:r>
+            <a:endParaRPr lang="en-US" dirty="0"/>
+          </a:p>
+        </p:txBody>
+      </p:sp>
+      <p:sp>
+        <p:nvSpPr>
+          <p:cNvPr id="4" name="Slide Number Placeholder 3"/>
+          <p:cNvSpPr>
+            <a:spLocks noGrp="1"/>
+          </p:cNvSpPr>
+          <p:nvPr>
+            <p:ph type="sldNum" sz="quarter" idx="10"/>
+          </p:nvPr>
+        </p:nvSpPr>
+        <p:spPr/>
+        <p:txBody>
+          <a:bodyPr/>
+          <a:lstStyle/>
+          <a:p>
+            <a:fld id="{F7021451-1387-4CA6-816F-3879F97B5CBC}" type="slidenum">
+              <a:rPr lang="en-US"/>
+              <a:t>65</a:t>
             </a:fld>
             <a:endParaRPr lang="en-US"/>
           </a:p>
@@ -15271,129 +15716,9 @@
           </a:p>
         </p:txBody>
       </p:sp>
-      <p:sp>
-        <p:nvSpPr>
-          <p:cNvPr id="3" name="Text 1"/>
-          <p:cNvSpPr/>
-          <p:nvPr/>
-        </p:nvSpPr>
-        <p:spPr>
-          <a:xfrm>
-            <a:off x="365760" y="1005840"/>
-            <a:ext cx="11460175" cy="731520"/>
-          </a:xfrm>
-          <a:prstGeom prst="rect">
-            <a:avLst/>
-          </a:prstGeom>
-          <a:noFill/>
-          <a:ln/>
-        </p:spPr>
-        <p:txBody>
-          <a:bodyPr wrap="square" lIns="0" tIns="0" rIns="0" bIns="0" rtlCol="0" anchor="ctr">
-            <a:normAutofit/>
-          </a:bodyPr>
-          <a:lstStyle/>
-          <a:p>
-            <a:pPr algn="ctr" indent="0" marL="0">
-              <a:buNone/>
-            </a:pPr>
-            <a:r>
-              <a:rPr lang="en-US" sz="3600" b="1" dirty="0">
-                <a:solidFill>
-                  <a:srgbClr val="990011"/>
-                </a:solidFill>
-                <a:latin typeface="Times New Roman" pitchFamily="34" charset="0"/>
-                <a:ea typeface="Times New Roman" pitchFamily="34" charset="-122"/>
-                <a:cs typeface="Times New Roman" pitchFamily="34" charset="-120"/>
-              </a:rPr>
-              <a:t>1. Land and Sea Breezes</a:t>
-            </a:r>
-            <a:endParaRPr lang="en-US" sz="3600" dirty="0"/>
-          </a:p>
-        </p:txBody>
-      </p:sp>
-      <p:sp>
-        <p:nvSpPr>
-          <p:cNvPr id="4" name="Text 2"/>
-          <p:cNvSpPr/>
-          <p:nvPr/>
-        </p:nvSpPr>
-        <p:spPr>
-          <a:xfrm>
-            <a:off x="365760" y="1783080"/>
-            <a:ext cx="4846320" cy="4617720"/>
-          </a:xfrm>
-          <a:prstGeom prst="rect">
-            <a:avLst/>
-          </a:prstGeom>
-          <a:noFill/>
-          <a:ln/>
-        </p:spPr>
-        <p:txBody>
-          <a:bodyPr wrap="square" lIns="0" tIns="0" rIns="0" bIns="0" rtlCol="0" anchor="t"/>
-          <a:lstStyle/>
-          <a:p>
-            <a:pPr algn="l" indent="0" marL="0">
-              <a:spcAft>
-                <a:spcPts val="800"/>
-              </a:spcAft>
-              <a:buNone/>
-            </a:pPr>
-            <a:r>
-              <a:rPr lang="en-US" sz="3400" i="1" dirty="0">
-                <a:solidFill>
-                  <a:srgbClr val="111111"/>
-                </a:solidFill>
-                <a:latin typeface="Times New Roman" pitchFamily="34" charset="0"/>
-                <a:ea typeface="Times New Roman" pitchFamily="34" charset="-122"/>
-                <a:cs typeface="Times New Roman" pitchFamily="34" charset="-120"/>
-              </a:rPr>
-              <a:t>Land and sea breezes form as follows:</a:t>
-            </a:r>
-            <a:endParaRPr lang="en-US" sz="3400" dirty="0"/>
-          </a:p>
-          <a:p>
-            <a:pPr algn="l" indent="0" marL="0">
-              <a:spcAft>
-                <a:spcPts val="800"/>
-              </a:spcAft>
-              <a:buNone/>
-            </a:pPr>
-            <a:r>
-              <a:rPr lang="en-US" sz="3400" b="1" dirty="0">
-                <a:solidFill>
-                  <a:srgbClr val="111111"/>
-                </a:solidFill>
-                <a:latin typeface="Times New Roman" pitchFamily="34" charset="0"/>
-                <a:ea typeface="Times New Roman" pitchFamily="34" charset="-122"/>
-                <a:cs typeface="Times New Roman" pitchFamily="34" charset="-120"/>
-              </a:rPr>
-              <a:t>Sea breeze (day): </a:t>
-            </a:r>
-            <a:pPr algn="l" indent="0" marL="0">
-              <a:spcAft>
-                <a:spcPts val="800"/>
-              </a:spcAft>
-              <a:buNone/>
-            </a:pPr>
-            <a:r>
-              <a:rPr lang="en-US" sz="3400" dirty="0">
-                <a:solidFill>
-                  <a:srgbClr val="111111"/>
-                </a:solidFill>
-                <a:latin typeface="Times New Roman" pitchFamily="34" charset="0"/>
-                <a:ea typeface="Times New Roman" pitchFamily="34" charset="-122"/>
-                <a:cs typeface="Times New Roman" pitchFamily="34" charset="-120"/>
-              </a:rPr>
-              <a:t>The land heats faster than the sea, so low pressure forms over the land and cool, moist air blows in from the sea.</a:t>
-            </a:r>
-            <a:endParaRPr lang="en-US" sz="3400" dirty="0"/>
-          </a:p>
-        </p:txBody>
-      </p:sp>
       <p:pic>
         <p:nvPicPr>
-          <p:cNvPr id="5" name="Image 0" descr="/home/claude/f4/img/v2/seabreeze_day.png">    </p:cNvPr>
+          <p:cNvPr id="3" name="Image 0" descr="/home/claude/f4/img/minesec_sheet.png">    </p:cNvPr>
           <p:cNvPicPr>
             <a:picLocks noChangeAspect="1"/>
           </p:cNvPicPr>
@@ -15407,8 +15732,8 @@
         </p:blipFill>
         <p:spPr>
           <a:xfrm>
-            <a:off x="5349240" y="2617506"/>
-            <a:ext cx="6659575" cy="2601397"/>
+            <a:off x="0" y="658368"/>
+            <a:ext cx="2468880" cy="5833872"/>
           </a:xfrm>
           <a:prstGeom prst="rect">
             <a:avLst/>
@@ -15417,14 +15742,14 @@
       </p:pic>
       <p:sp>
         <p:nvSpPr>
-          <p:cNvPr id="6" name="Text 3"/>
+          <p:cNvPr id="4" name="Text 1"/>
           <p:cNvSpPr/>
           <p:nvPr/>
         </p:nvSpPr>
         <p:spPr>
           <a:xfrm>
-            <a:off x="5349240" y="6089904"/>
-            <a:ext cx="6659575" cy="347472"/>
+            <a:off x="2697480" y="1005840"/>
+            <a:ext cx="9174175" cy="731520"/>
           </a:xfrm>
           <a:prstGeom prst="rect">
             <a:avLst/>
@@ -15433,24 +15758,105 @@
           <a:ln/>
         </p:spPr>
         <p:txBody>
-          <a:bodyPr wrap="square" lIns="0" tIns="0" rIns="0" bIns="0" rtlCol="0" anchor="ctr"/>
+          <a:bodyPr wrap="square" lIns="0" tIns="0" rIns="0" bIns="0" rtlCol="0" anchor="ctr">
+            <a:normAutofit/>
+          </a:bodyPr>
           <a:lstStyle/>
           <a:p>
             <a:pPr algn="ctr" indent="0" marL="0">
               <a:buNone/>
             </a:pPr>
             <a:r>
-              <a:rPr lang="en-US" sz="1600" i="1" dirty="0">
-                <a:solidFill>
-                  <a:srgbClr val="555555"/>
+              <a:rPr lang="en-US" sz="3600" b="1" dirty="0">
+                <a:solidFill>
+                  <a:srgbClr val="990011"/>
                 </a:solidFill>
                 <a:latin typeface="Times New Roman" pitchFamily="34" charset="0"/>
                 <a:ea typeface="Times New Roman" pitchFamily="34" charset="-122"/>
                 <a:cs typeface="Times New Roman" pitchFamily="34" charset="-120"/>
               </a:rPr>
-              <a:t>Illustration: the sea breeze</a:t>
-            </a:r>
-            <a:endParaRPr lang="en-US" sz="1600" dirty="0"/>
+              <a:t>1. Meaning and Categories of Local Winds</a:t>
+            </a:r>
+            <a:endParaRPr lang="en-US" sz="3600" dirty="0"/>
+          </a:p>
+        </p:txBody>
+      </p:sp>
+      <p:sp>
+        <p:nvSpPr>
+          <p:cNvPr id="5" name="Text 2"/>
+          <p:cNvSpPr/>
+          <p:nvPr/>
+        </p:nvSpPr>
+        <p:spPr>
+          <a:xfrm>
+            <a:off x="2697480" y="1783080"/>
+            <a:ext cx="9174175" cy="4663440"/>
+          </a:xfrm>
+          <a:prstGeom prst="rect">
+            <a:avLst/>
+          </a:prstGeom>
+          <a:noFill/>
+          <a:ln/>
+        </p:spPr>
+        <p:txBody>
+          <a:bodyPr wrap="square" lIns="0" tIns="0" rIns="0" bIns="0" rtlCol="0" anchor="t"/>
+          <a:lstStyle/>
+          <a:p>
+            <a:pPr algn="l" indent="0" marL="0">
+              <a:spcAft>
+                <a:spcPts val="800"/>
+              </a:spcAft>
+              <a:buNone/>
+            </a:pPr>
+            <a:r>
+              <a:rPr lang="en-US" sz="4000" i="1" dirty="0">
+                <a:solidFill>
+                  <a:srgbClr val="111111"/>
+                </a:solidFill>
+                <a:latin typeface="Times New Roman" pitchFamily="34" charset="0"/>
+                <a:ea typeface="Times New Roman" pitchFamily="34" charset="-122"/>
+                <a:cs typeface="Times New Roman" pitchFamily="34" charset="-120"/>
+              </a:rPr>
+              <a:t>Local winds are explained as follows:</a:t>
+            </a:r>
+            <a:endParaRPr lang="en-US" sz="4000" dirty="0"/>
+          </a:p>
+          <a:p>
+            <a:pPr algn="l" indent="0" marL="0">
+              <a:spcAft>
+                <a:spcPts val="800"/>
+              </a:spcAft>
+              <a:buNone/>
+            </a:pPr>
+            <a:r>
+              <a:rPr lang="en-US" sz="4000" b="1" dirty="0">
+                <a:solidFill>
+                  <a:srgbClr val="111111"/>
+                </a:solidFill>
+                <a:latin typeface="Times New Roman" pitchFamily="34" charset="0"/>
+                <a:ea typeface="Times New Roman" pitchFamily="34" charset="-122"/>
+                <a:cs typeface="Times New Roman" pitchFamily="34" charset="-120"/>
+              </a:rPr>
+              <a:t>Meaning: </a:t>
+            </a:r>
+            <a:pPr algn="l" indent="0" marL="0">
+              <a:spcAft>
+                <a:spcPts val="800"/>
+              </a:spcAft>
+              <a:buNone/>
+            </a:pPr>
+            <a:r>
+              <a:rPr lang="en-US" sz="4000" dirty="0">
+                <a:solidFill>
+                  <a:srgbClr val="111111"/>
+                </a:solidFill>
+                <a:latin typeface="Times New Roman" pitchFamily="34" charset="0"/>
+                <a:ea typeface="Times New Roman" pitchFamily="34" charset="-122"/>
+                <a:cs typeface="Times New Roman" pitchFamily="34" charset="-120"/>
+              </a:rPr>
+              <a:t>Local winds blow over a small area, such as a coast or a valley, and usually last only a few hours. They are caused by local differences of heating between land and sea or between slopes and valleys, or by relief.</a:t>
+            </a:r>
+            <a:endParaRPr lang="en-US" sz="4000" dirty="0"/>
           </a:p>
         </p:txBody>
       </p:sp>
@@ -15805,9 +16211,109 @@
           </a:p>
         </p:txBody>
       </p:sp>
+      <p:sp>
+        <p:nvSpPr>
+          <p:cNvPr id="3" name="Text 1"/>
+          <p:cNvSpPr/>
+          <p:nvPr/>
+        </p:nvSpPr>
+        <p:spPr>
+          <a:xfrm>
+            <a:off x="365760" y="1005840"/>
+            <a:ext cx="11460175" cy="731520"/>
+          </a:xfrm>
+          <a:prstGeom prst="rect">
+            <a:avLst/>
+          </a:prstGeom>
+          <a:noFill/>
+          <a:ln/>
+        </p:spPr>
+        <p:txBody>
+          <a:bodyPr wrap="square" lIns="0" tIns="0" rIns="0" bIns="0" rtlCol="0" anchor="ctr">
+            <a:normAutofit/>
+          </a:bodyPr>
+          <a:lstStyle/>
+          <a:p>
+            <a:pPr algn="ctr" indent="0" marL="0">
+              <a:buNone/>
+            </a:pPr>
+            <a:r>
+              <a:rPr lang="en-US" sz="3600" b="1" dirty="0">
+                <a:solidFill>
+                  <a:srgbClr val="990011"/>
+                </a:solidFill>
+                <a:latin typeface="Times New Roman" pitchFamily="34" charset="0"/>
+                <a:ea typeface="Times New Roman" pitchFamily="34" charset="-122"/>
+                <a:cs typeface="Times New Roman" pitchFamily="34" charset="-120"/>
+              </a:rPr>
+              <a:t>1. Meaning and Categories of Local Winds</a:t>
+            </a:r>
+            <a:endParaRPr lang="en-US" sz="3600" dirty="0"/>
+          </a:p>
+        </p:txBody>
+      </p:sp>
+      <p:sp>
+        <p:nvSpPr>
+          <p:cNvPr id="4" name="Text 2"/>
+          <p:cNvSpPr/>
+          <p:nvPr/>
+        </p:nvSpPr>
+        <p:spPr>
+          <a:xfrm>
+            <a:off x="365760" y="1783080"/>
+            <a:ext cx="6035040" cy="4617720"/>
+          </a:xfrm>
+          <a:prstGeom prst="rect">
+            <a:avLst/>
+          </a:prstGeom>
+          <a:noFill/>
+          <a:ln/>
+        </p:spPr>
+        <p:txBody>
+          <a:bodyPr wrap="square" lIns="0" tIns="0" rIns="0" bIns="0" rtlCol="0" anchor="t"/>
+          <a:lstStyle/>
+          <a:p>
+            <a:pPr algn="l" indent="0" marL="0">
+              <a:spcAft>
+                <a:spcPts val="800"/>
+              </a:spcAft>
+              <a:buNone/>
+            </a:pPr>
+            <a:r>
+              <a:rPr lang="en-US" sz="3600" b="1" dirty="0">
+                <a:solidFill>
+                  <a:srgbClr val="111111"/>
+                </a:solidFill>
+                <a:latin typeface="Times New Roman" pitchFamily="34" charset="0"/>
+                <a:ea typeface="Times New Roman" pitchFamily="34" charset="-122"/>
+                <a:cs typeface="Times New Roman" pitchFamily="34" charset="-120"/>
+              </a:rPr>
+              <a:t>Categories: </a:t>
+            </a:r>
+            <a:pPr algn="l" indent="0" marL="0">
+              <a:spcAft>
+                <a:spcPts val="800"/>
+              </a:spcAft>
+              <a:buNone/>
+            </a:pPr>
+            <a:r>
+              <a:rPr lang="en-US" sz="3600" dirty="0">
+                <a:solidFill>
+                  <a:srgbClr val="111111"/>
+                </a:solidFill>
+                <a:latin typeface="Times New Roman" pitchFamily="34" charset="0"/>
+                <a:ea typeface="Times New Roman" pitchFamily="34" charset="-122"/>
+                <a:cs typeface="Times New Roman" pitchFamily="34" charset="-120"/>
+              </a:rPr>
+              <a:t>Thermal local winds are caused by unequal heating, such as land and sea breezes and anabatic and katabatic winds. Relief (dynamic) local winds are caused by air crossing mountains, such as the Foehn.</a:t>
+            </a:r>
+            <a:endParaRPr lang="en-US" sz="3600" dirty="0"/>
+          </a:p>
+        </p:txBody>
+      </p:sp>
       <p:pic>
         <p:nvPicPr>
-          <p:cNvPr id="3" name="Image 0" descr="/home/claude/f4/img/minesec_sheet.png">    </p:cNvPr>
+          <p:cNvPr id="5" name="Image 0" descr="/home/claude/f4/img/v2/met2_local.png">    </p:cNvPr>
           <p:cNvPicPr>
             <a:picLocks noChangeAspect="1"/>
           </p:cNvPicPr>
@@ -15821,8 +16327,8 @@
         </p:blipFill>
         <p:spPr>
           <a:xfrm>
-            <a:off x="0" y="658368"/>
-            <a:ext cx="5120640" cy="5833872"/>
+            <a:off x="6537960" y="2849678"/>
+            <a:ext cx="5470855" cy="2137053"/>
           </a:xfrm>
           <a:prstGeom prst="rect">
             <a:avLst/>
@@ -15831,14 +16337,14 @@
       </p:pic>
       <p:sp>
         <p:nvSpPr>
-          <p:cNvPr id="4" name="Text 1"/>
+          <p:cNvPr id="6" name="Text 3"/>
           <p:cNvSpPr/>
           <p:nvPr/>
         </p:nvSpPr>
         <p:spPr>
           <a:xfrm>
-            <a:off x="5349240" y="1005840"/>
-            <a:ext cx="6522415" cy="731520"/>
+            <a:off x="6537960" y="6089904"/>
+            <a:ext cx="5470855" cy="347472"/>
           </a:xfrm>
           <a:prstGeom prst="rect">
             <a:avLst/>
@@ -15847,85 +16353,24 @@
           <a:ln/>
         </p:spPr>
         <p:txBody>
-          <a:bodyPr wrap="square" lIns="0" tIns="0" rIns="0" bIns="0" rtlCol="0" anchor="ctr">
-            <a:normAutofit/>
-          </a:bodyPr>
+          <a:bodyPr wrap="square" lIns="0" tIns="0" rIns="0" bIns="0" rtlCol="0" anchor="ctr"/>
           <a:lstStyle/>
           <a:p>
             <a:pPr algn="ctr" indent="0" marL="0">
               <a:buNone/>
             </a:pPr>
             <a:r>
-              <a:rPr lang="en-US" sz="3600" b="1" dirty="0">
-                <a:solidFill>
-                  <a:srgbClr val="990011"/>
+              <a:rPr lang="en-US" sz="1600" i="1" dirty="0">
+                <a:solidFill>
+                  <a:srgbClr val="555555"/>
                 </a:solidFill>
                 <a:latin typeface="Times New Roman" pitchFamily="34" charset="0"/>
                 <a:ea typeface="Times New Roman" pitchFamily="34" charset="-122"/>
                 <a:cs typeface="Times New Roman" pitchFamily="34" charset="-120"/>
               </a:rPr>
-              <a:t>1. Land and Sea Breezes</a:t>
-            </a:r>
-            <a:endParaRPr lang="en-US" sz="3600" dirty="0"/>
-          </a:p>
-        </p:txBody>
-      </p:sp>
-      <p:sp>
-        <p:nvSpPr>
-          <p:cNvPr id="5" name="Text 2"/>
-          <p:cNvSpPr/>
-          <p:nvPr/>
-        </p:nvSpPr>
-        <p:spPr>
-          <a:xfrm>
-            <a:off x="5349240" y="1783080"/>
-            <a:ext cx="6522415" cy="4663440"/>
-          </a:xfrm>
-          <a:prstGeom prst="rect">
-            <a:avLst/>
-          </a:prstGeom>
-          <a:noFill/>
-          <a:ln/>
-        </p:spPr>
-        <p:txBody>
-          <a:bodyPr wrap="square" lIns="0" tIns="0" rIns="0" bIns="0" rtlCol="0" anchor="t"/>
-          <a:lstStyle/>
-          <a:p>
-            <a:pPr algn="l" indent="0" marL="0">
-              <a:spcAft>
-                <a:spcPts val="800"/>
-              </a:spcAft>
-              <a:buNone/>
-            </a:pPr>
-            <a:r>
-              <a:rPr lang="en-US" sz="4000" b="1" dirty="0">
-                <a:solidFill>
-                  <a:srgbClr val="111111"/>
-                </a:solidFill>
-                <a:latin typeface="Times New Roman" pitchFamily="34" charset="0"/>
-                <a:ea typeface="Times New Roman" pitchFamily="34" charset="-122"/>
-                <a:cs typeface="Times New Roman" pitchFamily="34" charset="-120"/>
-              </a:rPr>
-              <a:t>Land breeze (night): </a:t>
-            </a:r>
-            <a:pPr algn="l" indent="0" marL="0">
-              <a:spcAft>
-                <a:spcPts val="800"/>
-              </a:spcAft>
-              <a:buNone/>
-            </a:pPr>
-            <a:r>
-              <a:rPr lang="en-US" sz="4000" dirty="0">
-                <a:solidFill>
-                  <a:srgbClr val="111111"/>
-                </a:solidFill>
-                <a:latin typeface="Times New Roman" pitchFamily="34" charset="0"/>
-                <a:ea typeface="Times New Roman" pitchFamily="34" charset="-122"/>
-                <a:cs typeface="Times New Roman" pitchFamily="34" charset="-120"/>
-              </a:rPr>
-              <a:t>The land cools faster than the sea, so high pressure forms over the land and air blows out to sea.</a:t>
-            </a:r>
-            <a:endParaRPr lang="en-US" sz="4000" dirty="0"/>
+              <a:t>Illustration: local winds</a:t>
+            </a:r>
+            <a:endParaRPr lang="en-US" sz="1600" dirty="0"/>
           </a:p>
         </p:txBody>
       </p:sp>
@@ -16076,7 +16521,7 @@
                 <a:ea typeface="Times New Roman" pitchFamily="34" charset="-122"/>
                 <a:cs typeface="Times New Roman" pitchFamily="34" charset="-120"/>
               </a:rPr>
-              <a:t>1. Land and Sea Breezes</a:t>
+              <a:t>2. Land and Sea Breezes</a:t>
             </a:r>
             <a:endParaRPr lang="en-US" sz="3600" dirty="0"/>
           </a:p>
@@ -16091,7 +16536,7 @@
         <p:spPr>
           <a:xfrm>
             <a:off x="365760" y="1783080"/>
-            <a:ext cx="4846320" cy="4617720"/>
+            <a:ext cx="6035040" cy="4617720"/>
           </a:xfrm>
           <a:prstGeom prst="rect">
             <a:avLst/>
@@ -16110,7 +16555,7 @@
               <a:buNone/>
             </a:pPr>
             <a:r>
-              <a:rPr lang="en-US" sz="3600" b="1" dirty="0">
+              <a:rPr lang="en-US" sz="3200" i="1" dirty="0">
                 <a:solidFill>
                   <a:srgbClr val="111111"/>
                 </a:solidFill>
@@ -16118,8 +16563,11 @@
                 <a:ea typeface="Times New Roman" pitchFamily="34" charset="-122"/>
                 <a:cs typeface="Times New Roman" pitchFamily="34" charset="-120"/>
               </a:rPr>
-              <a:t>Example: </a:t>
-            </a:r>
+              <a:t>Land and sea breezes form as follows:</a:t>
+            </a:r>
+            <a:endParaRPr lang="en-US" sz="3200" dirty="0"/>
+          </a:p>
+          <a:p>
             <a:pPr algn="l" indent="0" marL="0">
               <a:spcAft>
                 <a:spcPts val="800"/>
@@ -16127,7 +16575,7 @@
               <a:buNone/>
             </a:pPr>
             <a:r>
-              <a:rPr lang="en-US" sz="3600" dirty="0">
+              <a:rPr lang="en-US" sz="3200" b="1" dirty="0">
                 <a:solidFill>
                   <a:srgbClr val="111111"/>
                 </a:solidFill>
@@ -16135,15 +16583,32 @@
                 <a:ea typeface="Times New Roman" pitchFamily="34" charset="-122"/>
                 <a:cs typeface="Times New Roman" pitchFamily="34" charset="-120"/>
               </a:rPr>
-              <a:t>Coastal towns such as Limbe, Kribi and Douala feel sea breezes in the afternoon.</a:t>
-            </a:r>
-            <a:endParaRPr lang="en-US" sz="3600" dirty="0"/>
+              <a:t>Sea breeze (by day): </a:t>
+            </a:r>
+            <a:pPr algn="l" indent="0" marL="0">
+              <a:spcAft>
+                <a:spcPts val="800"/>
+              </a:spcAft>
+              <a:buNone/>
+            </a:pPr>
+            <a:r>
+              <a:rPr lang="en-US" sz="3200" dirty="0">
+                <a:solidFill>
+                  <a:srgbClr val="111111"/>
+                </a:solidFill>
+                <a:latin typeface="Times New Roman" pitchFamily="34" charset="0"/>
+                <a:ea typeface="Times New Roman" pitchFamily="34" charset="-122"/>
+                <a:cs typeface="Times New Roman" pitchFamily="34" charset="-120"/>
+              </a:rPr>
+              <a:t>By day, the land heats faster than the sea, so the air above it rises and a low pressure forms. Cool, moist air then blows from the sea towards the land, usually from late morning to evening.</a:t>
+            </a:r>
+            <a:endParaRPr lang="en-US" sz="3200" dirty="0"/>
           </a:p>
         </p:txBody>
       </p:sp>
       <p:pic>
         <p:nvPicPr>
-          <p:cNvPr id="5" name="Image 0" descr="/home/claude/f4/img/v2/f2t_fishing.jpg">    </p:cNvPr>
+          <p:cNvPr id="5" name="Image 0" descr="/home/claude/f4/img/v2/seabreeze_day.png">    </p:cNvPr>
           <p:cNvPicPr>
             <a:picLocks noChangeAspect="1"/>
           </p:cNvPicPr>
@@ -16157,8 +16622,8 @@
         </p:blipFill>
         <p:spPr>
           <a:xfrm>
-            <a:off x="5349240" y="2071212"/>
-            <a:ext cx="6659575" cy="3693983"/>
+            <a:off x="6537960" y="2849678"/>
+            <a:ext cx="5470855" cy="2137053"/>
           </a:xfrm>
           <a:prstGeom prst="rect">
             <a:avLst/>
@@ -16173,8 +16638,8 @@
         </p:nvSpPr>
         <p:spPr>
           <a:xfrm>
-            <a:off x="5349240" y="6089904"/>
-            <a:ext cx="6659575" cy="347472"/>
+            <a:off x="6537960" y="6089904"/>
+            <a:ext cx="5470855" cy="347472"/>
           </a:xfrm>
           <a:prstGeom prst="rect">
             <a:avLst/>
@@ -16198,7 +16663,7 @@
                 <a:ea typeface="Times New Roman" pitchFamily="34" charset="-122"/>
                 <a:cs typeface="Times New Roman" pitchFamily="34" charset="-120"/>
               </a:rPr>
-              <a:t>Illustration: fishermen at sea</a:t>
+              <a:t>Illustration: the sea breeze</a:t>
             </a:r>
             <a:endParaRPr lang="en-US" sz="1600" dirty="0"/>
           </a:p>
@@ -16316,129 +16781,9 @@
           </a:p>
         </p:txBody>
       </p:sp>
-      <p:sp>
-        <p:nvSpPr>
-          <p:cNvPr id="3" name="Text 1"/>
-          <p:cNvSpPr/>
-          <p:nvPr/>
-        </p:nvSpPr>
-        <p:spPr>
-          <a:xfrm>
-            <a:off x="365760" y="1005840"/>
-            <a:ext cx="11460175" cy="731520"/>
-          </a:xfrm>
-          <a:prstGeom prst="rect">
-            <a:avLst/>
-          </a:prstGeom>
-          <a:noFill/>
-          <a:ln/>
-        </p:spPr>
-        <p:txBody>
-          <a:bodyPr wrap="square" lIns="0" tIns="0" rIns="0" bIns="0" rtlCol="0" anchor="ctr">
-            <a:normAutofit/>
-          </a:bodyPr>
-          <a:lstStyle/>
-          <a:p>
-            <a:pPr algn="ctr" indent="0" marL="0">
-              <a:buNone/>
-            </a:pPr>
-            <a:r>
-              <a:rPr lang="en-US" sz="3600" b="1" dirty="0">
-                <a:solidFill>
-                  <a:srgbClr val="990011"/>
-                </a:solidFill>
-                <a:latin typeface="Times New Roman" pitchFamily="34" charset="0"/>
-                <a:ea typeface="Times New Roman" pitchFamily="34" charset="-122"/>
-                <a:cs typeface="Times New Roman" pitchFamily="34" charset="-120"/>
-              </a:rPr>
-              <a:t>2. Valley and Mountain Winds</a:t>
-            </a:r>
-            <a:endParaRPr lang="en-US" sz="3600" dirty="0"/>
-          </a:p>
-        </p:txBody>
-      </p:sp>
-      <p:sp>
-        <p:nvSpPr>
-          <p:cNvPr id="4" name="Text 2"/>
-          <p:cNvSpPr/>
-          <p:nvPr/>
-        </p:nvSpPr>
-        <p:spPr>
-          <a:xfrm>
-            <a:off x="365760" y="1783080"/>
-            <a:ext cx="4846320" cy="4617720"/>
-          </a:xfrm>
-          <a:prstGeom prst="rect">
-            <a:avLst/>
-          </a:prstGeom>
-          <a:noFill/>
-          <a:ln/>
-        </p:spPr>
-        <p:txBody>
-          <a:bodyPr wrap="square" lIns="0" tIns="0" rIns="0" bIns="0" rtlCol="0" anchor="t"/>
-          <a:lstStyle/>
-          <a:p>
-            <a:pPr algn="l" indent="0" marL="0">
-              <a:spcAft>
-                <a:spcPts val="800"/>
-              </a:spcAft>
-              <a:buNone/>
-            </a:pPr>
-            <a:r>
-              <a:rPr lang="en-US" sz="3600" i="1" dirty="0">
-                <a:solidFill>
-                  <a:srgbClr val="111111"/>
-                </a:solidFill>
-                <a:latin typeface="Times New Roman" pitchFamily="34" charset="0"/>
-                <a:ea typeface="Times New Roman" pitchFamily="34" charset="-122"/>
-                <a:cs typeface="Times New Roman" pitchFamily="34" charset="-120"/>
-              </a:rPr>
-              <a:t>Valley and mountain winds form as follows:</a:t>
-            </a:r>
-            <a:endParaRPr lang="en-US" sz="3600" dirty="0"/>
-          </a:p>
-          <a:p>
-            <a:pPr algn="l" indent="0" marL="0">
-              <a:spcAft>
-                <a:spcPts val="800"/>
-              </a:spcAft>
-              <a:buNone/>
-            </a:pPr>
-            <a:r>
-              <a:rPr lang="en-US" sz="3600" b="1" dirty="0">
-                <a:solidFill>
-                  <a:srgbClr val="111111"/>
-                </a:solidFill>
-                <a:latin typeface="Times New Roman" pitchFamily="34" charset="0"/>
-                <a:ea typeface="Times New Roman" pitchFamily="34" charset="-122"/>
-                <a:cs typeface="Times New Roman" pitchFamily="34" charset="-120"/>
-              </a:rPr>
-              <a:t>Anabatic (valley) wind: </a:t>
-            </a:r>
-            <a:pPr algn="l" indent="0" marL="0">
-              <a:spcAft>
-                <a:spcPts val="800"/>
-              </a:spcAft>
-              <a:buNone/>
-            </a:pPr>
-            <a:r>
-              <a:rPr lang="en-US" sz="3600" dirty="0">
-                <a:solidFill>
-                  <a:srgbClr val="111111"/>
-                </a:solidFill>
-                <a:latin typeface="Times New Roman" pitchFamily="34" charset="0"/>
-                <a:ea typeface="Times New Roman" pitchFamily="34" charset="-122"/>
-                <a:cs typeface="Times New Roman" pitchFamily="34" charset="-120"/>
-              </a:rPr>
-              <a:t>By day, the sun heats the slopes, and the warm, light air rises up the slopes from the valley.</a:t>
-            </a:r>
-            <a:endParaRPr lang="en-US" sz="3600" dirty="0"/>
-          </a:p>
-        </p:txBody>
-      </p:sp>
       <p:pic>
         <p:nvPicPr>
-          <p:cNvPr id="5" name="Image 0" descr="/home/claude/f4/img/v2/anabatic_big.png">    </p:cNvPr>
+          <p:cNvPr id="3" name="Image 0" descr="/home/claude/f4/img/minesec_sheet.png">    </p:cNvPr>
           <p:cNvPicPr>
             <a:picLocks noChangeAspect="1"/>
           </p:cNvPicPr>
@@ -16452,8 +16797,8 @@
         </p:blipFill>
         <p:spPr>
           <a:xfrm>
-            <a:off x="5349240" y="2617506"/>
-            <a:ext cx="6659575" cy="2601397"/>
+            <a:off x="0" y="658368"/>
+            <a:ext cx="5120640" cy="5833872"/>
           </a:xfrm>
           <a:prstGeom prst="rect">
             <a:avLst/>
@@ -16462,14 +16807,14 @@
       </p:pic>
       <p:sp>
         <p:nvSpPr>
-          <p:cNvPr id="6" name="Text 3"/>
+          <p:cNvPr id="4" name="Text 1"/>
           <p:cNvSpPr/>
           <p:nvPr/>
         </p:nvSpPr>
         <p:spPr>
           <a:xfrm>
-            <a:off x="5349240" y="6089904"/>
-            <a:ext cx="6659575" cy="347472"/>
+            <a:off x="5349240" y="1005840"/>
+            <a:ext cx="6522415" cy="731520"/>
           </a:xfrm>
           <a:prstGeom prst="rect">
             <a:avLst/>
@@ -16478,24 +16823,85 @@
           <a:ln/>
         </p:spPr>
         <p:txBody>
-          <a:bodyPr wrap="square" lIns="0" tIns="0" rIns="0" bIns="0" rtlCol="0" anchor="ctr"/>
+          <a:bodyPr wrap="square" lIns="0" tIns="0" rIns="0" bIns="0" rtlCol="0" anchor="ctr">
+            <a:normAutofit/>
+          </a:bodyPr>
           <a:lstStyle/>
           <a:p>
             <a:pPr algn="ctr" indent="0" marL="0">
               <a:buNone/>
             </a:pPr>
             <a:r>
-              <a:rPr lang="en-US" sz="1600" i="1" dirty="0">
-                <a:solidFill>
-                  <a:srgbClr val="555555"/>
+              <a:rPr lang="en-US" sz="3600" b="1" dirty="0">
+                <a:solidFill>
+                  <a:srgbClr val="990011"/>
                 </a:solidFill>
                 <a:latin typeface="Times New Roman" pitchFamily="34" charset="0"/>
                 <a:ea typeface="Times New Roman" pitchFamily="34" charset="-122"/>
                 <a:cs typeface="Times New Roman" pitchFamily="34" charset="-120"/>
               </a:rPr>
-              <a:t>Illustration: anabatic and katabatic winds</a:t>
-            </a:r>
-            <a:endParaRPr lang="en-US" sz="1600" dirty="0"/>
+              <a:t>2. Land and Sea Breezes</a:t>
+            </a:r>
+            <a:endParaRPr lang="en-US" sz="3600" dirty="0"/>
+          </a:p>
+        </p:txBody>
+      </p:sp>
+      <p:sp>
+        <p:nvSpPr>
+          <p:cNvPr id="5" name="Text 2"/>
+          <p:cNvSpPr/>
+          <p:nvPr/>
+        </p:nvSpPr>
+        <p:spPr>
+          <a:xfrm>
+            <a:off x="5349240" y="1783080"/>
+            <a:ext cx="6522415" cy="4663440"/>
+          </a:xfrm>
+          <a:prstGeom prst="rect">
+            <a:avLst/>
+          </a:prstGeom>
+          <a:noFill/>
+          <a:ln/>
+        </p:spPr>
+        <p:txBody>
+          <a:bodyPr wrap="square" lIns="0" tIns="0" rIns="0" bIns="0" rtlCol="0" anchor="t"/>
+          <a:lstStyle/>
+          <a:p>
+            <a:pPr algn="l" indent="0" marL="0">
+              <a:spcAft>
+                <a:spcPts val="800"/>
+              </a:spcAft>
+              <a:buNone/>
+            </a:pPr>
+            <a:r>
+              <a:rPr lang="en-US" sz="4000" b="1" dirty="0">
+                <a:solidFill>
+                  <a:srgbClr val="111111"/>
+                </a:solidFill>
+                <a:latin typeface="Times New Roman" pitchFamily="34" charset="0"/>
+                <a:ea typeface="Times New Roman" pitchFamily="34" charset="-122"/>
+                <a:cs typeface="Times New Roman" pitchFamily="34" charset="-120"/>
+              </a:rPr>
+              <a:t>Land breeze (at night): </a:t>
+            </a:r>
+            <a:pPr algn="l" indent="0" marL="0">
+              <a:spcAft>
+                <a:spcPts val="800"/>
+              </a:spcAft>
+              <a:buNone/>
+            </a:pPr>
+            <a:r>
+              <a:rPr lang="en-US" sz="4000" dirty="0">
+                <a:solidFill>
+                  <a:srgbClr val="111111"/>
+                </a:solidFill>
+                <a:latin typeface="Times New Roman" pitchFamily="34" charset="0"/>
+                <a:ea typeface="Times New Roman" pitchFamily="34" charset="-122"/>
+                <a:cs typeface="Times New Roman" pitchFamily="34" charset="-120"/>
+              </a:rPr>
+              <a:t>At night, the land cools faster than the sea, so a high pressure forms over it. Air then blows gently from the land towards the sea, which is warmer.</a:t>
+            </a:r>
+            <a:endParaRPr lang="en-US" sz="4000" dirty="0"/>
           </a:p>
         </p:txBody>
       </p:sp>
@@ -16611,9 +17017,109 @@
           </a:p>
         </p:txBody>
       </p:sp>
+      <p:sp>
+        <p:nvSpPr>
+          <p:cNvPr id="3" name="Text 1"/>
+          <p:cNvSpPr/>
+          <p:nvPr/>
+        </p:nvSpPr>
+        <p:spPr>
+          <a:xfrm>
+            <a:off x="365760" y="1005840"/>
+            <a:ext cx="11460175" cy="731520"/>
+          </a:xfrm>
+          <a:prstGeom prst="rect">
+            <a:avLst/>
+          </a:prstGeom>
+          <a:noFill/>
+          <a:ln/>
+        </p:spPr>
+        <p:txBody>
+          <a:bodyPr wrap="square" lIns="0" tIns="0" rIns="0" bIns="0" rtlCol="0" anchor="ctr">
+            <a:normAutofit/>
+          </a:bodyPr>
+          <a:lstStyle/>
+          <a:p>
+            <a:pPr algn="ctr" indent="0" marL="0">
+              <a:buNone/>
+            </a:pPr>
+            <a:r>
+              <a:rPr lang="en-US" sz="3600" b="1" dirty="0">
+                <a:solidFill>
+                  <a:srgbClr val="990011"/>
+                </a:solidFill>
+                <a:latin typeface="Times New Roman" pitchFamily="34" charset="0"/>
+                <a:ea typeface="Times New Roman" pitchFamily="34" charset="-122"/>
+                <a:cs typeface="Times New Roman" pitchFamily="34" charset="-120"/>
+              </a:rPr>
+              <a:t>2. Land and Sea Breezes</a:t>
+            </a:r>
+            <a:endParaRPr lang="en-US" sz="3600" dirty="0"/>
+          </a:p>
+        </p:txBody>
+      </p:sp>
+      <p:sp>
+        <p:nvSpPr>
+          <p:cNvPr id="4" name="Text 2"/>
+          <p:cNvSpPr/>
+          <p:nvPr/>
+        </p:nvSpPr>
+        <p:spPr>
+          <a:xfrm>
+            <a:off x="365760" y="1783080"/>
+            <a:ext cx="6035040" cy="4617720"/>
+          </a:xfrm>
+          <a:prstGeom prst="rect">
+            <a:avLst/>
+          </a:prstGeom>
+          <a:noFill/>
+          <a:ln/>
+        </p:spPr>
+        <p:txBody>
+          <a:bodyPr wrap="square" lIns="0" tIns="0" rIns="0" bIns="0" rtlCol="0" anchor="t"/>
+          <a:lstStyle/>
+          <a:p>
+            <a:pPr algn="l" indent="0" marL="0">
+              <a:spcAft>
+                <a:spcPts val="800"/>
+              </a:spcAft>
+              <a:buNone/>
+            </a:pPr>
+            <a:r>
+              <a:rPr lang="en-US" sz="3200" b="1" dirty="0">
+                <a:solidFill>
+                  <a:srgbClr val="111111"/>
+                </a:solidFill>
+                <a:latin typeface="Times New Roman" pitchFamily="34" charset="0"/>
+                <a:ea typeface="Times New Roman" pitchFamily="34" charset="-122"/>
+                <a:cs typeface="Times New Roman" pitchFamily="34" charset="-120"/>
+              </a:rPr>
+              <a:t>Examples and effects: </a:t>
+            </a:r>
+            <a:pPr algn="l" indent="0" marL="0">
+              <a:spcAft>
+                <a:spcPts val="800"/>
+              </a:spcAft>
+              <a:buNone/>
+            </a:pPr>
+            <a:r>
+              <a:rPr lang="en-US" sz="3200" dirty="0">
+                <a:solidFill>
+                  <a:srgbClr val="111111"/>
+                </a:solidFill>
+                <a:latin typeface="Times New Roman" pitchFamily="34" charset="0"/>
+                <a:ea typeface="Times New Roman" pitchFamily="34" charset="-122"/>
+                <a:cs typeface="Times New Roman" pitchFamily="34" charset="-120"/>
+              </a:rPr>
+              <a:t>Coastal towns such as Limbe, Kribi and Douala feel the sea breeze on hot afternoons, which makes them more comfortable. Fishermen use the land breeze to sail out to sea at dawn and the sea breeze to return in the afternoon.</a:t>
+            </a:r>
+            <a:endParaRPr lang="en-US" sz="3200" dirty="0"/>
+          </a:p>
+        </p:txBody>
+      </p:sp>
       <p:pic>
         <p:nvPicPr>
-          <p:cNvPr id="3" name="Image 0" descr="/home/claude/f4/img/minesec_sheet.png">    </p:cNvPr>
+          <p:cNvPr id="5" name="Image 0" descr="/home/claude/f4/img/v2/f2t_fishing.jpg">    </p:cNvPr>
           <p:cNvPicPr>
             <a:picLocks noChangeAspect="1"/>
           </p:cNvPicPr>
@@ -16627,8 +17133,8 @@
         </p:blipFill>
         <p:spPr>
           <a:xfrm>
-            <a:off x="0" y="658368"/>
-            <a:ext cx="3840480" cy="5833872"/>
+            <a:off x="6537960" y="2400897"/>
+            <a:ext cx="5470855" cy="3034615"/>
           </a:xfrm>
           <a:prstGeom prst="rect">
             <a:avLst/>
@@ -16637,14 +17143,14 @@
       </p:pic>
       <p:sp>
         <p:nvSpPr>
-          <p:cNvPr id="4" name="Text 1"/>
+          <p:cNvPr id="6" name="Text 3"/>
           <p:cNvSpPr/>
           <p:nvPr/>
         </p:nvSpPr>
         <p:spPr>
           <a:xfrm>
-            <a:off x="4069080" y="1005840"/>
-            <a:ext cx="7802575" cy="731520"/>
+            <a:off x="6537960" y="6089904"/>
+            <a:ext cx="5470855" cy="347472"/>
           </a:xfrm>
           <a:prstGeom prst="rect">
             <a:avLst/>
@@ -16653,122 +17159,24 @@
           <a:ln/>
         </p:spPr>
         <p:txBody>
-          <a:bodyPr wrap="square" lIns="0" tIns="0" rIns="0" bIns="0" rtlCol="0" anchor="ctr">
-            <a:normAutofit/>
-          </a:bodyPr>
+          <a:bodyPr wrap="square" lIns="0" tIns="0" rIns="0" bIns="0" rtlCol="0" anchor="ctr"/>
           <a:lstStyle/>
           <a:p>
             <a:pPr algn="ctr" indent="0" marL="0">
               <a:buNone/>
             </a:pPr>
             <a:r>
-              <a:rPr lang="en-US" sz="3600" b="1" dirty="0">
-                <a:solidFill>
-                  <a:srgbClr val="990011"/>
+              <a:rPr lang="en-US" sz="1600" i="1" dirty="0">
+                <a:solidFill>
+                  <a:srgbClr val="555555"/>
                 </a:solidFill>
                 <a:latin typeface="Times New Roman" pitchFamily="34" charset="0"/>
                 <a:ea typeface="Times New Roman" pitchFamily="34" charset="-122"/>
                 <a:cs typeface="Times New Roman" pitchFamily="34" charset="-120"/>
               </a:rPr>
-              <a:t>2. Valley and Mountain Winds</a:t>
-            </a:r>
-            <a:endParaRPr lang="en-US" sz="3600" dirty="0"/>
-          </a:p>
-        </p:txBody>
-      </p:sp>
-      <p:sp>
-        <p:nvSpPr>
-          <p:cNvPr id="5" name="Text 2"/>
-          <p:cNvSpPr/>
-          <p:nvPr/>
-        </p:nvSpPr>
-        <p:spPr>
-          <a:xfrm>
-            <a:off x="4069080" y="1783080"/>
-            <a:ext cx="7802575" cy="4663440"/>
-          </a:xfrm>
-          <a:prstGeom prst="rect">
-            <a:avLst/>
-          </a:prstGeom>
-          <a:noFill/>
-          <a:ln/>
-        </p:spPr>
-        <p:txBody>
-          <a:bodyPr wrap="square" lIns="0" tIns="0" rIns="0" bIns="0" rtlCol="0" anchor="t"/>
-          <a:lstStyle/>
-          <a:p>
-            <a:pPr algn="l" indent="0" marL="0">
-              <a:spcAft>
-                <a:spcPts val="800"/>
-              </a:spcAft>
-              <a:buNone/>
-            </a:pPr>
-            <a:r>
-              <a:rPr lang="en-US" sz="4000" b="1" dirty="0">
-                <a:solidFill>
-                  <a:srgbClr val="111111"/>
-                </a:solidFill>
-                <a:latin typeface="Times New Roman" pitchFamily="34" charset="0"/>
-                <a:ea typeface="Times New Roman" pitchFamily="34" charset="-122"/>
-                <a:cs typeface="Times New Roman" pitchFamily="34" charset="-120"/>
-              </a:rPr>
-              <a:t>Katabatic (mountain) wind: </a:t>
-            </a:r>
-            <a:pPr algn="l" indent="0" marL="0">
-              <a:spcAft>
-                <a:spcPts val="800"/>
-              </a:spcAft>
-              <a:buNone/>
-            </a:pPr>
-            <a:r>
-              <a:rPr lang="en-US" sz="4000" dirty="0">
-                <a:solidFill>
-                  <a:srgbClr val="111111"/>
-                </a:solidFill>
-                <a:latin typeface="Times New Roman" pitchFamily="34" charset="0"/>
-                <a:ea typeface="Times New Roman" pitchFamily="34" charset="-122"/>
-                <a:cs typeface="Times New Roman" pitchFamily="34" charset="-120"/>
-              </a:rPr>
-              <a:t>At night, the slopes cool quickly, and cold, heavy air flows down into the valley.</a:t>
-            </a:r>
-            <a:endParaRPr lang="en-US" sz="4000" dirty="0"/>
-          </a:p>
-          <a:p>
-            <a:pPr algn="l" indent="0" marL="0">
-              <a:spcAft>
-                <a:spcPts val="800"/>
-              </a:spcAft>
-              <a:buNone/>
-            </a:pPr>
-            <a:r>
-              <a:rPr lang="en-US" sz="4000" b="1" dirty="0">
-                <a:solidFill>
-                  <a:srgbClr val="111111"/>
-                </a:solidFill>
-                <a:latin typeface="Times New Roman" pitchFamily="34" charset="0"/>
-                <a:ea typeface="Times New Roman" pitchFamily="34" charset="-122"/>
-                <a:cs typeface="Times New Roman" pitchFamily="34" charset="-120"/>
-              </a:rPr>
-              <a:t>Example: </a:t>
-            </a:r>
-            <a:pPr algn="l" indent="0" marL="0">
-              <a:spcAft>
-                <a:spcPts val="800"/>
-              </a:spcAft>
-              <a:buNone/>
-            </a:pPr>
-            <a:r>
-              <a:rPr lang="en-US" sz="4000" dirty="0">
-                <a:solidFill>
-                  <a:srgbClr val="111111"/>
-                </a:solidFill>
-                <a:latin typeface="Times New Roman" pitchFamily="34" charset="0"/>
-                <a:ea typeface="Times New Roman" pitchFamily="34" charset="-122"/>
-                <a:cs typeface="Times New Roman" pitchFamily="34" charset="-120"/>
-              </a:rPr>
-              <a:t>Villages at the foot of the Mandara Mountains receive cool katabatic breezes after sunset.</a:t>
-            </a:r>
-            <a:endParaRPr lang="en-US" sz="4000" dirty="0"/>
+              <a:t>Illustration: fishing canoes</a:t>
+            </a:r>
+            <a:endParaRPr lang="en-US" sz="1600" dirty="0"/>
           </a:p>
         </p:txBody>
       </p:sp>
@@ -16919,7 +17327,7 @@
                 <a:ea typeface="Times New Roman" pitchFamily="34" charset="-122"/>
                 <a:cs typeface="Times New Roman" pitchFamily="34" charset="-120"/>
               </a:rPr>
-              <a:t>3. Foehn Winds</a:t>
+              <a:t>3. Anabatic and Katabatic Winds</a:t>
             </a:r>
             <a:endParaRPr lang="en-US" sz="3600" dirty="0"/>
           </a:p>
@@ -16934,7 +17342,7 @@
         <p:spPr>
           <a:xfrm>
             <a:off x="365760" y="1783080"/>
-            <a:ext cx="4846320" cy="4617720"/>
+            <a:ext cx="6035040" cy="4617720"/>
           </a:xfrm>
           <a:prstGeom prst="rect">
             <a:avLst/>
@@ -16953,7 +17361,7 @@
               <a:buNone/>
             </a:pPr>
             <a:r>
-              <a:rPr lang="en-US" sz="3600" i="1" dirty="0">
+              <a:rPr lang="en-US" sz="3200" i="1" dirty="0">
                 <a:solidFill>
                   <a:srgbClr val="111111"/>
                 </a:solidFill>
@@ -16961,9 +17369,9 @@
                 <a:ea typeface="Times New Roman" pitchFamily="34" charset="-122"/>
                 <a:cs typeface="Times New Roman" pitchFamily="34" charset="-120"/>
               </a:rPr>
-              <a:t>Foehn winds form as follows:</a:t>
-            </a:r>
-            <a:endParaRPr lang="en-US" sz="3600" dirty="0"/>
+              <a:t>Winds on mountain slopes form as follows:</a:t>
+            </a:r>
+            <a:endParaRPr lang="en-US" sz="3200" dirty="0"/>
           </a:p>
           <a:p>
             <a:pPr algn="l" indent="0" marL="0">
@@ -16973,7 +17381,7 @@
               <a:buNone/>
             </a:pPr>
             <a:r>
-              <a:rPr lang="en-US" sz="3600" b="1" dirty="0">
+              <a:rPr lang="en-US" sz="3200" b="1" dirty="0">
                 <a:solidFill>
                   <a:srgbClr val="111111"/>
                 </a:solidFill>
@@ -16981,7 +17389,7 @@
                 <a:ea typeface="Times New Roman" pitchFamily="34" charset="-122"/>
                 <a:cs typeface="Times New Roman" pitchFamily="34" charset="-120"/>
               </a:rPr>
-              <a:t>Windward side: </a:t>
+              <a:t>Anabatic (valley) wind: </a:t>
             </a:r>
             <a:pPr algn="l" indent="0" marL="0">
               <a:spcAft>
@@ -16990,7 +17398,7 @@
               <a:buNone/>
             </a:pPr>
             <a:r>
-              <a:rPr lang="en-US" sz="3600" dirty="0">
+              <a:rPr lang="en-US" sz="3200" dirty="0">
                 <a:solidFill>
                   <a:srgbClr val="111111"/>
                 </a:solidFill>
@@ -16998,15 +17406,15 @@
                 <a:ea typeface="Times New Roman" pitchFamily="34" charset="-122"/>
                 <a:cs typeface="Times New Roman" pitchFamily="34" charset="-120"/>
               </a:rPr>
-              <a:t>Moist air rises over a mountain, cools and loses its moisture as rain.</a:t>
-            </a:r>
-            <a:endParaRPr lang="en-US" sz="3600" dirty="0"/>
+              <a:t>By day, the sun heats the slopes more than the air at the same height over the valley. The warm, light air rises up the slopes, often forming clouds on the summits in the afternoon.</a:t>
+            </a:r>
+            <a:endParaRPr lang="en-US" sz="3200" dirty="0"/>
           </a:p>
         </p:txBody>
       </p:sp>
       <p:pic>
         <p:nvPicPr>
-          <p:cNvPr id="5" name="Image 0" descr="/home/claude/f4/img/v2/foehn_big.png">    </p:cNvPr>
+          <p:cNvPr id="5" name="Image 0" descr="/home/claude/f4/img/v2/anabatic_big.png">    </p:cNvPr>
           <p:cNvPicPr>
             <a:picLocks noChangeAspect="1"/>
           </p:cNvPicPr>
@@ -17020,8 +17428,8 @@
         </p:blipFill>
         <p:spPr>
           <a:xfrm>
-            <a:off x="5349240" y="2617506"/>
-            <a:ext cx="6659575" cy="2601397"/>
+            <a:off x="6537960" y="2849678"/>
+            <a:ext cx="5470855" cy="2137053"/>
           </a:xfrm>
           <a:prstGeom prst="rect">
             <a:avLst/>
@@ -17036,8 +17444,8 @@
         </p:nvSpPr>
         <p:spPr>
           <a:xfrm>
-            <a:off x="5349240" y="6089904"/>
-            <a:ext cx="6659575" cy="347472"/>
+            <a:off x="6537960" y="6089904"/>
+            <a:ext cx="5470855" cy="347472"/>
           </a:xfrm>
           <a:prstGeom prst="rect">
             <a:avLst/>
@@ -17061,7 +17469,7 @@
                 <a:ea typeface="Times New Roman" pitchFamily="34" charset="-122"/>
                 <a:cs typeface="Times New Roman" pitchFamily="34" charset="-120"/>
               </a:rPr>
-              <a:t>Illustration: the foehn effect</a:t>
+              <a:t>Illustration: anabatic and katabatic winds</a:t>
             </a:r>
             <a:endParaRPr lang="en-US" sz="1600" dirty="0"/>
           </a:p>
@@ -17196,7 +17604,7 @@
         <p:spPr>
           <a:xfrm>
             <a:off x="0" y="658368"/>
-            <a:ext cx="2468880" cy="5833872"/>
+            <a:ext cx="5120640" cy="5833872"/>
           </a:xfrm>
           <a:prstGeom prst="rect">
             <a:avLst/>
@@ -17211,8 +17619,8 @@
         </p:nvSpPr>
         <p:spPr>
           <a:xfrm>
-            <a:off x="2697480" y="1005840"/>
-            <a:ext cx="9174175" cy="731520"/>
+            <a:off x="5349240" y="1005840"/>
+            <a:ext cx="6522415" cy="731520"/>
           </a:xfrm>
           <a:prstGeom prst="rect">
             <a:avLst/>
@@ -17238,7 +17646,7 @@
                 <a:ea typeface="Times New Roman" pitchFamily="34" charset="-122"/>
                 <a:cs typeface="Times New Roman" pitchFamily="34" charset="-120"/>
               </a:rPr>
-              <a:t>3. Foehn Winds</a:t>
+              <a:t>3. Anabatic and Katabatic Winds</a:t>
             </a:r>
             <a:endParaRPr lang="en-US" sz="3600" dirty="0"/>
           </a:p>
@@ -17252,8 +17660,8 @@
         </p:nvSpPr>
         <p:spPr>
           <a:xfrm>
-            <a:off x="2697480" y="1783080"/>
-            <a:ext cx="9174175" cy="4663440"/>
+            <a:off x="5349240" y="1783080"/>
+            <a:ext cx="6522415" cy="4663440"/>
           </a:xfrm>
           <a:prstGeom prst="rect">
             <a:avLst/>
@@ -17280,7 +17688,7 @@
                 <a:ea typeface="Times New Roman" pitchFamily="34" charset="-122"/>
                 <a:cs typeface="Times New Roman" pitchFamily="34" charset="-120"/>
               </a:rPr>
-              <a:t>Leeward side: </a:t>
+              <a:t>Katabatic (mountain) wind: </a:t>
             </a:r>
             <a:pPr algn="l" indent="0" marL="0">
               <a:spcAft>
@@ -17297,81 +17705,7 @@
                 <a:ea typeface="Times New Roman" pitchFamily="34" charset="-122"/>
                 <a:cs typeface="Times New Roman" pitchFamily="34" charset="-120"/>
               </a:rPr>
-              <a:t>The dry air descends, is compressed and warms quickly.</a:t>
-            </a:r>
-            <a:endParaRPr lang="en-US" sz="4000" dirty="0"/>
-          </a:p>
-          <a:p>
-            <a:pPr algn="l" indent="0" marL="0">
-              <a:spcAft>
-                <a:spcPts val="800"/>
-              </a:spcAft>
-              <a:buNone/>
-            </a:pPr>
-            <a:r>
-              <a:rPr lang="en-US" sz="4000" b="1" dirty="0">
-                <a:solidFill>
-                  <a:srgbClr val="111111"/>
-                </a:solidFill>
-                <a:latin typeface="Times New Roman" pitchFamily="34" charset="0"/>
-                <a:ea typeface="Times New Roman" pitchFamily="34" charset="-122"/>
-                <a:cs typeface="Times New Roman" pitchFamily="34" charset="-120"/>
-              </a:rPr>
-              <a:t>Examples: </a:t>
-            </a:r>
-            <a:pPr algn="l" indent="0" marL="0">
-              <a:spcAft>
-                <a:spcPts val="800"/>
-              </a:spcAft>
-              <a:buNone/>
-            </a:pPr>
-            <a:r>
-              <a:rPr lang="en-US" sz="4000" dirty="0">
-                <a:solidFill>
-                  <a:srgbClr val="111111"/>
-                </a:solidFill>
-                <a:latin typeface="Times New Roman" pitchFamily="34" charset="0"/>
-                <a:ea typeface="Times New Roman" pitchFamily="34" charset="-122"/>
-                <a:cs typeface="Times New Roman" pitchFamily="34" charset="-120"/>
-              </a:rPr>
-              <a:t>The Foehn of the Alps and the Chinook of the Rocky Mountains.</a:t>
-            </a:r>
-            <a:endParaRPr lang="en-US" sz="4000" dirty="0"/>
-          </a:p>
-          <a:p>
-            <a:pPr algn="l" indent="0" marL="0">
-              <a:spcAft>
-                <a:spcPts val="800"/>
-              </a:spcAft>
-              <a:buNone/>
-            </a:pPr>
-            <a:r>
-              <a:rPr lang="en-US" sz="4000" b="1" dirty="0">
-                <a:solidFill>
-                  <a:srgbClr val="111111"/>
-                </a:solidFill>
-                <a:latin typeface="Times New Roman" pitchFamily="34" charset="0"/>
-                <a:ea typeface="Times New Roman" pitchFamily="34" charset="-122"/>
-                <a:cs typeface="Times New Roman" pitchFamily="34" charset="-120"/>
-              </a:rPr>
-              <a:t>Effects: </a:t>
-            </a:r>
-            <a:pPr algn="l" indent="0" marL="0">
-              <a:spcAft>
-                <a:spcPts val="800"/>
-              </a:spcAft>
-              <a:buNone/>
-            </a:pPr>
-            <a:r>
-              <a:rPr lang="en-US" sz="4000" dirty="0">
-                <a:solidFill>
-                  <a:srgbClr val="111111"/>
-                </a:solidFill>
-                <a:latin typeface="Times New Roman" pitchFamily="34" charset="0"/>
-                <a:ea typeface="Times New Roman" pitchFamily="34" charset="-122"/>
-                <a:cs typeface="Times New Roman" pitchFamily="34" charset="-120"/>
-              </a:rPr>
-              <a:t>They melt snow rapidly and increase the risk of forest fires.</a:t>
+              <a:t>At night, the slopes lose heat quickly and cool the air in contact with them. This cold, heavy air flows down into the valley, where it collects.</a:t>
             </a:r>
             <a:endParaRPr lang="en-US" sz="4000" dirty="0"/>
           </a:p>
@@ -17489,129 +17823,9 @@
           </a:p>
         </p:txBody>
       </p:sp>
-      <p:sp>
-        <p:nvSpPr>
-          <p:cNvPr id="3" name="Text 1"/>
-          <p:cNvSpPr/>
-          <p:nvPr/>
-        </p:nvSpPr>
-        <p:spPr>
-          <a:xfrm>
-            <a:off x="365760" y="1005840"/>
-            <a:ext cx="11460175" cy="731520"/>
-          </a:xfrm>
-          <a:prstGeom prst="rect">
-            <a:avLst/>
-          </a:prstGeom>
-          <a:noFill/>
-          <a:ln/>
-        </p:spPr>
-        <p:txBody>
-          <a:bodyPr wrap="square" lIns="0" tIns="0" rIns="0" bIns="0" rtlCol="0" anchor="ctr">
-            <a:normAutofit/>
-          </a:bodyPr>
-          <a:lstStyle/>
-          <a:p>
-            <a:pPr algn="ctr" indent="0" marL="0">
-              <a:buNone/>
-            </a:pPr>
-            <a:r>
-              <a:rPr lang="en-US" sz="3600" b="1" dirty="0">
-                <a:solidFill>
-                  <a:srgbClr val="990011"/>
-                </a:solidFill>
-                <a:latin typeface="Times New Roman" pitchFamily="34" charset="0"/>
-                <a:ea typeface="Times New Roman" pitchFamily="34" charset="-122"/>
-                <a:cs typeface="Times New Roman" pitchFamily="34" charset="-120"/>
-              </a:rPr>
-              <a:t>4. Effects of Local Winds on Weather and Man</a:t>
-            </a:r>
-            <a:endParaRPr lang="en-US" sz="3600" dirty="0"/>
-          </a:p>
-        </p:txBody>
-      </p:sp>
-      <p:sp>
-        <p:nvSpPr>
-          <p:cNvPr id="4" name="Text 2"/>
-          <p:cNvSpPr/>
-          <p:nvPr/>
-        </p:nvSpPr>
-        <p:spPr>
-          <a:xfrm>
-            <a:off x="365760" y="1783080"/>
-            <a:ext cx="4846320" cy="4617720"/>
-          </a:xfrm>
-          <a:prstGeom prst="rect">
-            <a:avLst/>
-          </a:prstGeom>
-          <a:noFill/>
-          <a:ln/>
-        </p:spPr>
-        <p:txBody>
-          <a:bodyPr wrap="square" lIns="0" tIns="0" rIns="0" bIns="0" rtlCol="0" anchor="t"/>
-          <a:lstStyle/>
-          <a:p>
-            <a:pPr algn="l" indent="0" marL="0">
-              <a:spcAft>
-                <a:spcPts val="800"/>
-              </a:spcAft>
-              <a:buNone/>
-            </a:pPr>
-            <a:r>
-              <a:rPr lang="en-US" sz="3600" i="1" dirty="0">
-                <a:solidFill>
-                  <a:srgbClr val="111111"/>
-                </a:solidFill>
-                <a:latin typeface="Times New Roman" pitchFamily="34" charset="0"/>
-                <a:ea typeface="Times New Roman" pitchFamily="34" charset="-122"/>
-                <a:cs typeface="Times New Roman" pitchFamily="34" charset="-120"/>
-              </a:rPr>
-              <a:t>Local winds have the following effects:</a:t>
-            </a:r>
-            <a:endParaRPr lang="en-US" sz="3600" dirty="0"/>
-          </a:p>
-          <a:p>
-            <a:pPr algn="l" indent="0" marL="0">
-              <a:spcAft>
-                <a:spcPts val="800"/>
-              </a:spcAft>
-              <a:buNone/>
-            </a:pPr>
-            <a:r>
-              <a:rPr lang="en-US" sz="3600" b="1" dirty="0">
-                <a:solidFill>
-                  <a:srgbClr val="111111"/>
-                </a:solidFill>
-                <a:latin typeface="Times New Roman" pitchFamily="34" charset="0"/>
-                <a:ea typeface="Times New Roman" pitchFamily="34" charset="-122"/>
-                <a:cs typeface="Times New Roman" pitchFamily="34" charset="-120"/>
-              </a:rPr>
-              <a:t>Temperature: </a:t>
-            </a:r>
-            <a:pPr algn="l" indent="0" marL="0">
-              <a:spcAft>
-                <a:spcPts val="800"/>
-              </a:spcAft>
-              <a:buNone/>
-            </a:pPr>
-            <a:r>
-              <a:rPr lang="en-US" sz="3600" dirty="0">
-                <a:solidFill>
-                  <a:srgbClr val="111111"/>
-                </a:solidFill>
-                <a:latin typeface="Times New Roman" pitchFamily="34" charset="0"/>
-                <a:ea typeface="Times New Roman" pitchFamily="34" charset="-122"/>
-                <a:cs typeface="Times New Roman" pitchFamily="34" charset="-120"/>
-              </a:rPr>
-              <a:t>Sea breezes cool coastal towns on hot afternoons.</a:t>
-            </a:r>
-            <a:endParaRPr lang="en-US" sz="3600" dirty="0"/>
-          </a:p>
-        </p:txBody>
-      </p:sp>
       <p:pic>
         <p:nvPicPr>
-          <p:cNvPr id="5" name="Image 0" descr="/home/claude/f4/img/v2/met2_local.png">    </p:cNvPr>
+          <p:cNvPr id="3" name="Image 0" descr="/home/claude/f4/img/minesec_sheet.png">    </p:cNvPr>
           <p:cNvPicPr>
             <a:picLocks noChangeAspect="1"/>
           </p:cNvPicPr>
@@ -17625,8 +17839,8 @@
         </p:blipFill>
         <p:spPr>
           <a:xfrm>
-            <a:off x="5349240" y="2617506"/>
-            <a:ext cx="6659575" cy="2601397"/>
+            <a:off x="0" y="658368"/>
+            <a:ext cx="1463040" cy="5833872"/>
           </a:xfrm>
           <a:prstGeom prst="rect">
             <a:avLst/>
@@ -17635,14 +17849,14 @@
       </p:pic>
       <p:sp>
         <p:nvSpPr>
-          <p:cNvPr id="6" name="Text 3"/>
+          <p:cNvPr id="4" name="Text 1"/>
           <p:cNvSpPr/>
           <p:nvPr/>
         </p:nvSpPr>
         <p:spPr>
           <a:xfrm>
-            <a:off x="5349240" y="6089904"/>
-            <a:ext cx="6659575" cy="347472"/>
+            <a:off x="1691640" y="1005840"/>
+            <a:ext cx="10180015" cy="731520"/>
           </a:xfrm>
           <a:prstGeom prst="rect">
             <a:avLst/>
@@ -17651,24 +17865,85 @@
           <a:ln/>
         </p:spPr>
         <p:txBody>
-          <a:bodyPr wrap="square" lIns="0" tIns="0" rIns="0" bIns="0" rtlCol="0" anchor="ctr"/>
+          <a:bodyPr wrap="square" lIns="0" tIns="0" rIns="0" bIns="0" rtlCol="0" anchor="ctr">
+            <a:normAutofit/>
+          </a:bodyPr>
           <a:lstStyle/>
           <a:p>
             <a:pPr algn="ctr" indent="0" marL="0">
               <a:buNone/>
             </a:pPr>
             <a:r>
-              <a:rPr lang="en-US" sz="1600" i="1" dirty="0">
-                <a:solidFill>
-                  <a:srgbClr val="555555"/>
+              <a:rPr lang="en-US" sz="3600" b="1" dirty="0">
+                <a:solidFill>
+                  <a:srgbClr val="990011"/>
                 </a:solidFill>
                 <a:latin typeface="Times New Roman" pitchFamily="34" charset="0"/>
                 <a:ea typeface="Times New Roman" pitchFamily="34" charset="-122"/>
                 <a:cs typeface="Times New Roman" pitchFamily="34" charset="-120"/>
               </a:rPr>
-              <a:t>Illustration: the local winds</a:t>
-            </a:r>
-            <a:endParaRPr lang="en-US" sz="1600" dirty="0"/>
+              <a:t>3. Anabatic and Katabatic Winds</a:t>
+            </a:r>
+            <a:endParaRPr lang="en-US" sz="3600" dirty="0"/>
+          </a:p>
+        </p:txBody>
+      </p:sp>
+      <p:sp>
+        <p:nvSpPr>
+          <p:cNvPr id="5" name="Text 2"/>
+          <p:cNvSpPr/>
+          <p:nvPr/>
+        </p:nvSpPr>
+        <p:spPr>
+          <a:xfrm>
+            <a:off x="1691640" y="1783080"/>
+            <a:ext cx="10180015" cy="4663440"/>
+          </a:xfrm>
+          <a:prstGeom prst="rect">
+            <a:avLst/>
+          </a:prstGeom>
+          <a:noFill/>
+          <a:ln/>
+        </p:spPr>
+        <p:txBody>
+          <a:bodyPr wrap="square" lIns="0" tIns="0" rIns="0" bIns="0" rtlCol="0" anchor="t"/>
+          <a:lstStyle/>
+          <a:p>
+            <a:pPr algn="l" indent="0" marL="0">
+              <a:spcAft>
+                <a:spcPts val="800"/>
+              </a:spcAft>
+              <a:buNone/>
+            </a:pPr>
+            <a:r>
+              <a:rPr lang="en-US" sz="4000" b="1" dirty="0">
+                <a:solidFill>
+                  <a:srgbClr val="111111"/>
+                </a:solidFill>
+                <a:latin typeface="Times New Roman" pitchFamily="34" charset="0"/>
+                <a:ea typeface="Times New Roman" pitchFamily="34" charset="-122"/>
+                <a:cs typeface="Times New Roman" pitchFamily="34" charset="-120"/>
+              </a:rPr>
+              <a:t>Examples and effects: </a:t>
+            </a:r>
+            <a:pPr algn="l" indent="0" marL="0">
+              <a:spcAft>
+                <a:spcPts val="800"/>
+              </a:spcAft>
+              <a:buNone/>
+            </a:pPr>
+            <a:r>
+              <a:rPr lang="en-US" sz="4000" dirty="0">
+                <a:solidFill>
+                  <a:srgbClr val="111111"/>
+                </a:solidFill>
+                <a:latin typeface="Times New Roman" pitchFamily="34" charset="0"/>
+                <a:ea typeface="Times New Roman" pitchFamily="34" charset="-122"/>
+                <a:cs typeface="Times New Roman" pitchFamily="34" charset="-120"/>
+              </a:rPr>
+              <a:t>Villages at the foot of the Mandara Mountains and the Adamawa Plateau receive cool katabatic breezes after sunset. In cold regions, katabatic winds bring frost and fog to valley floors, and on the ice caps of Greenland and Antarctica they can be very strong.</a:t>
+            </a:r>
+            <a:endParaRPr lang="en-US" sz="4000" dirty="0"/>
           </a:p>
         </p:txBody>
       </p:sp>
@@ -17784,9 +18059,129 @@
           </a:p>
         </p:txBody>
       </p:sp>
+      <p:sp>
+        <p:nvSpPr>
+          <p:cNvPr id="3" name="Text 1"/>
+          <p:cNvSpPr/>
+          <p:nvPr/>
+        </p:nvSpPr>
+        <p:spPr>
+          <a:xfrm>
+            <a:off x="365760" y="1005840"/>
+            <a:ext cx="11460175" cy="731520"/>
+          </a:xfrm>
+          <a:prstGeom prst="rect">
+            <a:avLst/>
+          </a:prstGeom>
+          <a:noFill/>
+          <a:ln/>
+        </p:spPr>
+        <p:txBody>
+          <a:bodyPr wrap="square" lIns="0" tIns="0" rIns="0" bIns="0" rtlCol="0" anchor="ctr">
+            <a:normAutofit/>
+          </a:bodyPr>
+          <a:lstStyle/>
+          <a:p>
+            <a:pPr algn="ctr" indent="0" marL="0">
+              <a:buNone/>
+            </a:pPr>
+            <a:r>
+              <a:rPr lang="en-US" sz="3600" b="1" dirty="0">
+                <a:solidFill>
+                  <a:srgbClr val="990011"/>
+                </a:solidFill>
+                <a:latin typeface="Times New Roman" pitchFamily="34" charset="0"/>
+                <a:ea typeface="Times New Roman" pitchFamily="34" charset="-122"/>
+                <a:cs typeface="Times New Roman" pitchFamily="34" charset="-120"/>
+              </a:rPr>
+              <a:t>4. Foehn Winds</a:t>
+            </a:r>
+            <a:endParaRPr lang="en-US" sz="3600" dirty="0"/>
+          </a:p>
+        </p:txBody>
+      </p:sp>
+      <p:sp>
+        <p:nvSpPr>
+          <p:cNvPr id="4" name="Text 2"/>
+          <p:cNvSpPr/>
+          <p:nvPr/>
+        </p:nvSpPr>
+        <p:spPr>
+          <a:xfrm>
+            <a:off x="365760" y="1783080"/>
+            <a:ext cx="6035040" cy="4617720"/>
+          </a:xfrm>
+          <a:prstGeom prst="rect">
+            <a:avLst/>
+          </a:prstGeom>
+          <a:noFill/>
+          <a:ln/>
+        </p:spPr>
+        <p:txBody>
+          <a:bodyPr wrap="square" lIns="0" tIns="0" rIns="0" bIns="0" rtlCol="0" anchor="t"/>
+          <a:lstStyle/>
+          <a:p>
+            <a:pPr algn="l" indent="0" marL="0">
+              <a:spcAft>
+                <a:spcPts val="800"/>
+              </a:spcAft>
+              <a:buNone/>
+            </a:pPr>
+            <a:r>
+              <a:rPr lang="en-US" sz="3600" i="1" dirty="0">
+                <a:solidFill>
+                  <a:srgbClr val="111111"/>
+                </a:solidFill>
+                <a:latin typeface="Times New Roman" pitchFamily="34" charset="0"/>
+                <a:ea typeface="Times New Roman" pitchFamily="34" charset="-122"/>
+                <a:cs typeface="Times New Roman" pitchFamily="34" charset="-120"/>
+              </a:rPr>
+              <a:t>Foehn winds form as follows:</a:t>
+            </a:r>
+            <a:endParaRPr lang="en-US" sz="3600" dirty="0"/>
+          </a:p>
+          <a:p>
+            <a:pPr algn="l" indent="0" marL="0">
+              <a:spcAft>
+                <a:spcPts val="800"/>
+              </a:spcAft>
+              <a:buNone/>
+            </a:pPr>
+            <a:r>
+              <a:rPr lang="en-US" sz="3600" b="1" dirty="0">
+                <a:solidFill>
+                  <a:srgbClr val="111111"/>
+                </a:solidFill>
+                <a:latin typeface="Times New Roman" pitchFamily="34" charset="0"/>
+                <a:ea typeface="Times New Roman" pitchFamily="34" charset="-122"/>
+                <a:cs typeface="Times New Roman" pitchFamily="34" charset="-120"/>
+              </a:rPr>
+              <a:t>On the windward side: </a:t>
+            </a:r>
+            <a:pPr algn="l" indent="0" marL="0">
+              <a:spcAft>
+                <a:spcPts val="800"/>
+              </a:spcAft>
+              <a:buNone/>
+            </a:pPr>
+            <a:r>
+              <a:rPr lang="en-US" sz="3600" dirty="0">
+                <a:solidFill>
+                  <a:srgbClr val="111111"/>
+                </a:solidFill>
+                <a:latin typeface="Times New Roman" pitchFamily="34" charset="0"/>
+                <a:ea typeface="Times New Roman" pitchFamily="34" charset="-122"/>
+                <a:cs typeface="Times New Roman" pitchFamily="34" charset="-120"/>
+              </a:rPr>
+              <a:t>Moist air is forced to rise over a mountain range, cools and forms clouds. It loses most of its moisture as rain or snow on the windward slope.</a:t>
+            </a:r>
+            <a:endParaRPr lang="en-US" sz="3600" dirty="0"/>
+          </a:p>
+        </p:txBody>
+      </p:sp>
       <p:pic>
         <p:nvPicPr>
-          <p:cNvPr id="3" name="Image 0" descr="/home/claude/f4/img/minesec_sheet.png">    </p:cNvPr>
+          <p:cNvPr id="5" name="Image 0" descr="/home/claude/f4/img/v2/foehn_big.png">    </p:cNvPr>
           <p:cNvPicPr>
             <a:picLocks noChangeAspect="1"/>
           </p:cNvPicPr>
@@ -17800,8 +18195,8 @@
         </p:blipFill>
         <p:spPr>
           <a:xfrm>
-            <a:off x="0" y="658368"/>
-            <a:ext cx="5120640" cy="5833872"/>
+            <a:off x="6537960" y="2849678"/>
+            <a:ext cx="5470855" cy="2137053"/>
           </a:xfrm>
           <a:prstGeom prst="rect">
             <a:avLst/>
@@ -17810,14 +18205,14 @@
       </p:pic>
       <p:sp>
         <p:nvSpPr>
-          <p:cNvPr id="4" name="Text 1"/>
+          <p:cNvPr id="6" name="Text 3"/>
           <p:cNvSpPr/>
           <p:nvPr/>
         </p:nvSpPr>
         <p:spPr>
           <a:xfrm>
-            <a:off x="5349240" y="1005840"/>
-            <a:ext cx="6522415" cy="731520"/>
+            <a:off x="6537960" y="6089904"/>
+            <a:ext cx="5470855" cy="347472"/>
           </a:xfrm>
           <a:prstGeom prst="rect">
             <a:avLst/>
@@ -17826,122 +18221,24 @@
           <a:ln/>
         </p:spPr>
         <p:txBody>
-          <a:bodyPr wrap="square" lIns="0" tIns="0" rIns="0" bIns="0" rtlCol="0" anchor="ctr">
-            <a:normAutofit/>
-          </a:bodyPr>
+          <a:bodyPr wrap="square" lIns="0" tIns="0" rIns="0" bIns="0" rtlCol="0" anchor="ctr"/>
           <a:lstStyle/>
           <a:p>
             <a:pPr algn="ctr" indent="0" marL="0">
               <a:buNone/>
             </a:pPr>
             <a:r>
-              <a:rPr lang="en-US" sz="3600" b="1" dirty="0">
-                <a:solidFill>
-                  <a:srgbClr val="990011"/>
+              <a:rPr lang="en-US" sz="1600" i="1" dirty="0">
+                <a:solidFill>
+                  <a:srgbClr val="555555"/>
                 </a:solidFill>
                 <a:latin typeface="Times New Roman" pitchFamily="34" charset="0"/>
                 <a:ea typeface="Times New Roman" pitchFamily="34" charset="-122"/>
                 <a:cs typeface="Times New Roman" pitchFamily="34" charset="-120"/>
               </a:rPr>
-              <a:t>4. Effects of Local Winds on Weather and Man</a:t>
-            </a:r>
-            <a:endParaRPr lang="en-US" sz="3600" dirty="0"/>
-          </a:p>
-        </p:txBody>
-      </p:sp>
-      <p:sp>
-        <p:nvSpPr>
-          <p:cNvPr id="5" name="Text 2"/>
-          <p:cNvSpPr/>
-          <p:nvPr/>
-        </p:nvSpPr>
-        <p:spPr>
-          <a:xfrm>
-            <a:off x="5349240" y="1783080"/>
-            <a:ext cx="6522415" cy="4663440"/>
-          </a:xfrm>
-          <a:prstGeom prst="rect">
-            <a:avLst/>
-          </a:prstGeom>
-          <a:noFill/>
-          <a:ln/>
-        </p:spPr>
-        <p:txBody>
-          <a:bodyPr wrap="square" lIns="0" tIns="0" rIns="0" bIns="0" rtlCol="0" anchor="t"/>
-          <a:lstStyle/>
-          <a:p>
-            <a:pPr algn="l" indent="0" marL="0">
-              <a:spcAft>
-                <a:spcPts val="800"/>
-              </a:spcAft>
-              <a:buNone/>
-            </a:pPr>
-            <a:r>
-              <a:rPr lang="en-US" sz="4000" b="1" dirty="0">
-                <a:solidFill>
-                  <a:srgbClr val="111111"/>
-                </a:solidFill>
-                <a:latin typeface="Times New Roman" pitchFamily="34" charset="0"/>
-                <a:ea typeface="Times New Roman" pitchFamily="34" charset="-122"/>
-                <a:cs typeface="Times New Roman" pitchFamily="34" charset="-120"/>
-              </a:rPr>
-              <a:t>Agriculture: </a:t>
-            </a:r>
-            <a:pPr algn="l" indent="0" marL="0">
-              <a:spcAft>
-                <a:spcPts val="800"/>
-              </a:spcAft>
-              <a:buNone/>
-            </a:pPr>
-            <a:r>
-              <a:rPr lang="en-US" sz="4000" dirty="0">
-                <a:solidFill>
-                  <a:srgbClr val="111111"/>
-                </a:solidFill>
-                <a:latin typeface="Times New Roman" pitchFamily="34" charset="0"/>
-                <a:ea typeface="Times New Roman" pitchFamily="34" charset="-122"/>
-                <a:cs typeface="Times New Roman" pitchFamily="34" charset="-120"/>
-              </a:rPr>
-              <a:t>Katabatic winds bring cold air into valleys and can damage crops, while foehn winds ripen fruit but dry the soil.</a:t>
-            </a:r>
-            <a:endParaRPr lang="en-US" sz="4000" dirty="0"/>
-          </a:p>
-          <a:p>
-            <a:pPr algn="l" indent="0" marL="0">
-              <a:spcAft>
-                <a:spcPts val="800"/>
-              </a:spcAft>
-              <a:buNone/>
-            </a:pPr>
-            <a:r>
-              <a:rPr lang="en-US" sz="4000" b="1" dirty="0">
-                <a:solidFill>
-                  <a:srgbClr val="111111"/>
-                </a:solidFill>
-                <a:latin typeface="Times New Roman" pitchFamily="34" charset="0"/>
-                <a:ea typeface="Times New Roman" pitchFamily="34" charset="-122"/>
-                <a:cs typeface="Times New Roman" pitchFamily="34" charset="-120"/>
-              </a:rPr>
-              <a:t>Pollution: </a:t>
-            </a:r>
-            <a:pPr algn="l" indent="0" marL="0">
-              <a:spcAft>
-                <a:spcPts val="800"/>
-              </a:spcAft>
-              <a:buNone/>
-            </a:pPr>
-            <a:r>
-              <a:rPr lang="en-US" sz="4000" dirty="0">
-                <a:solidFill>
-                  <a:srgbClr val="111111"/>
-                </a:solidFill>
-                <a:latin typeface="Times New Roman" pitchFamily="34" charset="0"/>
-                <a:ea typeface="Times New Roman" pitchFamily="34" charset="-122"/>
-                <a:cs typeface="Times New Roman" pitchFamily="34" charset="-120"/>
-              </a:rPr>
-              <a:t>Land breezes can carry pollution out to sea.</a:t>
-            </a:r>
-            <a:endParaRPr lang="en-US" sz="4000" dirty="0"/>
+              <a:t>Illustration: the Foehn wind</a:t>
+            </a:r>
+            <a:endParaRPr lang="en-US" sz="1600" dirty="0"/>
           </a:p>
         </p:txBody>
       </p:sp>
@@ -18074,7 +18371,7 @@
         <p:spPr>
           <a:xfrm>
             <a:off x="0" y="658368"/>
-            <a:ext cx="5120640" cy="5833872"/>
+            <a:ext cx="3840480" cy="5833872"/>
           </a:xfrm>
           <a:prstGeom prst="rect">
             <a:avLst/>
@@ -18089,8 +18386,8 @@
         </p:nvSpPr>
         <p:spPr>
           <a:xfrm>
-            <a:off x="5349240" y="1005840"/>
-            <a:ext cx="6522415" cy="731520"/>
+            <a:off x="4069080" y="1005840"/>
+            <a:ext cx="7802575" cy="731520"/>
           </a:xfrm>
           <a:prstGeom prst="rect">
             <a:avLst/>
@@ -18116,7 +18413,7 @@
                 <a:ea typeface="Times New Roman" pitchFamily="34" charset="-122"/>
                 <a:cs typeface="Times New Roman" pitchFamily="34" charset="-120"/>
               </a:rPr>
-              <a:t>4. Effects of Local Winds on Weather and Man (continued)</a:t>
+              <a:t>4. Foehn Winds</a:t>
             </a:r>
             <a:endParaRPr lang="en-US" sz="3600" dirty="0"/>
           </a:p>
@@ -18130,8 +18427,8 @@
         </p:nvSpPr>
         <p:spPr>
           <a:xfrm>
-            <a:off x="5349240" y="1783080"/>
-            <a:ext cx="6522415" cy="4663440"/>
+            <a:off x="4069080" y="1783080"/>
+            <a:ext cx="7802575" cy="4663440"/>
           </a:xfrm>
           <a:prstGeom prst="rect">
             <a:avLst/>
@@ -18158,7 +18455,7 @@
                 <a:ea typeface="Times New Roman" pitchFamily="34" charset="-122"/>
                 <a:cs typeface="Times New Roman" pitchFamily="34" charset="-120"/>
               </a:rPr>
-              <a:t>Comfort and energy: </a:t>
+              <a:t>On the leeward side: </a:t>
             </a:r>
             <a:pPr algn="l" indent="0" marL="0">
               <a:spcAft>
@@ -18175,7 +18472,7 @@
                 <a:ea typeface="Times New Roman" pitchFamily="34" charset="-122"/>
                 <a:cs typeface="Times New Roman" pitchFamily="34" charset="-120"/>
               </a:rPr>
-              <a:t>Gentle breezes are pleasant, dusty winds cause diseases, and steady winds can drive wind turbines.</a:t>
+              <a:t>The dry air then descends the other side and is compressed, so it warms quickly at the dry adiabatic rate. It reaches the foot of the mountain much warmer and drier than it was at the start.</a:t>
             </a:r>
             <a:endParaRPr lang="en-US" sz="4000" dirty="0"/>
           </a:p>
@@ -18287,7 +18584,7 @@
                 <a:ea typeface="Calibri" pitchFamily="34" charset="-122"/>
                 <a:cs typeface="Calibri" pitchFamily="34" charset="-120"/>
               </a:rPr>
-              <a:t>FORMATIVE EVALUATION</a:t>
+              <a:t>BOARD SUMMARY</a:t>
             </a:r>
             <a:endParaRPr lang="en-US" sz="1400" dirty="0"/>
           </a:p>
@@ -18310,7 +18607,7 @@
         <p:spPr>
           <a:xfrm>
             <a:off x="0" y="658368"/>
-            <a:ext cx="5120640" cy="5833872"/>
+            <a:ext cx="1463040" cy="5833872"/>
           </a:xfrm>
           <a:prstGeom prst="rect">
             <a:avLst/>
@@ -18325,8 +18622,8 @@
         </p:nvSpPr>
         <p:spPr>
           <a:xfrm>
-            <a:off x="5349240" y="1005840"/>
-            <a:ext cx="6522415" cy="731520"/>
+            <a:off x="1691640" y="1005840"/>
+            <a:ext cx="10180015" cy="731520"/>
           </a:xfrm>
           <a:prstGeom prst="rect">
             <a:avLst/>
@@ -18352,7 +18649,7 @@
                 <a:ea typeface="Times New Roman" pitchFamily="34" charset="-122"/>
                 <a:cs typeface="Times New Roman" pitchFamily="34" charset="-120"/>
               </a:rPr>
-              <a:t>Evaluation 1</a:t>
+              <a:t>4. Foehn Winds</a:t>
             </a:r>
             <a:endParaRPr lang="en-US" sz="3600" dirty="0"/>
           </a:p>
@@ -18366,8 +18663,8 @@
         </p:nvSpPr>
         <p:spPr>
           <a:xfrm>
-            <a:off x="5349240" y="1783080"/>
-            <a:ext cx="6522415" cy="4663440"/>
+            <a:off x="1691640" y="1783080"/>
+            <a:ext cx="10180015" cy="4663440"/>
           </a:xfrm>
           <a:prstGeom prst="rect">
             <a:avLst/>
@@ -18386,7 +18683,7 @@
               <a:buNone/>
             </a:pPr>
             <a:r>
-              <a:rPr lang="en-US" sz="4000" dirty="0">
+              <a:rPr lang="en-US" sz="3800" b="1" dirty="0">
                 <a:solidFill>
                   <a:srgbClr val="111111"/>
                 </a:solidFill>
@@ -18394,9 +18691,26 @@
                 <a:ea typeface="Times New Roman" pitchFamily="34" charset="-122"/>
                 <a:cs typeface="Times New Roman" pitchFamily="34" charset="-120"/>
               </a:rPr>
-              <a:t>Explain why a sea breeze differs from a land breeze.</a:t>
-            </a:r>
-            <a:endParaRPr lang="en-US" sz="4000" dirty="0"/>
+              <a:t>Examples and effects: </a:t>
+            </a:r>
+            <a:pPr algn="l" indent="0" marL="0">
+              <a:spcAft>
+                <a:spcPts val="800"/>
+              </a:spcAft>
+              <a:buNone/>
+            </a:pPr>
+            <a:r>
+              <a:rPr lang="en-US" sz="3800" dirty="0">
+                <a:solidFill>
+                  <a:srgbClr val="111111"/>
+                </a:solidFill>
+                <a:latin typeface="Times New Roman" pitchFamily="34" charset="0"/>
+                <a:ea typeface="Times New Roman" pitchFamily="34" charset="-122"/>
+                <a:cs typeface="Times New Roman" pitchFamily="34" charset="-120"/>
+              </a:rPr>
+              <a:t>Examples are the Foehn of the Alps and the Chinook of the Rocky Mountains, which can raise the temperature by 20 °C in a few hours. They melt snow quickly, which is good for early grazing but can cause floods, and they dry the vegetation and increase the risk of forest fires.</a:t>
+            </a:r>
+            <a:endParaRPr lang="en-US" sz="3800" dirty="0"/>
           </a:p>
         </p:txBody>
       </p:sp>
@@ -18725,7 +19039,7 @@
                 <a:ea typeface="Calibri" pitchFamily="34" charset="-122"/>
                 <a:cs typeface="Calibri" pitchFamily="34" charset="-120"/>
               </a:rPr>
-              <a:t>FORMATIVE EVALUATION</a:t>
+              <a:t>BOARD SUMMARY</a:t>
             </a:r>
             <a:endParaRPr lang="en-US" sz="1400" dirty="0"/>
           </a:p>
@@ -18748,7 +19062,7 @@
         <p:spPr>
           <a:xfrm>
             <a:off x="0" y="658368"/>
-            <a:ext cx="5120640" cy="5833872"/>
+            <a:ext cx="2468880" cy="5833872"/>
           </a:xfrm>
           <a:prstGeom prst="rect">
             <a:avLst/>
@@ -18763,8 +19077,8 @@
         </p:nvSpPr>
         <p:spPr>
           <a:xfrm>
-            <a:off x="5349240" y="1005840"/>
-            <a:ext cx="6522415" cy="731520"/>
+            <a:off x="2697480" y="1005840"/>
+            <a:ext cx="9174175" cy="731520"/>
           </a:xfrm>
           <a:prstGeom prst="rect">
             <a:avLst/>
@@ -18790,7 +19104,7 @@
                 <a:ea typeface="Times New Roman" pitchFamily="34" charset="-122"/>
                 <a:cs typeface="Times New Roman" pitchFamily="34" charset="-120"/>
               </a:rPr>
-              <a:t>Expected Answer</a:t>
+              <a:t>5. Effects of Winds on Weather and Man</a:t>
             </a:r>
             <a:endParaRPr lang="en-US" sz="3600" dirty="0"/>
           </a:p>
@@ -18804,8 +19118,8 @@
         </p:nvSpPr>
         <p:spPr>
           <a:xfrm>
-            <a:off x="5349240" y="1783080"/>
-            <a:ext cx="6522415" cy="4663440"/>
+            <a:off x="2697480" y="1783080"/>
+            <a:ext cx="9174175" cy="4663440"/>
           </a:xfrm>
           <a:prstGeom prst="rect">
             <a:avLst/>
@@ -18824,7 +19138,7 @@
               <a:buNone/>
             </a:pPr>
             <a:r>
-              <a:rPr lang="en-US" sz="4000" dirty="0">
+              <a:rPr lang="en-US" sz="4000" i="1" dirty="0">
                 <a:solidFill>
                   <a:srgbClr val="111111"/>
                 </a:solidFill>
@@ -18832,7 +19146,44 @@
                 <a:ea typeface="Times New Roman" pitchFamily="34" charset="-122"/>
                 <a:cs typeface="Times New Roman" pitchFamily="34" charset="-120"/>
               </a:rPr>
-              <a:t>By day the land is hotter than the sea and wind blows from the sea; at night the land is cooler and wind blows from the land.</a:t>
+              <a:t>Local winds have the following effects on weather and man:</a:t>
+            </a:r>
+            <a:endParaRPr lang="en-US" sz="4000" dirty="0"/>
+          </a:p>
+          <a:p>
+            <a:pPr algn="l" indent="0" marL="0">
+              <a:spcAft>
+                <a:spcPts val="800"/>
+              </a:spcAft>
+              <a:buNone/>
+            </a:pPr>
+            <a:r>
+              <a:rPr lang="en-US" sz="4000" b="1" dirty="0">
+                <a:solidFill>
+                  <a:srgbClr val="111111"/>
+                </a:solidFill>
+                <a:latin typeface="Times New Roman" pitchFamily="34" charset="0"/>
+                <a:ea typeface="Times New Roman" pitchFamily="34" charset="-122"/>
+                <a:cs typeface="Times New Roman" pitchFamily="34" charset="-120"/>
+              </a:rPr>
+              <a:t>On temperature and comfort: </a:t>
+            </a:r>
+            <a:pPr algn="l" indent="0" marL="0">
+              <a:spcAft>
+                <a:spcPts val="800"/>
+              </a:spcAft>
+              <a:buNone/>
+            </a:pPr>
+            <a:r>
+              <a:rPr lang="en-US" sz="4000" dirty="0">
+                <a:solidFill>
+                  <a:srgbClr val="111111"/>
+                </a:solidFill>
+                <a:latin typeface="Times New Roman" pitchFamily="34" charset="0"/>
+                <a:ea typeface="Times New Roman" pitchFamily="34" charset="-122"/>
+                <a:cs typeface="Times New Roman" pitchFamily="34" charset="-120"/>
+              </a:rPr>
+              <a:t>Sea breezes cool coastal towns on hot afternoons, and katabatic winds bring cool nights to valleys. These winds make life more pleasant in hot regions.</a:t>
             </a:r>
             <a:endParaRPr lang="en-US" sz="4000" dirty="0"/>
           </a:p>
@@ -18944,7 +19295,7 @@
                 <a:ea typeface="Calibri" pitchFamily="34" charset="-122"/>
                 <a:cs typeface="Calibri" pitchFamily="34" charset="-120"/>
               </a:rPr>
-              <a:t>FORMATIVE EVALUATION</a:t>
+              <a:t>BOARD SUMMARY</a:t>
             </a:r>
             <a:endParaRPr lang="en-US" sz="1400" dirty="0"/>
           </a:p>
@@ -18967,7 +19318,7 @@
         <p:spPr>
           <a:xfrm>
             <a:off x="0" y="658368"/>
-            <a:ext cx="5120640" cy="5833872"/>
+            <a:ext cx="3840480" cy="5833872"/>
           </a:xfrm>
           <a:prstGeom prst="rect">
             <a:avLst/>
@@ -18982,8 +19333,8 @@
         </p:nvSpPr>
         <p:spPr>
           <a:xfrm>
-            <a:off x="5349240" y="1005840"/>
-            <a:ext cx="6522415" cy="731520"/>
+            <a:off x="4069080" y="1005840"/>
+            <a:ext cx="7802575" cy="731520"/>
           </a:xfrm>
           <a:prstGeom prst="rect">
             <a:avLst/>
@@ -19009,7 +19360,7 @@
                 <a:ea typeface="Times New Roman" pitchFamily="34" charset="-122"/>
                 <a:cs typeface="Times New Roman" pitchFamily="34" charset="-120"/>
               </a:rPr>
-              <a:t>Evaluation 2</a:t>
+              <a:t>5. Effects of Winds on Weather and Man</a:t>
             </a:r>
             <a:endParaRPr lang="en-US" sz="3600" dirty="0"/>
           </a:p>
@@ -19023,8 +19374,8 @@
         </p:nvSpPr>
         <p:spPr>
           <a:xfrm>
-            <a:off x="5349240" y="1783080"/>
-            <a:ext cx="6522415" cy="4663440"/>
+            <a:off x="4069080" y="1783080"/>
+            <a:ext cx="7802575" cy="4663440"/>
           </a:xfrm>
           <a:prstGeom prst="rect">
             <a:avLst/>
@@ -19043,7 +19394,7 @@
               <a:buNone/>
             </a:pPr>
             <a:r>
-              <a:rPr lang="en-US" sz="4000" dirty="0">
+              <a:rPr lang="en-US" sz="4000" b="1" dirty="0">
                 <a:solidFill>
                   <a:srgbClr val="111111"/>
                 </a:solidFill>
@@ -19051,7 +19402,24 @@
                 <a:ea typeface="Times New Roman" pitchFamily="34" charset="-122"/>
                 <a:cs typeface="Times New Roman" pitchFamily="34" charset="-120"/>
               </a:rPr>
-              <a:t>Why is a katabatic wind cold?</a:t>
+              <a:t>On clouds and rain: </a:t>
+            </a:r>
+            <a:pPr algn="l" indent="0" marL="0">
+              <a:spcAft>
+                <a:spcPts val="800"/>
+              </a:spcAft>
+              <a:buNone/>
+            </a:pPr>
+            <a:r>
+              <a:rPr lang="en-US" sz="4000" dirty="0">
+                <a:solidFill>
+                  <a:srgbClr val="111111"/>
+                </a:solidFill>
+                <a:latin typeface="Times New Roman" pitchFamily="34" charset="0"/>
+                <a:ea typeface="Times New Roman" pitchFamily="34" charset="-122"/>
+                <a:cs typeface="Times New Roman" pitchFamily="34" charset="-120"/>
+              </a:rPr>
+              <a:t>Sea breezes and anabatic winds make moist air rise, which forms clouds and afternoon showers on coasts and mountains. Foehn winds, on the other hand, bring dry, clear weather to the leeward side.</a:t>
             </a:r>
             <a:endParaRPr lang="en-US" sz="4000" dirty="0"/>
           </a:p>
@@ -19163,7 +19531,7 @@
                 <a:ea typeface="Calibri" pitchFamily="34" charset="-122"/>
                 <a:cs typeface="Calibri" pitchFamily="34" charset="-120"/>
               </a:rPr>
-              <a:t>FORMATIVE EVALUATION</a:t>
+              <a:t>BOARD SUMMARY</a:t>
             </a:r>
             <a:endParaRPr lang="en-US" sz="1400" dirty="0"/>
           </a:p>
@@ -19228,7 +19596,7 @@
                 <a:ea typeface="Times New Roman" pitchFamily="34" charset="-122"/>
                 <a:cs typeface="Times New Roman" pitchFamily="34" charset="-120"/>
               </a:rPr>
-              <a:t>Expected Answer</a:t>
+              <a:t>5. Effects of Winds on Weather and Man</a:t>
             </a:r>
             <a:endParaRPr lang="en-US" sz="3600" dirty="0"/>
           </a:p>
@@ -19262,7 +19630,7 @@
               <a:buNone/>
             </a:pPr>
             <a:r>
-              <a:rPr lang="en-US" sz="4000" dirty="0">
+              <a:rPr lang="en-US" sz="4000" b="1" dirty="0">
                 <a:solidFill>
                   <a:srgbClr val="111111"/>
                 </a:solidFill>
@@ -19270,7 +19638,24 @@
                 <a:ea typeface="Times New Roman" pitchFamily="34" charset="-122"/>
                 <a:cs typeface="Times New Roman" pitchFamily="34" charset="-120"/>
               </a:rPr>
-              <a:t>It is air cooled on the slopes at night, which becomes heavy and flows down.</a:t>
+              <a:t>On agriculture: </a:t>
+            </a:r>
+            <a:pPr algn="l" indent="0" marL="0">
+              <a:spcAft>
+                <a:spcPts val="800"/>
+              </a:spcAft>
+              <a:buNone/>
+            </a:pPr>
+            <a:r>
+              <a:rPr lang="en-US" sz="4000" dirty="0">
+                <a:solidFill>
+                  <a:srgbClr val="111111"/>
+                </a:solidFill>
+                <a:latin typeface="Times New Roman" pitchFamily="34" charset="0"/>
+                <a:ea typeface="Times New Roman" pitchFamily="34" charset="-122"/>
+                <a:cs typeface="Times New Roman" pitchFamily="34" charset="-120"/>
+              </a:rPr>
+              <a:t>Foehn winds melt snow early and help grapes and fruit to ripen. Katabatic winds can bring frost to valleys, so farmers plant sensitive crops on the slopes.</a:t>
             </a:r>
             <a:endParaRPr lang="en-US" sz="4000" dirty="0"/>
           </a:p>
@@ -19382,7 +19767,7 @@
                 <a:ea typeface="Calibri" pitchFamily="34" charset="-122"/>
                 <a:cs typeface="Calibri" pitchFamily="34" charset="-120"/>
               </a:rPr>
-              <a:t>REMEDIATION</a:t>
+              <a:t>BOARD SUMMARY</a:t>
             </a:r>
             <a:endParaRPr lang="en-US" sz="1400" dirty="0"/>
           </a:p>
@@ -19405,7 +19790,7 @@
         <p:spPr>
           <a:xfrm>
             <a:off x="0" y="658368"/>
-            <a:ext cx="3840480" cy="5833872"/>
+            <a:ext cx="5120640" cy="5833872"/>
           </a:xfrm>
           <a:prstGeom prst="rect">
             <a:avLst/>
@@ -19420,8 +19805,8 @@
         </p:nvSpPr>
         <p:spPr>
           <a:xfrm>
-            <a:off x="4069080" y="1005840"/>
-            <a:ext cx="7802575" cy="731520"/>
+            <a:off x="5349240" y="1005840"/>
+            <a:ext cx="6522415" cy="731520"/>
           </a:xfrm>
           <a:prstGeom prst="rect">
             <a:avLst/>
@@ -19447,7 +19832,7 @@
                 <a:ea typeface="Times New Roman" pitchFamily="34" charset="-122"/>
                 <a:cs typeface="Times New Roman" pitchFamily="34" charset="-120"/>
               </a:rPr>
-              <a:t>Remediation</a:t>
+              <a:t>5. Effects of Winds on Weather and Man</a:t>
             </a:r>
             <a:endParaRPr lang="en-US" sz="3600" dirty="0"/>
           </a:p>
@@ -19461,8 +19846,8 @@
         </p:nvSpPr>
         <p:spPr>
           <a:xfrm>
-            <a:off x="4069080" y="1783080"/>
-            <a:ext cx="7802575" cy="4663440"/>
+            <a:off x="5349240" y="1783080"/>
+            <a:ext cx="6522415" cy="4663440"/>
           </a:xfrm>
           <a:prstGeom prst="rect">
             <a:avLst/>
@@ -19489,18 +19874,13 @@
                 <a:ea typeface="Times New Roman" pitchFamily="34" charset="-122"/>
                 <a:cs typeface="Times New Roman" pitchFamily="34" charset="-120"/>
               </a:rPr>
-              <a:t>Fill in the blanks:</a:t>
-            </a:r>
-            <a:endParaRPr lang="en-US" sz="4000" dirty="0"/>
-          </a:p>
-          <a:p>
-            <a:pPr algn="l" marL="342900" indent="-342900">
+              <a:t>On fishing and energy: </a:t>
+            </a:r>
+            <a:pPr algn="l" indent="0" marL="0">
               <a:spcAft>
                 <a:spcPts val="800"/>
               </a:spcAft>
-              <a:buSzPct val="100000"/>
-              <a:buFont typeface="+mj-lt"/>
-              <a:buAutoNum type="arabicPeriod" startAt="1"/>
+              <a:buNone/>
             </a:pPr>
             <a:r>
               <a:rPr lang="en-US" sz="4000" dirty="0">
@@ -19511,51 +19891,7 @@
                 <a:ea typeface="Times New Roman" pitchFamily="34" charset="-122"/>
                 <a:cs typeface="Times New Roman" pitchFamily="34" charset="-120"/>
               </a:rPr>
-              <a:t>A wind from the sea by day is a sea ______.</a:t>
-            </a:r>
-            <a:endParaRPr lang="en-US" sz="4000" dirty="0"/>
-          </a:p>
-          <a:p>
-            <a:pPr algn="l" marL="342900" indent="-342900">
-              <a:spcAft>
-                <a:spcPts val="800"/>
-              </a:spcAft>
-              <a:buSzPct val="100000"/>
-              <a:buFont typeface="+mj-lt"/>
-              <a:buAutoNum type="arabicPeriod" startAt="1"/>
-            </a:pPr>
-            <a:r>
-              <a:rPr lang="en-US" sz="4000" dirty="0">
-                <a:solidFill>
-                  <a:srgbClr val="111111"/>
-                </a:solidFill>
-                <a:latin typeface="Times New Roman" pitchFamily="34" charset="0"/>
-                <a:ea typeface="Times New Roman" pitchFamily="34" charset="-122"/>
-                <a:cs typeface="Times New Roman" pitchFamily="34" charset="-120"/>
-              </a:rPr>
-              <a:t>A wind blowing down slopes at night is ______.</a:t>
-            </a:r>
-            <a:endParaRPr lang="en-US" sz="4000" dirty="0"/>
-          </a:p>
-          <a:p>
-            <a:pPr algn="l" marL="342900" indent="-342900">
-              <a:spcAft>
-                <a:spcPts val="800"/>
-              </a:spcAft>
-              <a:buSzPct val="100000"/>
-              <a:buFont typeface="+mj-lt"/>
-              <a:buAutoNum type="arabicPeriod" startAt="1"/>
-            </a:pPr>
-            <a:r>
-              <a:rPr lang="en-US" sz="4000" dirty="0">
-                <a:solidFill>
-                  <a:srgbClr val="111111"/>
-                </a:solidFill>
-                <a:latin typeface="Times New Roman" pitchFamily="34" charset="0"/>
-                <a:ea typeface="Times New Roman" pitchFamily="34" charset="-122"/>
-                <a:cs typeface="Times New Roman" pitchFamily="34" charset="-120"/>
-              </a:rPr>
-              <a:t>The Chinook is a ______ wind.</a:t>
+              <a:t>Fishermen use land and sea breezes to sail out and return. Steady local winds can also drive wind turbines to produce electricity.</a:t>
             </a:r>
             <a:endParaRPr lang="en-US" sz="4000" dirty="0"/>
           </a:p>
@@ -19667,7 +20003,7 @@
                 <a:ea typeface="Calibri" pitchFamily="34" charset="-122"/>
                 <a:cs typeface="Calibri" pitchFamily="34" charset="-120"/>
               </a:rPr>
-              <a:t>HOMEWORK</a:t>
+              <a:t>FORMATIVE EVALUATION</a:t>
             </a:r>
             <a:endParaRPr lang="en-US" sz="1400" dirty="0"/>
           </a:p>
@@ -19732,7 +20068,7 @@
                 <a:ea typeface="Times New Roman" pitchFamily="34" charset="-122"/>
                 <a:cs typeface="Times New Roman" pitchFamily="34" charset="-120"/>
               </a:rPr>
-              <a:t>Homework</a:t>
+              <a:t>Evaluation 1</a:t>
             </a:r>
             <a:endParaRPr lang="en-US" sz="3600" dirty="0"/>
           </a:p>
@@ -19774,7 +20110,7 @@
                 <a:ea typeface="Times New Roman" pitchFamily="34" charset="-122"/>
                 <a:cs typeface="Times New Roman" pitchFamily="34" charset="-120"/>
               </a:rPr>
-              <a:t>Define an air mass.</a:t>
+              <a:t>Explain why a sea breeze differs from a land breeze.</a:t>
             </a:r>
             <a:endParaRPr lang="en-US" sz="4000" dirty="0"/>
           </a:p>
@@ -19886,7 +20222,7 @@
                 <a:ea typeface="Calibri" pitchFamily="34" charset="-122"/>
                 <a:cs typeface="Calibri" pitchFamily="34" charset="-120"/>
               </a:rPr>
-              <a:t>NEXT LESSON</a:t>
+              <a:t>FORMATIVE EVALUATION</a:t>
             </a:r>
             <a:endParaRPr lang="en-US" sz="1400" dirty="0"/>
           </a:p>
@@ -19951,7 +20287,7 @@
                 <a:ea typeface="Times New Roman" pitchFamily="34" charset="-122"/>
                 <a:cs typeface="Times New Roman" pitchFamily="34" charset="-120"/>
               </a:rPr>
-              <a:t>Next Lesson</a:t>
+              <a:t>Expected Answer</a:t>
             </a:r>
             <a:endParaRPr lang="en-US" sz="3600" dirty="0"/>
           </a:p>
@@ -19975,17 +20311,17 @@
           <a:ln/>
         </p:spPr>
         <p:txBody>
-          <a:bodyPr wrap="square" lIns="0" tIns="0" rIns="0" bIns="0" rtlCol="0" anchor="ctr"/>
-          <a:lstStyle/>
-          <a:p>
-            <a:pPr algn="ctr" indent="0" marL="0">
+          <a:bodyPr wrap="square" lIns="0" tIns="0" rIns="0" bIns="0" rtlCol="0" anchor="t"/>
+          <a:lstStyle/>
+          <a:p>
+            <a:pPr algn="l" indent="0" marL="0">
               <a:spcAft>
                 <a:spcPts val="800"/>
               </a:spcAft>
               <a:buNone/>
             </a:pPr>
             <a:r>
-              <a:rPr lang="en-US" sz="4000" b="1" dirty="0">
+              <a:rPr lang="en-US" sz="4000" dirty="0">
                 <a:solidFill>
                   <a:srgbClr val="111111"/>
                 </a:solidFill>
@@ -19993,27 +20329,7 @@
                 <a:ea typeface="Times New Roman" pitchFamily="34" charset="-122"/>
                 <a:cs typeface="Times New Roman" pitchFamily="34" charset="-120"/>
               </a:rPr>
-              <a:t>Our next lesson will be on:</a:t>
-            </a:r>
-            <a:endParaRPr lang="en-US" sz="4000" dirty="0"/>
-          </a:p>
-          <a:p>
-            <a:pPr algn="ctr" indent="0" marL="0">
-              <a:spcAft>
-                <a:spcPts val="800"/>
-              </a:spcAft>
-              <a:buNone/>
-            </a:pPr>
-            <a:r>
-              <a:rPr lang="en-US" sz="4000" b="1" dirty="0">
-                <a:solidFill>
-                  <a:srgbClr val="990011"/>
-                </a:solidFill>
-                <a:latin typeface="Times New Roman" pitchFamily="34" charset="0"/>
-                <a:ea typeface="Times New Roman" pitchFamily="34" charset="-122"/>
-                <a:cs typeface="Times New Roman" pitchFamily="34" charset="-120"/>
-              </a:rPr>
-              <a:t>Lesson 18: Air Masses</a:t>
+              <a:t>By day the land is hotter than the sea and wind blows from the sea; at night the land is cooler and wind blows from the land.</a:t>
             </a:r>
             <a:endParaRPr lang="en-US" sz="4000" dirty="0"/>
           </a:p>
@@ -20125,22 +20441,46 @@
                 <a:ea typeface="Calibri" pitchFamily="34" charset="-122"/>
                 <a:cs typeface="Calibri" pitchFamily="34" charset="-120"/>
               </a:rPr>
-              <a:t>BILINGUAL GAME</a:t>
+              <a:t>FORMATIVE EVALUATION</a:t>
             </a:r>
             <a:endParaRPr lang="en-US" sz="1400" dirty="0"/>
           </a:p>
         </p:txBody>
       </p:sp>
-      <p:sp>
-        <p:nvSpPr>
-          <p:cNvPr id="3" name="Text 1"/>
+      <p:pic>
+        <p:nvPicPr>
+          <p:cNvPr id="3" name="Image 0" descr="/home/claude/f4/img/minesec_sheet.png">    </p:cNvPr>
+          <p:cNvPicPr>
+            <a:picLocks noChangeAspect="1"/>
+          </p:cNvPicPr>
+          <p:nvPr/>
+        </p:nvPicPr>
+        <p:blipFill>
+          <a:blip r:embed="rId1"/>
+          <a:stretch>
+            <a:fillRect/>
+          </a:stretch>
+        </p:blipFill>
+        <p:spPr>
+          <a:xfrm>
+            <a:off x="0" y="658368"/>
+            <a:ext cx="5120640" cy="5833872"/>
+          </a:xfrm>
+          <a:prstGeom prst="rect">
+            <a:avLst/>
+          </a:prstGeom>
+        </p:spPr>
+      </p:pic>
+      <p:sp>
+        <p:nvSpPr>
+          <p:cNvPr id="4" name="Text 1"/>
           <p:cNvSpPr/>
           <p:nvPr/>
         </p:nvSpPr>
         <p:spPr>
           <a:xfrm>
-            <a:off x="457200" y="1005840"/>
-            <a:ext cx="11277295" cy="731520"/>
+            <a:off x="5349240" y="1005840"/>
+            <a:ext cx="6522415" cy="731520"/>
           </a:xfrm>
           <a:prstGeom prst="rect">
             <a:avLst/>
@@ -20149,7 +20489,9 @@
           <a:ln/>
         </p:spPr>
         <p:txBody>
-          <a:bodyPr wrap="square" lIns="0" tIns="0" rIns="0" bIns="0" rtlCol="0" anchor="ctr"/>
+          <a:bodyPr wrap="square" lIns="0" tIns="0" rIns="0" bIns="0" rtlCol="0" anchor="ctr">
+            <a:normAutofit/>
+          </a:bodyPr>
           <a:lstStyle/>
           <a:p>
             <a:pPr algn="ctr" indent="0" marL="0">
@@ -20164,6 +20506,1492 @@
                 <a:ea typeface="Times New Roman" pitchFamily="34" charset="-122"/>
                 <a:cs typeface="Times New Roman" pitchFamily="34" charset="-120"/>
               </a:rPr>
+              <a:t>Evaluation 2</a:t>
+            </a:r>
+            <a:endParaRPr lang="en-US" sz="3600" dirty="0"/>
+          </a:p>
+        </p:txBody>
+      </p:sp>
+      <p:sp>
+        <p:nvSpPr>
+          <p:cNvPr id="5" name="Text 2"/>
+          <p:cNvSpPr/>
+          <p:nvPr/>
+        </p:nvSpPr>
+        <p:spPr>
+          <a:xfrm>
+            <a:off x="5349240" y="1783080"/>
+            <a:ext cx="6522415" cy="4663440"/>
+          </a:xfrm>
+          <a:prstGeom prst="rect">
+            <a:avLst/>
+          </a:prstGeom>
+          <a:noFill/>
+          <a:ln/>
+        </p:spPr>
+        <p:txBody>
+          <a:bodyPr wrap="square" lIns="0" tIns="0" rIns="0" bIns="0" rtlCol="0" anchor="t"/>
+          <a:lstStyle/>
+          <a:p>
+            <a:pPr algn="l" indent="0" marL="0">
+              <a:spcAft>
+                <a:spcPts val="800"/>
+              </a:spcAft>
+              <a:buNone/>
+            </a:pPr>
+            <a:r>
+              <a:rPr lang="en-US" sz="4000" dirty="0">
+                <a:solidFill>
+                  <a:srgbClr val="111111"/>
+                </a:solidFill>
+                <a:latin typeface="Times New Roman" pitchFamily="34" charset="0"/>
+                <a:ea typeface="Times New Roman" pitchFamily="34" charset="-122"/>
+                <a:cs typeface="Times New Roman" pitchFamily="34" charset="-120"/>
+              </a:rPr>
+              <a:t>Why is a katabatic wind cold?</a:t>
+            </a:r>
+            <a:endParaRPr lang="en-US" sz="4000" dirty="0"/>
+          </a:p>
+        </p:txBody>
+      </p:sp>
+      <p:sp>
+        <p:nvSpPr>
+          <p:cNvPr id="25" name="Slide Number Placeholder 0"/>
+          <p:cNvSpPr>
+            <a:spLocks noGrp="1"/>
+          </p:cNvSpPr>
+          <p:nvPr>
+            <p:ph type="sldNum" sz="quarter" idx="4294967295"/>
+          </p:nvPr>
+        </p:nvSpPr>
+        <p:spPr>
+          <a:xfrm>
+            <a:off x="27432" y="91440"/>
+            <a:ext cx="585216" cy="475488"/>
+          </a:xfrm>
+          <a:prstGeom prst="rect">
+            <a:avLst/>
+          </a:prstGeom>
+          <a:extLst>
+            <a:ext uri="{C572A759-6A51-4108-AA02-DFA0A04FC94B}">
+              <ma14:wrappingTextBoxFlag xmlns:ma14="http://schemas.microsoft.com/office/mac/drawingml/2011/main" val="0"/>
+            </a:ext>
+          </a:extLst>
+        </p:spPr>
+        <p:txBody>
+          <a:bodyPr/>
+          <a:lstStyle>
+            <a:lvl1pPr>
+              <a:defRPr sz="2000">
+                <a:solidFill>
+                  <a:srgbClr val="FFFFFF"/>
+                </a:solidFill>
+                <a:latin typeface="Calibri"/>
+                <a:ea typeface="Calibri"/>
+                <a:cs typeface="Calibri"/>
+              </a:defRPr>
+            </a:lvl1pPr>
+          </a:lstStyle>
+          <a:p>
+            <a:pPr algn="ctr"/>
+            <a:fld id="{F7021451-1387-4CA6-816F-3879F97B5CBC}" type="slidenum">
+              <a:rPr b="1" lang="en-US"/>
+              <a:t>56</a:t>
+            </a:fld>
+            <a:endParaRPr lang="en-US"/>
+          </a:p>
+        </p:txBody>
+      </p:sp>
+    </p:spTree>
+  </p:cSld>
+  <p:clrMapOvr>
+    <a:masterClrMapping/>
+  </p:clrMapOvr>
+</p:sld>
+</file>
+
+<file path=ppt/slides/slide57.xml><?xml version="1.0" encoding="utf-8"?>
+<p:sld xmlns:a="http://schemas.openxmlformats.org/drawingml/2006/main" xmlns:r="http://schemas.openxmlformats.org/officeDocument/2006/relationships" xmlns:p="http://schemas.openxmlformats.org/presentationml/2006/main">
+  <p:cSld name="Slide 57">
+    <p:spTree>
+      <p:nvGrpSpPr>
+        <p:cNvPr id="1" name=""/>
+        <p:cNvGrpSpPr/>
+        <p:nvPr/>
+      </p:nvGrpSpPr>
+      <p:grpSpPr>
+        <a:xfrm>
+          <a:off x="0" y="0"/>
+          <a:ext cx="0" cy="0"/>
+          <a:chOff x="0" y="0"/>
+          <a:chExt cx="0" cy="0"/>
+        </a:xfrm>
+      </p:grpSpPr>
+      <p:sp>
+        <p:nvSpPr>
+          <p:cNvPr id="2" name="Text 0"/>
+          <p:cNvSpPr/>
+          <p:nvPr/>
+        </p:nvSpPr>
+        <p:spPr>
+          <a:xfrm>
+            <a:off x="457200" y="713232"/>
+            <a:ext cx="11368735" cy="274320"/>
+          </a:xfrm>
+          <a:prstGeom prst="rect">
+            <a:avLst/>
+          </a:prstGeom>
+          <a:noFill/>
+          <a:ln/>
+        </p:spPr>
+        <p:txBody>
+          <a:bodyPr wrap="square" lIns="0" tIns="0" rIns="0" bIns="0" rtlCol="0" anchor="ctr"/>
+          <a:lstStyle/>
+          <a:p>
+            <a:pPr algn="r" indent="0" marL="0">
+              <a:buNone/>
+            </a:pPr>
+            <a:r>
+              <a:rPr lang="en-US" sz="1400" b="1" dirty="0">
+                <a:solidFill>
+                  <a:srgbClr val="1C3F6E"/>
+                </a:solidFill>
+                <a:latin typeface="Calibri" pitchFamily="34" charset="0"/>
+                <a:ea typeface="Calibri" pitchFamily="34" charset="-122"/>
+                <a:cs typeface="Calibri" pitchFamily="34" charset="-120"/>
+              </a:rPr>
+              <a:t>FORMATIVE EVALUATION</a:t>
+            </a:r>
+            <a:endParaRPr lang="en-US" sz="1400" dirty="0"/>
+          </a:p>
+        </p:txBody>
+      </p:sp>
+      <p:pic>
+        <p:nvPicPr>
+          <p:cNvPr id="3" name="Image 0" descr="/home/claude/f4/img/minesec_sheet.png">    </p:cNvPr>
+          <p:cNvPicPr>
+            <a:picLocks noChangeAspect="1"/>
+          </p:cNvPicPr>
+          <p:nvPr/>
+        </p:nvPicPr>
+        <p:blipFill>
+          <a:blip r:embed="rId1"/>
+          <a:stretch>
+            <a:fillRect/>
+          </a:stretch>
+        </p:blipFill>
+        <p:spPr>
+          <a:xfrm>
+            <a:off x="0" y="658368"/>
+            <a:ext cx="5120640" cy="5833872"/>
+          </a:xfrm>
+          <a:prstGeom prst="rect">
+            <a:avLst/>
+          </a:prstGeom>
+        </p:spPr>
+      </p:pic>
+      <p:sp>
+        <p:nvSpPr>
+          <p:cNvPr id="4" name="Text 1"/>
+          <p:cNvSpPr/>
+          <p:nvPr/>
+        </p:nvSpPr>
+        <p:spPr>
+          <a:xfrm>
+            <a:off x="5349240" y="1005840"/>
+            <a:ext cx="6522415" cy="731520"/>
+          </a:xfrm>
+          <a:prstGeom prst="rect">
+            <a:avLst/>
+          </a:prstGeom>
+          <a:noFill/>
+          <a:ln/>
+        </p:spPr>
+        <p:txBody>
+          <a:bodyPr wrap="square" lIns="0" tIns="0" rIns="0" bIns="0" rtlCol="0" anchor="ctr">
+            <a:normAutofit/>
+          </a:bodyPr>
+          <a:lstStyle/>
+          <a:p>
+            <a:pPr algn="ctr" indent="0" marL="0">
+              <a:buNone/>
+            </a:pPr>
+            <a:r>
+              <a:rPr lang="en-US" sz="3600" b="1" dirty="0">
+                <a:solidFill>
+                  <a:srgbClr val="990011"/>
+                </a:solidFill>
+                <a:latin typeface="Times New Roman" pitchFamily="34" charset="0"/>
+                <a:ea typeface="Times New Roman" pitchFamily="34" charset="-122"/>
+                <a:cs typeface="Times New Roman" pitchFamily="34" charset="-120"/>
+              </a:rPr>
+              <a:t>Expected Answer</a:t>
+            </a:r>
+            <a:endParaRPr lang="en-US" sz="3600" dirty="0"/>
+          </a:p>
+        </p:txBody>
+      </p:sp>
+      <p:sp>
+        <p:nvSpPr>
+          <p:cNvPr id="5" name="Text 2"/>
+          <p:cNvSpPr/>
+          <p:nvPr/>
+        </p:nvSpPr>
+        <p:spPr>
+          <a:xfrm>
+            <a:off x="5349240" y="1783080"/>
+            <a:ext cx="6522415" cy="4663440"/>
+          </a:xfrm>
+          <a:prstGeom prst="rect">
+            <a:avLst/>
+          </a:prstGeom>
+          <a:noFill/>
+          <a:ln/>
+        </p:spPr>
+        <p:txBody>
+          <a:bodyPr wrap="square" lIns="0" tIns="0" rIns="0" bIns="0" rtlCol="0" anchor="t"/>
+          <a:lstStyle/>
+          <a:p>
+            <a:pPr algn="l" indent="0" marL="0">
+              <a:spcAft>
+                <a:spcPts val="800"/>
+              </a:spcAft>
+              <a:buNone/>
+            </a:pPr>
+            <a:r>
+              <a:rPr lang="en-US" sz="4000" dirty="0">
+                <a:solidFill>
+                  <a:srgbClr val="111111"/>
+                </a:solidFill>
+                <a:latin typeface="Times New Roman" pitchFamily="34" charset="0"/>
+                <a:ea typeface="Times New Roman" pitchFamily="34" charset="-122"/>
+                <a:cs typeface="Times New Roman" pitchFamily="34" charset="-120"/>
+              </a:rPr>
+              <a:t>It is air cooled on the slopes at night, which becomes heavy and flows down.</a:t>
+            </a:r>
+            <a:endParaRPr lang="en-US" sz="4000" dirty="0"/>
+          </a:p>
+        </p:txBody>
+      </p:sp>
+      <p:sp>
+        <p:nvSpPr>
+          <p:cNvPr id="25" name="Slide Number Placeholder 0"/>
+          <p:cNvSpPr>
+            <a:spLocks noGrp="1"/>
+          </p:cNvSpPr>
+          <p:nvPr>
+            <p:ph type="sldNum" sz="quarter" idx="4294967295"/>
+          </p:nvPr>
+        </p:nvSpPr>
+        <p:spPr>
+          <a:xfrm>
+            <a:off x="27432" y="91440"/>
+            <a:ext cx="585216" cy="475488"/>
+          </a:xfrm>
+          <a:prstGeom prst="rect">
+            <a:avLst/>
+          </a:prstGeom>
+          <a:extLst>
+            <a:ext uri="{C572A759-6A51-4108-AA02-DFA0A04FC94B}">
+              <ma14:wrappingTextBoxFlag xmlns:ma14="http://schemas.microsoft.com/office/mac/drawingml/2011/main" val="0"/>
+            </a:ext>
+          </a:extLst>
+        </p:spPr>
+        <p:txBody>
+          <a:bodyPr/>
+          <a:lstStyle>
+            <a:lvl1pPr>
+              <a:defRPr sz="2000">
+                <a:solidFill>
+                  <a:srgbClr val="FFFFFF"/>
+                </a:solidFill>
+                <a:latin typeface="Calibri"/>
+                <a:ea typeface="Calibri"/>
+                <a:cs typeface="Calibri"/>
+              </a:defRPr>
+            </a:lvl1pPr>
+          </a:lstStyle>
+          <a:p>
+            <a:pPr algn="ctr"/>
+            <a:fld id="{F7021451-1387-4CA6-816F-3879F97B5CBC}" type="slidenum">
+              <a:rPr b="1" lang="en-US"/>
+              <a:t>57</a:t>
+            </a:fld>
+            <a:endParaRPr lang="en-US"/>
+          </a:p>
+        </p:txBody>
+      </p:sp>
+    </p:spTree>
+  </p:cSld>
+  <p:clrMapOvr>
+    <a:masterClrMapping/>
+  </p:clrMapOvr>
+</p:sld>
+</file>
+
+<file path=ppt/slides/slide58.xml><?xml version="1.0" encoding="utf-8"?>
+<p:sld xmlns:a="http://schemas.openxmlformats.org/drawingml/2006/main" xmlns:r="http://schemas.openxmlformats.org/officeDocument/2006/relationships" xmlns:p="http://schemas.openxmlformats.org/presentationml/2006/main">
+  <p:cSld name="Slide 58">
+    <p:spTree>
+      <p:nvGrpSpPr>
+        <p:cNvPr id="1" name=""/>
+        <p:cNvGrpSpPr/>
+        <p:nvPr/>
+      </p:nvGrpSpPr>
+      <p:grpSpPr>
+        <a:xfrm>
+          <a:off x="0" y="0"/>
+          <a:ext cx="0" cy="0"/>
+          <a:chOff x="0" y="0"/>
+          <a:chExt cx="0" cy="0"/>
+        </a:xfrm>
+      </p:grpSpPr>
+      <p:sp>
+        <p:nvSpPr>
+          <p:cNvPr id="2" name="Text 0"/>
+          <p:cNvSpPr/>
+          <p:nvPr/>
+        </p:nvSpPr>
+        <p:spPr>
+          <a:xfrm>
+            <a:off x="457200" y="713232"/>
+            <a:ext cx="11368735" cy="274320"/>
+          </a:xfrm>
+          <a:prstGeom prst="rect">
+            <a:avLst/>
+          </a:prstGeom>
+          <a:noFill/>
+          <a:ln/>
+        </p:spPr>
+        <p:txBody>
+          <a:bodyPr wrap="square" lIns="0" tIns="0" rIns="0" bIns="0" rtlCol="0" anchor="ctr"/>
+          <a:lstStyle/>
+          <a:p>
+            <a:pPr algn="r" indent="0" marL="0">
+              <a:buNone/>
+            </a:pPr>
+            <a:r>
+              <a:rPr lang="en-US" sz="1400" b="1" dirty="0">
+                <a:solidFill>
+                  <a:srgbClr val="1C3F6E"/>
+                </a:solidFill>
+                <a:latin typeface="Calibri" pitchFamily="34" charset="0"/>
+                <a:ea typeface="Calibri" pitchFamily="34" charset="-122"/>
+                <a:cs typeface="Calibri" pitchFamily="34" charset="-120"/>
+              </a:rPr>
+              <a:t>REMEDIATION</a:t>
+            </a:r>
+            <a:endParaRPr lang="en-US" sz="1400" dirty="0"/>
+          </a:p>
+        </p:txBody>
+      </p:sp>
+      <p:pic>
+        <p:nvPicPr>
+          <p:cNvPr id="3" name="Image 0" descr="/home/claude/f4/img/minesec_sheet.png">    </p:cNvPr>
+          <p:cNvPicPr>
+            <a:picLocks noChangeAspect="1"/>
+          </p:cNvPicPr>
+          <p:nvPr/>
+        </p:nvPicPr>
+        <p:blipFill>
+          <a:blip r:embed="rId1"/>
+          <a:stretch>
+            <a:fillRect/>
+          </a:stretch>
+        </p:blipFill>
+        <p:spPr>
+          <a:xfrm>
+            <a:off x="0" y="658368"/>
+            <a:ext cx="3840480" cy="5833872"/>
+          </a:xfrm>
+          <a:prstGeom prst="rect">
+            <a:avLst/>
+          </a:prstGeom>
+        </p:spPr>
+      </p:pic>
+      <p:sp>
+        <p:nvSpPr>
+          <p:cNvPr id="4" name="Text 1"/>
+          <p:cNvSpPr/>
+          <p:nvPr/>
+        </p:nvSpPr>
+        <p:spPr>
+          <a:xfrm>
+            <a:off x="4069080" y="1005840"/>
+            <a:ext cx="7802575" cy="731520"/>
+          </a:xfrm>
+          <a:prstGeom prst="rect">
+            <a:avLst/>
+          </a:prstGeom>
+          <a:noFill/>
+          <a:ln/>
+        </p:spPr>
+        <p:txBody>
+          <a:bodyPr wrap="square" lIns="0" tIns="0" rIns="0" bIns="0" rtlCol="0" anchor="ctr">
+            <a:normAutofit/>
+          </a:bodyPr>
+          <a:lstStyle/>
+          <a:p>
+            <a:pPr algn="ctr" indent="0" marL="0">
+              <a:buNone/>
+            </a:pPr>
+            <a:r>
+              <a:rPr lang="en-US" sz="3600" b="1" dirty="0">
+                <a:solidFill>
+                  <a:srgbClr val="990011"/>
+                </a:solidFill>
+                <a:latin typeface="Times New Roman" pitchFamily="34" charset="0"/>
+                <a:ea typeface="Times New Roman" pitchFamily="34" charset="-122"/>
+                <a:cs typeface="Times New Roman" pitchFamily="34" charset="-120"/>
+              </a:rPr>
+              <a:t>Remediation</a:t>
+            </a:r>
+            <a:endParaRPr lang="en-US" sz="3600" dirty="0"/>
+          </a:p>
+        </p:txBody>
+      </p:sp>
+      <p:sp>
+        <p:nvSpPr>
+          <p:cNvPr id="5" name="Text 2"/>
+          <p:cNvSpPr/>
+          <p:nvPr/>
+        </p:nvSpPr>
+        <p:spPr>
+          <a:xfrm>
+            <a:off x="4069080" y="1783080"/>
+            <a:ext cx="7802575" cy="4663440"/>
+          </a:xfrm>
+          <a:prstGeom prst="rect">
+            <a:avLst/>
+          </a:prstGeom>
+          <a:noFill/>
+          <a:ln/>
+        </p:spPr>
+        <p:txBody>
+          <a:bodyPr wrap="square" lIns="0" tIns="0" rIns="0" bIns="0" rtlCol="0" anchor="t"/>
+          <a:lstStyle/>
+          <a:p>
+            <a:pPr algn="l" indent="0" marL="0">
+              <a:spcAft>
+                <a:spcPts val="800"/>
+              </a:spcAft>
+              <a:buNone/>
+            </a:pPr>
+            <a:r>
+              <a:rPr lang="en-US" sz="4000" b="1" dirty="0">
+                <a:solidFill>
+                  <a:srgbClr val="111111"/>
+                </a:solidFill>
+                <a:latin typeface="Times New Roman" pitchFamily="34" charset="0"/>
+                <a:ea typeface="Times New Roman" pitchFamily="34" charset="-122"/>
+                <a:cs typeface="Times New Roman" pitchFamily="34" charset="-120"/>
+              </a:rPr>
+              <a:t>Fill in the blanks:</a:t>
+            </a:r>
+            <a:endParaRPr lang="en-US" sz="4000" dirty="0"/>
+          </a:p>
+          <a:p>
+            <a:pPr algn="l" marL="342900" indent="-342900">
+              <a:spcAft>
+                <a:spcPts val="800"/>
+              </a:spcAft>
+              <a:buSzPct val="100000"/>
+              <a:buFont typeface="+mj-lt"/>
+              <a:buAutoNum type="arabicPeriod" startAt="1"/>
+            </a:pPr>
+            <a:r>
+              <a:rPr lang="en-US" sz="4000" dirty="0">
+                <a:solidFill>
+                  <a:srgbClr val="111111"/>
+                </a:solidFill>
+                <a:latin typeface="Times New Roman" pitchFamily="34" charset="0"/>
+                <a:ea typeface="Times New Roman" pitchFamily="34" charset="-122"/>
+                <a:cs typeface="Times New Roman" pitchFamily="34" charset="-120"/>
+              </a:rPr>
+              <a:t>A wind from the sea by day is a sea ______.</a:t>
+            </a:r>
+            <a:endParaRPr lang="en-US" sz="4000" dirty="0"/>
+          </a:p>
+          <a:p>
+            <a:pPr algn="l" marL="342900" indent="-342900">
+              <a:spcAft>
+                <a:spcPts val="800"/>
+              </a:spcAft>
+              <a:buSzPct val="100000"/>
+              <a:buFont typeface="+mj-lt"/>
+              <a:buAutoNum type="arabicPeriod" startAt="1"/>
+            </a:pPr>
+            <a:r>
+              <a:rPr lang="en-US" sz="4000" dirty="0">
+                <a:solidFill>
+                  <a:srgbClr val="111111"/>
+                </a:solidFill>
+                <a:latin typeface="Times New Roman" pitchFamily="34" charset="0"/>
+                <a:ea typeface="Times New Roman" pitchFamily="34" charset="-122"/>
+                <a:cs typeface="Times New Roman" pitchFamily="34" charset="-120"/>
+              </a:rPr>
+              <a:t>A wind blowing down slopes at night is ______.</a:t>
+            </a:r>
+            <a:endParaRPr lang="en-US" sz="4000" dirty="0"/>
+          </a:p>
+          <a:p>
+            <a:pPr algn="l" marL="342900" indent="-342900">
+              <a:spcAft>
+                <a:spcPts val="800"/>
+              </a:spcAft>
+              <a:buSzPct val="100000"/>
+              <a:buFont typeface="+mj-lt"/>
+              <a:buAutoNum type="arabicPeriod" startAt="1"/>
+            </a:pPr>
+            <a:r>
+              <a:rPr lang="en-US" sz="4000" dirty="0">
+                <a:solidFill>
+                  <a:srgbClr val="111111"/>
+                </a:solidFill>
+                <a:latin typeface="Times New Roman" pitchFamily="34" charset="0"/>
+                <a:ea typeface="Times New Roman" pitchFamily="34" charset="-122"/>
+                <a:cs typeface="Times New Roman" pitchFamily="34" charset="-120"/>
+              </a:rPr>
+              <a:t>The Chinook is a ______ wind.</a:t>
+            </a:r>
+            <a:endParaRPr lang="en-US" sz="4000" dirty="0"/>
+          </a:p>
+        </p:txBody>
+      </p:sp>
+      <p:sp>
+        <p:nvSpPr>
+          <p:cNvPr id="25" name="Slide Number Placeholder 0"/>
+          <p:cNvSpPr>
+            <a:spLocks noGrp="1"/>
+          </p:cNvSpPr>
+          <p:nvPr>
+            <p:ph type="sldNum" sz="quarter" idx="4294967295"/>
+          </p:nvPr>
+        </p:nvSpPr>
+        <p:spPr>
+          <a:xfrm>
+            <a:off x="27432" y="91440"/>
+            <a:ext cx="585216" cy="475488"/>
+          </a:xfrm>
+          <a:prstGeom prst="rect">
+            <a:avLst/>
+          </a:prstGeom>
+          <a:extLst>
+            <a:ext uri="{C572A759-6A51-4108-AA02-DFA0A04FC94B}">
+              <ma14:wrappingTextBoxFlag xmlns:ma14="http://schemas.microsoft.com/office/mac/drawingml/2011/main" val="0"/>
+            </a:ext>
+          </a:extLst>
+        </p:spPr>
+        <p:txBody>
+          <a:bodyPr/>
+          <a:lstStyle>
+            <a:lvl1pPr>
+              <a:defRPr sz="2000">
+                <a:solidFill>
+                  <a:srgbClr val="FFFFFF"/>
+                </a:solidFill>
+                <a:latin typeface="Calibri"/>
+                <a:ea typeface="Calibri"/>
+                <a:cs typeface="Calibri"/>
+              </a:defRPr>
+            </a:lvl1pPr>
+          </a:lstStyle>
+          <a:p>
+            <a:pPr algn="ctr"/>
+            <a:fld id="{F7021451-1387-4CA6-816F-3879F97B5CBC}" type="slidenum">
+              <a:rPr b="1" lang="en-US"/>
+              <a:t>58</a:t>
+            </a:fld>
+            <a:endParaRPr lang="en-US"/>
+          </a:p>
+        </p:txBody>
+      </p:sp>
+    </p:spTree>
+  </p:cSld>
+  <p:clrMapOvr>
+    <a:masterClrMapping/>
+  </p:clrMapOvr>
+</p:sld>
+</file>
+
+<file path=ppt/slides/slide59.xml><?xml version="1.0" encoding="utf-8"?>
+<p:sld xmlns:a="http://schemas.openxmlformats.org/drawingml/2006/main" xmlns:r="http://schemas.openxmlformats.org/officeDocument/2006/relationships" xmlns:p="http://schemas.openxmlformats.org/presentationml/2006/main">
+  <p:cSld name="Slide 59">
+    <p:spTree>
+      <p:nvGrpSpPr>
+        <p:cNvPr id="1" name=""/>
+        <p:cNvGrpSpPr/>
+        <p:nvPr/>
+      </p:nvGrpSpPr>
+      <p:grpSpPr>
+        <a:xfrm>
+          <a:off x="0" y="0"/>
+          <a:ext cx="0" cy="0"/>
+          <a:chOff x="0" y="0"/>
+          <a:chExt cx="0" cy="0"/>
+        </a:xfrm>
+      </p:grpSpPr>
+      <p:sp>
+        <p:nvSpPr>
+          <p:cNvPr id="2" name="Text 0"/>
+          <p:cNvSpPr/>
+          <p:nvPr/>
+        </p:nvSpPr>
+        <p:spPr>
+          <a:xfrm>
+            <a:off x="457200" y="713232"/>
+            <a:ext cx="11368735" cy="274320"/>
+          </a:xfrm>
+          <a:prstGeom prst="rect">
+            <a:avLst/>
+          </a:prstGeom>
+          <a:noFill/>
+          <a:ln/>
+        </p:spPr>
+        <p:txBody>
+          <a:bodyPr wrap="square" lIns="0" tIns="0" rIns="0" bIns="0" rtlCol="0" anchor="ctr"/>
+          <a:lstStyle/>
+          <a:p>
+            <a:pPr algn="r" indent="0" marL="0">
+              <a:buNone/>
+            </a:pPr>
+            <a:r>
+              <a:rPr lang="en-US" sz="1400" b="1" dirty="0">
+                <a:solidFill>
+                  <a:srgbClr val="1C3F6E"/>
+                </a:solidFill>
+                <a:latin typeface="Calibri" pitchFamily="34" charset="0"/>
+                <a:ea typeface="Calibri" pitchFamily="34" charset="-122"/>
+                <a:cs typeface="Calibri" pitchFamily="34" charset="-120"/>
+              </a:rPr>
+              <a:t>HOMEWORK</a:t>
+            </a:r>
+            <a:endParaRPr lang="en-US" sz="1400" dirty="0"/>
+          </a:p>
+        </p:txBody>
+      </p:sp>
+      <p:pic>
+        <p:nvPicPr>
+          <p:cNvPr id="3" name="Image 0" descr="/home/claude/f4/img/minesec_sheet.png">    </p:cNvPr>
+          <p:cNvPicPr>
+            <a:picLocks noChangeAspect="1"/>
+          </p:cNvPicPr>
+          <p:nvPr/>
+        </p:nvPicPr>
+        <p:blipFill>
+          <a:blip r:embed="rId1"/>
+          <a:stretch>
+            <a:fillRect/>
+          </a:stretch>
+        </p:blipFill>
+        <p:spPr>
+          <a:xfrm>
+            <a:off x="0" y="658368"/>
+            <a:ext cx="5120640" cy="5833872"/>
+          </a:xfrm>
+          <a:prstGeom prst="rect">
+            <a:avLst/>
+          </a:prstGeom>
+        </p:spPr>
+      </p:pic>
+      <p:sp>
+        <p:nvSpPr>
+          <p:cNvPr id="4" name="Text 1"/>
+          <p:cNvSpPr/>
+          <p:nvPr/>
+        </p:nvSpPr>
+        <p:spPr>
+          <a:xfrm>
+            <a:off x="5349240" y="1005840"/>
+            <a:ext cx="6522415" cy="731520"/>
+          </a:xfrm>
+          <a:prstGeom prst="rect">
+            <a:avLst/>
+          </a:prstGeom>
+          <a:noFill/>
+          <a:ln/>
+        </p:spPr>
+        <p:txBody>
+          <a:bodyPr wrap="square" lIns="0" tIns="0" rIns="0" bIns="0" rtlCol="0" anchor="ctr">
+            <a:normAutofit/>
+          </a:bodyPr>
+          <a:lstStyle/>
+          <a:p>
+            <a:pPr algn="ctr" indent="0" marL="0">
+              <a:buNone/>
+            </a:pPr>
+            <a:r>
+              <a:rPr lang="en-US" sz="3600" b="1" dirty="0">
+                <a:solidFill>
+                  <a:srgbClr val="990011"/>
+                </a:solidFill>
+                <a:latin typeface="Times New Roman" pitchFamily="34" charset="0"/>
+                <a:ea typeface="Times New Roman" pitchFamily="34" charset="-122"/>
+                <a:cs typeface="Times New Roman" pitchFamily="34" charset="-120"/>
+              </a:rPr>
+              <a:t>Homework</a:t>
+            </a:r>
+            <a:endParaRPr lang="en-US" sz="3600" dirty="0"/>
+          </a:p>
+        </p:txBody>
+      </p:sp>
+      <p:sp>
+        <p:nvSpPr>
+          <p:cNvPr id="5" name="Text 2"/>
+          <p:cNvSpPr/>
+          <p:nvPr/>
+        </p:nvSpPr>
+        <p:spPr>
+          <a:xfrm>
+            <a:off x="5349240" y="1783080"/>
+            <a:ext cx="6522415" cy="4663440"/>
+          </a:xfrm>
+          <a:prstGeom prst="rect">
+            <a:avLst/>
+          </a:prstGeom>
+          <a:noFill/>
+          <a:ln/>
+        </p:spPr>
+        <p:txBody>
+          <a:bodyPr wrap="square" lIns="0" tIns="0" rIns="0" bIns="0" rtlCol="0" anchor="t"/>
+          <a:lstStyle/>
+          <a:p>
+            <a:pPr algn="l" indent="0" marL="0">
+              <a:spcAft>
+                <a:spcPts val="800"/>
+              </a:spcAft>
+              <a:buNone/>
+            </a:pPr>
+            <a:r>
+              <a:rPr lang="en-US" sz="4000" dirty="0">
+                <a:solidFill>
+                  <a:srgbClr val="111111"/>
+                </a:solidFill>
+                <a:latin typeface="Times New Roman" pitchFamily="34" charset="0"/>
+                <a:ea typeface="Times New Roman" pitchFamily="34" charset="-122"/>
+                <a:cs typeface="Times New Roman" pitchFamily="34" charset="-120"/>
+              </a:rPr>
+              <a:t>Define an air mass.</a:t>
+            </a:r>
+            <a:endParaRPr lang="en-US" sz="4000" dirty="0"/>
+          </a:p>
+        </p:txBody>
+      </p:sp>
+      <p:sp>
+        <p:nvSpPr>
+          <p:cNvPr id="25" name="Slide Number Placeholder 0"/>
+          <p:cNvSpPr>
+            <a:spLocks noGrp="1"/>
+          </p:cNvSpPr>
+          <p:nvPr>
+            <p:ph type="sldNum" sz="quarter" idx="4294967295"/>
+          </p:nvPr>
+        </p:nvSpPr>
+        <p:spPr>
+          <a:xfrm>
+            <a:off x="27432" y="91440"/>
+            <a:ext cx="585216" cy="475488"/>
+          </a:xfrm>
+          <a:prstGeom prst="rect">
+            <a:avLst/>
+          </a:prstGeom>
+          <a:extLst>
+            <a:ext uri="{C572A759-6A51-4108-AA02-DFA0A04FC94B}">
+              <ma14:wrappingTextBoxFlag xmlns:ma14="http://schemas.microsoft.com/office/mac/drawingml/2011/main" val="0"/>
+            </a:ext>
+          </a:extLst>
+        </p:spPr>
+        <p:txBody>
+          <a:bodyPr/>
+          <a:lstStyle>
+            <a:lvl1pPr>
+              <a:defRPr sz="2000">
+                <a:solidFill>
+                  <a:srgbClr val="FFFFFF"/>
+                </a:solidFill>
+                <a:latin typeface="Calibri"/>
+                <a:ea typeface="Calibri"/>
+                <a:cs typeface="Calibri"/>
+              </a:defRPr>
+            </a:lvl1pPr>
+          </a:lstStyle>
+          <a:p>
+            <a:pPr algn="ctr"/>
+            <a:fld id="{F7021451-1387-4CA6-816F-3879F97B5CBC}" type="slidenum">
+              <a:rPr b="1" lang="en-US"/>
+              <a:t>59</a:t>
+            </a:fld>
+            <a:endParaRPr lang="en-US"/>
+          </a:p>
+        </p:txBody>
+      </p:sp>
+    </p:spTree>
+  </p:cSld>
+  <p:clrMapOvr>
+    <a:masterClrMapping/>
+  </p:clrMapOvr>
+</p:sld>
+</file>
+
+<file path=ppt/slides/slide6.xml><?xml version="1.0" encoding="utf-8"?>
+<p:sld xmlns:a="http://schemas.openxmlformats.org/drawingml/2006/main" xmlns:r="http://schemas.openxmlformats.org/officeDocument/2006/relationships" xmlns:p="http://schemas.openxmlformats.org/presentationml/2006/main">
+  <p:cSld name="Slide 6">
+    <p:spTree>
+      <p:nvGrpSpPr>
+        <p:cNvPr id="1" name=""/>
+        <p:cNvGrpSpPr/>
+        <p:nvPr/>
+      </p:nvGrpSpPr>
+      <p:grpSpPr>
+        <a:xfrm>
+          <a:off x="0" y="0"/>
+          <a:ext cx="0" cy="0"/>
+          <a:chOff x="0" y="0"/>
+          <a:chExt cx="0" cy="0"/>
+        </a:xfrm>
+      </p:grpSpPr>
+      <p:sp>
+        <p:nvSpPr>
+          <p:cNvPr id="2" name="Text 0"/>
+          <p:cNvSpPr/>
+          <p:nvPr/>
+        </p:nvSpPr>
+        <p:spPr>
+          <a:xfrm>
+            <a:off x="457200" y="713232"/>
+            <a:ext cx="11368735" cy="274320"/>
+          </a:xfrm>
+          <a:prstGeom prst="rect">
+            <a:avLst/>
+          </a:prstGeom>
+          <a:noFill/>
+          <a:ln/>
+        </p:spPr>
+        <p:txBody>
+          <a:bodyPr wrap="square" lIns="0" tIns="0" rIns="0" bIns="0" rtlCol="0" anchor="ctr"/>
+          <a:lstStyle/>
+          <a:p>
+            <a:pPr algn="r" indent="0" marL="0">
+              <a:buNone/>
+            </a:pPr>
+            <a:r>
+              <a:rPr lang="en-US" sz="1400" b="1" dirty="0">
+                <a:solidFill>
+                  <a:srgbClr val="1C3F6E"/>
+                </a:solidFill>
+                <a:latin typeface="Calibri" pitchFamily="34" charset="0"/>
+                <a:ea typeface="Calibri" pitchFamily="34" charset="-122"/>
+                <a:cs typeface="Calibri" pitchFamily="34" charset="-120"/>
+              </a:rPr>
+              <a:t>LESSON PLAN</a:t>
+            </a:r>
+            <a:endParaRPr lang="en-US" sz="1400" dirty="0"/>
+          </a:p>
+        </p:txBody>
+      </p:sp>
+      <p:pic>
+        <p:nvPicPr>
+          <p:cNvPr id="3" name="Image 0" descr="/home/claude/f4/img/minesec_sheet.png">    </p:cNvPr>
+          <p:cNvPicPr>
+            <a:picLocks noChangeAspect="1"/>
+          </p:cNvPicPr>
+          <p:nvPr/>
+        </p:nvPicPr>
+        <p:blipFill>
+          <a:blip r:embed="rId1"/>
+          <a:stretch>
+            <a:fillRect/>
+          </a:stretch>
+        </p:blipFill>
+        <p:spPr>
+          <a:xfrm>
+            <a:off x="0" y="658368"/>
+            <a:ext cx="2468880" cy="5833872"/>
+          </a:xfrm>
+          <a:prstGeom prst="rect">
+            <a:avLst/>
+          </a:prstGeom>
+        </p:spPr>
+      </p:pic>
+      <p:sp>
+        <p:nvSpPr>
+          <p:cNvPr id="4" name="Text 1"/>
+          <p:cNvSpPr/>
+          <p:nvPr/>
+        </p:nvSpPr>
+        <p:spPr>
+          <a:xfrm>
+            <a:off x="2697480" y="1005840"/>
+            <a:ext cx="9174175" cy="731520"/>
+          </a:xfrm>
+          <a:prstGeom prst="rect">
+            <a:avLst/>
+          </a:prstGeom>
+          <a:noFill/>
+          <a:ln/>
+        </p:spPr>
+        <p:txBody>
+          <a:bodyPr wrap="square" lIns="0" tIns="0" rIns="0" bIns="0" rtlCol="0" anchor="ctr">
+            <a:normAutofit/>
+          </a:bodyPr>
+          <a:lstStyle/>
+          <a:p>
+            <a:pPr algn="ctr" indent="0" marL="0">
+              <a:buNone/>
+            </a:pPr>
+            <a:r>
+              <a:rPr lang="en-US" sz="3600" b="1" dirty="0">
+                <a:solidFill>
+                  <a:srgbClr val="990011"/>
+                </a:solidFill>
+                <a:latin typeface="Times New Roman" pitchFamily="34" charset="0"/>
+                <a:ea typeface="Times New Roman" pitchFamily="34" charset="-122"/>
+                <a:cs typeface="Times New Roman" pitchFamily="34" charset="-120"/>
+              </a:rPr>
+              <a:t>Lesson Plan</a:t>
+            </a:r>
+            <a:endParaRPr lang="en-US" sz="3600" dirty="0"/>
+          </a:p>
+        </p:txBody>
+      </p:sp>
+      <p:sp>
+        <p:nvSpPr>
+          <p:cNvPr id="5" name="Text 2"/>
+          <p:cNvSpPr/>
+          <p:nvPr/>
+        </p:nvSpPr>
+        <p:spPr>
+          <a:xfrm>
+            <a:off x="2697480" y="1783080"/>
+            <a:ext cx="9174175" cy="4663440"/>
+          </a:xfrm>
+          <a:prstGeom prst="rect">
+            <a:avLst/>
+          </a:prstGeom>
+          <a:noFill/>
+          <a:ln/>
+        </p:spPr>
+        <p:txBody>
+          <a:bodyPr wrap="square" lIns="0" tIns="0" rIns="0" bIns="0" rtlCol="0" anchor="t"/>
+          <a:lstStyle/>
+          <a:p>
+            <a:pPr algn="l" marL="342900" indent="-342900">
+              <a:spcAft>
+                <a:spcPts val="800"/>
+              </a:spcAft>
+              <a:buSzPct val="100000"/>
+              <a:buFont typeface="+mj-lt"/>
+              <a:buAutoNum type="arabicPeriod" startAt="1"/>
+            </a:pPr>
+            <a:r>
+              <a:rPr lang="en-US" sz="4000" dirty="0">
+                <a:solidFill>
+                  <a:srgbClr val="111111"/>
+                </a:solidFill>
+                <a:latin typeface="Times New Roman" pitchFamily="34" charset="0"/>
+                <a:ea typeface="Times New Roman" pitchFamily="34" charset="-122"/>
+                <a:cs typeface="Times New Roman" pitchFamily="34" charset="-120"/>
+              </a:rPr>
+              <a:t>Correction of the homework</a:t>
+            </a:r>
+            <a:endParaRPr lang="en-US" sz="4000" dirty="0"/>
+          </a:p>
+          <a:p>
+            <a:pPr algn="l" marL="342900" indent="-342900">
+              <a:spcAft>
+                <a:spcPts val="800"/>
+              </a:spcAft>
+              <a:buSzPct val="100000"/>
+              <a:buFont typeface="+mj-lt"/>
+              <a:buAutoNum type="arabicPeriod" startAt="1"/>
+            </a:pPr>
+            <a:r>
+              <a:rPr lang="en-US" sz="4000" dirty="0">
+                <a:solidFill>
+                  <a:srgbClr val="111111"/>
+                </a:solidFill>
+                <a:latin typeface="Times New Roman" pitchFamily="34" charset="0"/>
+                <a:ea typeface="Times New Roman" pitchFamily="34" charset="-122"/>
+                <a:cs typeface="Times New Roman" pitchFamily="34" charset="-120"/>
+              </a:rPr>
+              <a:t>Objectives and recall</a:t>
+            </a:r>
+            <a:endParaRPr lang="en-US" sz="4000" dirty="0"/>
+          </a:p>
+          <a:p>
+            <a:pPr algn="l" marL="342900" indent="-342900">
+              <a:spcAft>
+                <a:spcPts val="800"/>
+              </a:spcAft>
+              <a:buSzPct val="100000"/>
+              <a:buFont typeface="+mj-lt"/>
+              <a:buAutoNum type="arabicPeriod" startAt="1"/>
+            </a:pPr>
+            <a:r>
+              <a:rPr lang="en-US" sz="4000" dirty="0">
+                <a:solidFill>
+                  <a:srgbClr val="111111"/>
+                </a:solidFill>
+                <a:latin typeface="Times New Roman" pitchFamily="34" charset="0"/>
+                <a:ea typeface="Times New Roman" pitchFamily="34" charset="-122"/>
+                <a:cs typeface="Times New Roman" pitchFamily="34" charset="-120"/>
+              </a:rPr>
+              <a:t>Real-life situation and action to take</a:t>
+            </a:r>
+            <a:endParaRPr lang="en-US" sz="4000" dirty="0"/>
+          </a:p>
+          <a:p>
+            <a:pPr algn="l" marL="342900" indent="-342900">
+              <a:spcAft>
+                <a:spcPts val="800"/>
+              </a:spcAft>
+              <a:buSzPct val="100000"/>
+              <a:buFont typeface="+mj-lt"/>
+              <a:buAutoNum type="arabicPeriod" startAt="1"/>
+            </a:pPr>
+            <a:r>
+              <a:rPr lang="en-US" sz="4000" dirty="0">
+                <a:solidFill>
+                  <a:srgbClr val="111111"/>
+                </a:solidFill>
+                <a:latin typeface="Times New Roman" pitchFamily="34" charset="0"/>
+                <a:ea typeface="Times New Roman" pitchFamily="34" charset="-122"/>
+                <a:cs typeface="Times New Roman" pitchFamily="34" charset="-120"/>
+              </a:rPr>
+              <a:t>Learning activities</a:t>
+            </a:r>
+            <a:endParaRPr lang="en-US" sz="4000" dirty="0"/>
+          </a:p>
+          <a:p>
+            <a:pPr algn="l" marL="342900" indent="-342900">
+              <a:spcAft>
+                <a:spcPts val="800"/>
+              </a:spcAft>
+              <a:buSzPct val="100000"/>
+              <a:buFont typeface="+mj-lt"/>
+              <a:buAutoNum type="arabicPeriod" startAt="1"/>
+            </a:pPr>
+            <a:r>
+              <a:rPr lang="en-US" sz="4000" dirty="0">
+                <a:solidFill>
+                  <a:srgbClr val="111111"/>
+                </a:solidFill>
+                <a:latin typeface="Times New Roman" pitchFamily="34" charset="0"/>
+                <a:ea typeface="Times New Roman" pitchFamily="34" charset="-122"/>
+                <a:cs typeface="Times New Roman" pitchFamily="34" charset="-120"/>
+              </a:rPr>
+              <a:t>Board summary</a:t>
+            </a:r>
+            <a:endParaRPr lang="en-US" sz="4000" dirty="0"/>
+          </a:p>
+          <a:p>
+            <a:pPr algn="l" marL="342900" indent="-342900">
+              <a:spcAft>
+                <a:spcPts val="800"/>
+              </a:spcAft>
+              <a:buSzPct val="100000"/>
+              <a:buFont typeface="+mj-lt"/>
+              <a:buAutoNum type="arabicPeriod" startAt="1"/>
+            </a:pPr>
+            <a:r>
+              <a:rPr lang="en-US" sz="4000" dirty="0">
+                <a:solidFill>
+                  <a:srgbClr val="111111"/>
+                </a:solidFill>
+                <a:latin typeface="Times New Roman" pitchFamily="34" charset="0"/>
+                <a:ea typeface="Times New Roman" pitchFamily="34" charset="-122"/>
+                <a:cs typeface="Times New Roman" pitchFamily="34" charset="-120"/>
+              </a:rPr>
+              <a:t>Evaluation, remediation and homework</a:t>
+            </a:r>
+            <a:endParaRPr lang="en-US" sz="4000" dirty="0"/>
+          </a:p>
+        </p:txBody>
+      </p:sp>
+      <p:sp>
+        <p:nvSpPr>
+          <p:cNvPr id="25" name="Slide Number Placeholder 0"/>
+          <p:cNvSpPr>
+            <a:spLocks noGrp="1"/>
+          </p:cNvSpPr>
+          <p:nvPr>
+            <p:ph type="sldNum" sz="quarter" idx="4294967295"/>
+          </p:nvPr>
+        </p:nvSpPr>
+        <p:spPr>
+          <a:xfrm>
+            <a:off x="27432" y="91440"/>
+            <a:ext cx="585216" cy="475488"/>
+          </a:xfrm>
+          <a:prstGeom prst="rect">
+            <a:avLst/>
+          </a:prstGeom>
+          <a:extLst>
+            <a:ext uri="{C572A759-6A51-4108-AA02-DFA0A04FC94B}">
+              <ma14:wrappingTextBoxFlag xmlns:ma14="http://schemas.microsoft.com/office/mac/drawingml/2011/main" val="0"/>
+            </a:ext>
+          </a:extLst>
+        </p:spPr>
+        <p:txBody>
+          <a:bodyPr/>
+          <a:lstStyle>
+            <a:lvl1pPr>
+              <a:defRPr sz="2000">
+                <a:solidFill>
+                  <a:srgbClr val="FFFFFF"/>
+                </a:solidFill>
+                <a:latin typeface="Calibri"/>
+                <a:ea typeface="Calibri"/>
+                <a:cs typeface="Calibri"/>
+              </a:defRPr>
+            </a:lvl1pPr>
+          </a:lstStyle>
+          <a:p>
+            <a:pPr algn="ctr"/>
+            <a:fld id="{F7021451-1387-4CA6-816F-3879F97B5CBC}" type="slidenum">
+              <a:rPr b="1" lang="en-US"/>
+              <a:t>6</a:t>
+            </a:fld>
+            <a:endParaRPr lang="en-US"/>
+          </a:p>
+        </p:txBody>
+      </p:sp>
+    </p:spTree>
+  </p:cSld>
+  <p:clrMapOvr>
+    <a:masterClrMapping/>
+  </p:clrMapOvr>
+</p:sld>
+</file>
+
+<file path=ppt/slides/slide60.xml><?xml version="1.0" encoding="utf-8"?>
+<p:sld xmlns:a="http://schemas.openxmlformats.org/drawingml/2006/main" xmlns:r="http://schemas.openxmlformats.org/officeDocument/2006/relationships" xmlns:p="http://schemas.openxmlformats.org/presentationml/2006/main">
+  <p:cSld name="Slide 60">
+    <p:spTree>
+      <p:nvGrpSpPr>
+        <p:cNvPr id="1" name=""/>
+        <p:cNvGrpSpPr/>
+        <p:nvPr/>
+      </p:nvGrpSpPr>
+      <p:grpSpPr>
+        <a:xfrm>
+          <a:off x="0" y="0"/>
+          <a:ext cx="0" cy="0"/>
+          <a:chOff x="0" y="0"/>
+          <a:chExt cx="0" cy="0"/>
+        </a:xfrm>
+      </p:grpSpPr>
+      <p:sp>
+        <p:nvSpPr>
+          <p:cNvPr id="2" name="Text 0"/>
+          <p:cNvSpPr/>
+          <p:nvPr/>
+        </p:nvSpPr>
+        <p:spPr>
+          <a:xfrm>
+            <a:off x="457200" y="713232"/>
+            <a:ext cx="11368735" cy="274320"/>
+          </a:xfrm>
+          <a:prstGeom prst="rect">
+            <a:avLst/>
+          </a:prstGeom>
+          <a:noFill/>
+          <a:ln/>
+        </p:spPr>
+        <p:txBody>
+          <a:bodyPr wrap="square" lIns="0" tIns="0" rIns="0" bIns="0" rtlCol="0" anchor="ctr"/>
+          <a:lstStyle/>
+          <a:p>
+            <a:pPr algn="r" indent="0" marL="0">
+              <a:buNone/>
+            </a:pPr>
+            <a:r>
+              <a:rPr lang="en-US" sz="1400" b="1" dirty="0">
+                <a:solidFill>
+                  <a:srgbClr val="1C3F6E"/>
+                </a:solidFill>
+                <a:latin typeface="Calibri" pitchFamily="34" charset="0"/>
+                <a:ea typeface="Calibri" pitchFamily="34" charset="-122"/>
+                <a:cs typeface="Calibri" pitchFamily="34" charset="-120"/>
+              </a:rPr>
+              <a:t>NEXT LESSON</a:t>
+            </a:r>
+            <a:endParaRPr lang="en-US" sz="1400" dirty="0"/>
+          </a:p>
+        </p:txBody>
+      </p:sp>
+      <p:pic>
+        <p:nvPicPr>
+          <p:cNvPr id="3" name="Image 0" descr="/home/claude/f4/img/minesec_sheet.png">    </p:cNvPr>
+          <p:cNvPicPr>
+            <a:picLocks noChangeAspect="1"/>
+          </p:cNvPicPr>
+          <p:nvPr/>
+        </p:nvPicPr>
+        <p:blipFill>
+          <a:blip r:embed="rId1"/>
+          <a:stretch>
+            <a:fillRect/>
+          </a:stretch>
+        </p:blipFill>
+        <p:spPr>
+          <a:xfrm>
+            <a:off x="0" y="658368"/>
+            <a:ext cx="5120640" cy="5833872"/>
+          </a:xfrm>
+          <a:prstGeom prst="rect">
+            <a:avLst/>
+          </a:prstGeom>
+        </p:spPr>
+      </p:pic>
+      <p:sp>
+        <p:nvSpPr>
+          <p:cNvPr id="4" name="Text 1"/>
+          <p:cNvSpPr/>
+          <p:nvPr/>
+        </p:nvSpPr>
+        <p:spPr>
+          <a:xfrm>
+            <a:off x="5349240" y="1005840"/>
+            <a:ext cx="6522415" cy="731520"/>
+          </a:xfrm>
+          <a:prstGeom prst="rect">
+            <a:avLst/>
+          </a:prstGeom>
+          <a:noFill/>
+          <a:ln/>
+        </p:spPr>
+        <p:txBody>
+          <a:bodyPr wrap="square" lIns="0" tIns="0" rIns="0" bIns="0" rtlCol="0" anchor="ctr">
+            <a:normAutofit/>
+          </a:bodyPr>
+          <a:lstStyle/>
+          <a:p>
+            <a:pPr algn="ctr" indent="0" marL="0">
+              <a:buNone/>
+            </a:pPr>
+            <a:r>
+              <a:rPr lang="en-US" sz="3600" b="1" dirty="0">
+                <a:solidFill>
+                  <a:srgbClr val="990011"/>
+                </a:solidFill>
+                <a:latin typeface="Times New Roman" pitchFamily="34" charset="0"/>
+                <a:ea typeface="Times New Roman" pitchFamily="34" charset="-122"/>
+                <a:cs typeface="Times New Roman" pitchFamily="34" charset="-120"/>
+              </a:rPr>
+              <a:t>Next Lesson</a:t>
+            </a:r>
+            <a:endParaRPr lang="en-US" sz="3600" dirty="0"/>
+          </a:p>
+        </p:txBody>
+      </p:sp>
+      <p:sp>
+        <p:nvSpPr>
+          <p:cNvPr id="5" name="Text 2"/>
+          <p:cNvSpPr/>
+          <p:nvPr/>
+        </p:nvSpPr>
+        <p:spPr>
+          <a:xfrm>
+            <a:off x="5349240" y="1783080"/>
+            <a:ext cx="6522415" cy="4663440"/>
+          </a:xfrm>
+          <a:prstGeom prst="rect">
+            <a:avLst/>
+          </a:prstGeom>
+          <a:noFill/>
+          <a:ln/>
+        </p:spPr>
+        <p:txBody>
+          <a:bodyPr wrap="square" lIns="0" tIns="0" rIns="0" bIns="0" rtlCol="0" anchor="ctr"/>
+          <a:lstStyle/>
+          <a:p>
+            <a:pPr algn="ctr" indent="0" marL="0">
+              <a:spcAft>
+                <a:spcPts val="800"/>
+              </a:spcAft>
+              <a:buNone/>
+            </a:pPr>
+            <a:r>
+              <a:rPr lang="en-US" sz="4000" b="1" dirty="0">
+                <a:solidFill>
+                  <a:srgbClr val="111111"/>
+                </a:solidFill>
+                <a:latin typeface="Times New Roman" pitchFamily="34" charset="0"/>
+                <a:ea typeface="Times New Roman" pitchFamily="34" charset="-122"/>
+                <a:cs typeface="Times New Roman" pitchFamily="34" charset="-120"/>
+              </a:rPr>
+              <a:t>Our next lesson will be on:</a:t>
+            </a:r>
+            <a:endParaRPr lang="en-US" sz="4000" dirty="0"/>
+          </a:p>
+          <a:p>
+            <a:pPr algn="ctr" indent="0" marL="0">
+              <a:spcAft>
+                <a:spcPts val="800"/>
+              </a:spcAft>
+              <a:buNone/>
+            </a:pPr>
+            <a:r>
+              <a:rPr lang="en-US" sz="4000" b="1" dirty="0">
+                <a:solidFill>
+                  <a:srgbClr val="990011"/>
+                </a:solidFill>
+                <a:latin typeface="Times New Roman" pitchFamily="34" charset="0"/>
+                <a:ea typeface="Times New Roman" pitchFamily="34" charset="-122"/>
+                <a:cs typeface="Times New Roman" pitchFamily="34" charset="-120"/>
+              </a:rPr>
+              <a:t>Lesson 18: Air Masses</a:t>
+            </a:r>
+            <a:endParaRPr lang="en-US" sz="4000" dirty="0"/>
+          </a:p>
+        </p:txBody>
+      </p:sp>
+      <p:sp>
+        <p:nvSpPr>
+          <p:cNvPr id="25" name="Slide Number Placeholder 0"/>
+          <p:cNvSpPr>
+            <a:spLocks noGrp="1"/>
+          </p:cNvSpPr>
+          <p:nvPr>
+            <p:ph type="sldNum" sz="quarter" idx="4294967295"/>
+          </p:nvPr>
+        </p:nvSpPr>
+        <p:spPr>
+          <a:xfrm>
+            <a:off x="27432" y="91440"/>
+            <a:ext cx="585216" cy="475488"/>
+          </a:xfrm>
+          <a:prstGeom prst="rect">
+            <a:avLst/>
+          </a:prstGeom>
+          <a:extLst>
+            <a:ext uri="{C572A759-6A51-4108-AA02-DFA0A04FC94B}">
+              <ma14:wrappingTextBoxFlag xmlns:ma14="http://schemas.microsoft.com/office/mac/drawingml/2011/main" val="0"/>
+            </a:ext>
+          </a:extLst>
+        </p:spPr>
+        <p:txBody>
+          <a:bodyPr/>
+          <a:lstStyle>
+            <a:lvl1pPr>
+              <a:defRPr sz="2000">
+                <a:solidFill>
+                  <a:srgbClr val="FFFFFF"/>
+                </a:solidFill>
+                <a:latin typeface="Calibri"/>
+                <a:ea typeface="Calibri"/>
+                <a:cs typeface="Calibri"/>
+              </a:defRPr>
+            </a:lvl1pPr>
+          </a:lstStyle>
+          <a:p>
+            <a:pPr algn="ctr"/>
+            <a:fld id="{F7021451-1387-4CA6-816F-3879F97B5CBC}" type="slidenum">
+              <a:rPr b="1" lang="en-US"/>
+              <a:t>60</a:t>
+            </a:fld>
+            <a:endParaRPr lang="en-US"/>
+          </a:p>
+        </p:txBody>
+      </p:sp>
+    </p:spTree>
+  </p:cSld>
+  <p:clrMapOvr>
+    <a:masterClrMapping/>
+  </p:clrMapOvr>
+</p:sld>
+</file>
+
+<file path=ppt/slides/slide61.xml><?xml version="1.0" encoding="utf-8"?>
+<p:sld xmlns:a="http://schemas.openxmlformats.org/drawingml/2006/main" xmlns:r="http://schemas.openxmlformats.org/officeDocument/2006/relationships" xmlns:p="http://schemas.openxmlformats.org/presentationml/2006/main">
+  <p:cSld name="Slide 61">
+    <p:spTree>
+      <p:nvGrpSpPr>
+        <p:cNvPr id="1" name=""/>
+        <p:cNvGrpSpPr/>
+        <p:nvPr/>
+      </p:nvGrpSpPr>
+      <p:grpSpPr>
+        <a:xfrm>
+          <a:off x="0" y="0"/>
+          <a:ext cx="0" cy="0"/>
+          <a:chOff x="0" y="0"/>
+          <a:chExt cx="0" cy="0"/>
+        </a:xfrm>
+      </p:grpSpPr>
+      <p:sp>
+        <p:nvSpPr>
+          <p:cNvPr id="2" name="Text 0"/>
+          <p:cNvSpPr/>
+          <p:nvPr/>
+        </p:nvSpPr>
+        <p:spPr>
+          <a:xfrm>
+            <a:off x="457200" y="713232"/>
+            <a:ext cx="11368735" cy="274320"/>
+          </a:xfrm>
+          <a:prstGeom prst="rect">
+            <a:avLst/>
+          </a:prstGeom>
+          <a:noFill/>
+          <a:ln/>
+        </p:spPr>
+        <p:txBody>
+          <a:bodyPr wrap="square" lIns="0" tIns="0" rIns="0" bIns="0" rtlCol="0" anchor="ctr"/>
+          <a:lstStyle/>
+          <a:p>
+            <a:pPr algn="r" indent="0" marL="0">
+              <a:buNone/>
+            </a:pPr>
+            <a:r>
+              <a:rPr lang="en-US" sz="1400" b="1" dirty="0">
+                <a:solidFill>
+                  <a:srgbClr val="1C3F6E"/>
+                </a:solidFill>
+                <a:latin typeface="Calibri" pitchFamily="34" charset="0"/>
+                <a:ea typeface="Calibri" pitchFamily="34" charset="-122"/>
+                <a:cs typeface="Calibri" pitchFamily="34" charset="-120"/>
+              </a:rPr>
+              <a:t>BILINGUAL GAME</a:t>
+            </a:r>
+            <a:endParaRPr lang="en-US" sz="1400" dirty="0"/>
+          </a:p>
+        </p:txBody>
+      </p:sp>
+      <p:sp>
+        <p:nvSpPr>
+          <p:cNvPr id="3" name="Text 1"/>
+          <p:cNvSpPr/>
+          <p:nvPr/>
+        </p:nvSpPr>
+        <p:spPr>
+          <a:xfrm>
+            <a:off x="457200" y="1005840"/>
+            <a:ext cx="11277295" cy="731520"/>
+          </a:xfrm>
+          <a:prstGeom prst="rect">
+            <a:avLst/>
+          </a:prstGeom>
+          <a:noFill/>
+          <a:ln/>
+        </p:spPr>
+        <p:txBody>
+          <a:bodyPr wrap="square" lIns="0" tIns="0" rIns="0" bIns="0" rtlCol="0" anchor="ctr"/>
+          <a:lstStyle/>
+          <a:p>
+            <a:pPr algn="ctr" indent="0" marL="0">
+              <a:buNone/>
+            </a:pPr>
+            <a:r>
+              <a:rPr lang="en-US" sz="3600" b="1" dirty="0">
+                <a:solidFill>
+                  <a:srgbClr val="990011"/>
+                </a:solidFill>
+                <a:latin typeface="Times New Roman" pitchFamily="34" charset="0"/>
+                <a:ea typeface="Times New Roman" pitchFamily="34" charset="-122"/>
+                <a:cs typeface="Times New Roman" pitchFamily="34" charset="-120"/>
+              </a:rPr>
               <a:t>Bilingual Game (Jeu Bilingue)</a:t>
             </a:r>
             <a:endParaRPr lang="en-US" sz="3600" dirty="0"/>
@@ -20172,7 +22000,7 @@
       </p:sp>
       <p:graphicFrame>
         <p:nvGraphicFramePr>
-          <p:cNvPr id="57" name="Table 0"/>
+          <p:cNvPr id="62" name="Table 0"/>
           <p:cNvGraphicFramePr>
             <a:graphicFrameLocks noGrp="1"/>
           </p:cNvGraphicFramePr>
@@ -21208,7 +23036,7 @@
             <a:pPr algn="ctr"/>
             <a:fld id="{F7021451-1387-4CA6-816F-3879F97B5CBC}" type="slidenum">
               <a:rPr b="1" lang="en-US"/>
-              <a:t>56</a:t>
+              <a:t>61</a:t>
             </a:fld>
             <a:endParaRPr lang="en-US"/>
           </a:p>
@@ -21222,9 +23050,9 @@
 </p:sld>
 </file>
 
-<file path=ppt/slides/slide57.xml><?xml version="1.0" encoding="utf-8"?>
+<file path=ppt/slides/slide62.xml><?xml version="1.0" encoding="utf-8"?>
 <p:sld xmlns:a="http://schemas.openxmlformats.org/drawingml/2006/main" xmlns:r="http://schemas.openxmlformats.org/officeDocument/2006/relationships" xmlns:p="http://schemas.openxmlformats.org/presentationml/2006/main">
-  <p:cSld name="Slide 57">
+  <p:cSld name="Slide 62">
     <p:spTree>
       <p:nvGrpSpPr>
         <p:cNvPr id="1" name=""/>
@@ -21319,7 +23147,7 @@
       </p:sp>
       <p:graphicFrame>
         <p:nvGraphicFramePr>
-          <p:cNvPr id="58" name="Table 0"/>
+          <p:cNvPr id="63" name="Table 0"/>
           <p:cNvGraphicFramePr>
             <a:graphicFrameLocks noGrp="1"/>
           </p:cNvGraphicFramePr>
@@ -21941,7 +23769,7 @@
             <a:pPr algn="ctr"/>
             <a:fld id="{F7021451-1387-4CA6-816F-3879F97B5CBC}" type="slidenum">
               <a:rPr b="1" lang="en-US"/>
-              <a:t>57</a:t>
+              <a:t>62</a:t>
             </a:fld>
             <a:endParaRPr lang="en-US"/>
           </a:p>
@@ -21955,9 +23783,9 @@
 </p:sld>
 </file>
 
-<file path=ppt/slides/slide58.xml><?xml version="1.0" encoding="utf-8"?>
+<file path=ppt/slides/slide63.xml><?xml version="1.0" encoding="utf-8"?>
 <p:sld xmlns:a="http://schemas.openxmlformats.org/drawingml/2006/main" xmlns:r="http://schemas.openxmlformats.org/officeDocument/2006/relationships" xmlns:p="http://schemas.openxmlformats.org/presentationml/2006/main">
-  <p:cSld name="Slide 58">
+  <p:cSld name="Slide 63">
     <p:spTree>
       <p:nvGrpSpPr>
         <p:cNvPr id="1" name=""/>
@@ -22052,7 +23880,7 @@
       </p:sp>
       <p:graphicFrame>
         <p:nvGraphicFramePr>
-          <p:cNvPr id="59" name="Table 0"/>
+          <p:cNvPr id="64" name="Table 0"/>
           <p:cNvGraphicFramePr>
             <a:graphicFrameLocks noGrp="1"/>
           </p:cNvGraphicFramePr>
@@ -22162,7 +23990,7 @@
                           <a:ea typeface="Calibri" pitchFamily="34" charset="-122"/>
                           <a:cs typeface="Calibri" pitchFamily="34" charset="-120"/>
                         </a:rPr>
-                        <a:t>DEFINITIONS; Land and Sea Breezes; Valley and Mountain Winds; Foehn Winds; Effects of Local Winds on Weather and Man.</a:t>
+                        <a:t>DEFINITIONS; Meaning and Categories of Local Winds; Land and Sea Breezes; Anabatic and Katabatic Winds; Foehn Winds; Effects of Winds on Weather and Man.</a:t>
                       </a:r>
                       <a:endParaRPr lang="en-US" sz="1600" dirty="0">
                         <a:latin typeface="Calibri" charset="0"/>
@@ -22812,7 +24640,7 @@
             <a:pPr algn="ctr"/>
             <a:fld id="{F7021451-1387-4CA6-816F-3879F97B5CBC}" type="slidenum">
               <a:rPr b="1" lang="en-US"/>
-              <a:t>58</a:t>
+              <a:t>63</a:t>
             </a:fld>
             <a:endParaRPr lang="en-US"/>
           </a:p>
@@ -22826,9 +24654,9 @@
 </p:sld>
 </file>
 
-<file path=ppt/slides/slide59.xml><?xml version="1.0" encoding="utf-8"?>
+<file path=ppt/slides/slide64.xml><?xml version="1.0" encoding="utf-8"?>
 <p:sld xmlns:a="http://schemas.openxmlformats.org/drawingml/2006/main" xmlns:r="http://schemas.openxmlformats.org/officeDocument/2006/relationships" xmlns:p="http://schemas.openxmlformats.org/presentationml/2006/main">
-  <p:cSld name="Slide 59">
+  <p:cSld name="Slide 64">
     <p:spTree>
       <p:nvGrpSpPr>
         <p:cNvPr id="1" name=""/>
@@ -23158,7 +24986,7 @@
             <a:pPr algn="ctr"/>
             <a:fld id="{F7021451-1387-4CA6-816F-3879F97B5CBC}" type="slidenum">
               <a:rPr b="1" lang="en-US"/>
-              <a:t>59</a:t>
+              <a:t>64</a:t>
             </a:fld>
             <a:endParaRPr lang="en-US"/>
           </a:p>
@@ -23172,9 +25000,9 @@
 </p:sld>
 </file>
 
-<file path=ppt/slides/slide6.xml><?xml version="1.0" encoding="utf-8"?>
+<file path=ppt/slides/slide65.xml><?xml version="1.0" encoding="utf-8"?>
 <p:sld xmlns:a="http://schemas.openxmlformats.org/drawingml/2006/main" xmlns:r="http://schemas.openxmlformats.org/officeDocument/2006/relationships" xmlns:p="http://schemas.openxmlformats.org/presentationml/2006/main">
-  <p:cSld name="Slide 6">
+  <p:cSld name="Slide 65">
     <p:spTree>
       <p:nvGrpSpPr>
         <p:cNvPr id="1" name=""/>
@@ -23222,7 +25050,7 @@
                 <a:ea typeface="Calibri" pitchFamily="34" charset="-122"/>
                 <a:cs typeface="Calibri" pitchFamily="34" charset="-120"/>
               </a:rPr>
-              <a:t>LESSON PLAN</a:t>
+              <a:t>REFERENCES</a:t>
             </a:r>
             <a:endParaRPr lang="en-US" sz="1400" dirty="0"/>
           </a:p>
@@ -23245,7 +25073,7 @@
         <p:spPr>
           <a:xfrm>
             <a:off x="0" y="658368"/>
-            <a:ext cx="2468880" cy="5833872"/>
+            <a:ext cx="5120640" cy="5833872"/>
           </a:xfrm>
           <a:prstGeom prst="rect">
             <a:avLst/>
@@ -23260,8 +25088,8 @@
         </p:nvSpPr>
         <p:spPr>
           <a:xfrm>
-            <a:off x="2697480" y="1005840"/>
-            <a:ext cx="9174175" cy="731520"/>
+            <a:off x="5349240" y="1005840"/>
+            <a:ext cx="6522415" cy="731520"/>
           </a:xfrm>
           <a:prstGeom prst="rect">
             <a:avLst/>
@@ -23287,7 +25115,7 @@
                 <a:ea typeface="Times New Roman" pitchFamily="34" charset="-122"/>
                 <a:cs typeface="Times New Roman" pitchFamily="34" charset="-120"/>
               </a:rPr>
-              <a:t>Lesson Plan</a:t>
+              <a:t>References</a:t>
             </a:r>
             <a:endParaRPr lang="en-US" sz="3600" dirty="0"/>
           </a:p>
@@ -23301,8 +25129,8 @@
         </p:nvSpPr>
         <p:spPr>
           <a:xfrm>
-            <a:off x="2697480" y="1783080"/>
-            <a:ext cx="9174175" cy="4663440"/>
+            <a:off x="5349240" y="1783080"/>
+            <a:ext cx="6522415" cy="4663440"/>
           </a:xfrm>
           <a:prstGeom prst="rect">
             <a:avLst/>
@@ -23319,21 +25147,20 @@
                 <a:spcPts val="800"/>
               </a:spcAft>
               <a:buSzPct val="100000"/>
-              <a:buFont typeface="+mj-lt"/>
-              <a:buAutoNum type="arabicPeriod" startAt="1"/>
-            </a:pPr>
-            <a:r>
-              <a:rPr lang="en-US" sz="4000" dirty="0">
+              <a:buChar char="•"/>
+            </a:pPr>
+            <a:r>
+              <a:rPr lang="en-US" sz="1800" dirty="0">
                 <a:solidFill>
                   <a:srgbClr val="111111"/>
                 </a:solidFill>
-                <a:latin typeface="Times New Roman" pitchFamily="34" charset="0"/>
-                <a:ea typeface="Times New Roman" pitchFamily="34" charset="-122"/>
-                <a:cs typeface="Times New Roman" pitchFamily="34" charset="-120"/>
-              </a:rPr>
-              <a:t>Correction of the homework</a:t>
-            </a:r>
-            <a:endParaRPr lang="en-US" sz="4000" dirty="0"/>
+                <a:latin typeface="Calibri" pitchFamily="34" charset="0"/>
+                <a:ea typeface="Calibri" pitchFamily="34" charset="-122"/>
+                <a:cs typeface="Calibri" pitchFamily="34" charset="-120"/>
+              </a:rPr>
+              <a:t>Geography Syllabus for Sixth Forms (Lower and Upper Sixth), MINESEC, 2019 — Module 1 (Meteorology, Climatology &amp; Hydrology).</a:t>
+            </a:r>
+            <a:endParaRPr lang="en-US" sz="1800" dirty="0"/>
           </a:p>
           <a:p>
             <a:pPr algn="l" marL="342900" indent="-342900">
@@ -23341,21 +25168,20 @@
                 <a:spcPts val="800"/>
               </a:spcAft>
               <a:buSzPct val="100000"/>
-              <a:buFont typeface="+mj-lt"/>
-              <a:buAutoNum type="arabicPeriod" startAt="1"/>
-            </a:pPr>
-            <a:r>
-              <a:rPr lang="en-US" sz="4000" dirty="0">
+              <a:buChar char="•"/>
+            </a:pPr>
+            <a:r>
+              <a:rPr lang="en-US" sz="1800" dirty="0">
                 <a:solidFill>
                   <a:srgbClr val="111111"/>
                 </a:solidFill>
-                <a:latin typeface="Times New Roman" pitchFamily="34" charset="0"/>
-                <a:ea typeface="Times New Roman" pitchFamily="34" charset="-122"/>
-                <a:cs typeface="Times New Roman" pitchFamily="34" charset="-120"/>
-              </a:rPr>
-              <a:t>Objectives and recall</a:t>
-            </a:r>
-            <a:endParaRPr lang="en-US" sz="4000" dirty="0"/>
+                <a:latin typeface="Calibri" pitchFamily="34" charset="0"/>
+                <a:ea typeface="Calibri" pitchFamily="34" charset="-122"/>
+                <a:cs typeface="Calibri" pitchFamily="34" charset="-120"/>
+              </a:rPr>
+              <a:t>Teacher's course notes: Mr KAMDEM E., Meteorology (LSA), GBHS Garoua, 2026.</a:t>
+            </a:r>
+            <a:endParaRPr lang="en-US" sz="1800" dirty="0"/>
           </a:p>
           <a:p>
             <a:pPr algn="l" marL="342900" indent="-342900">
@@ -23363,21 +25189,20 @@
                 <a:spcPts val="800"/>
               </a:spcAft>
               <a:buSzPct val="100000"/>
-              <a:buFont typeface="+mj-lt"/>
-              <a:buAutoNum type="arabicPeriod" startAt="1"/>
-            </a:pPr>
-            <a:r>
-              <a:rPr lang="en-US" sz="4000" dirty="0">
+              <a:buChar char="•"/>
+            </a:pPr>
+            <a:r>
+              <a:rPr lang="en-US" sz="1800" dirty="0">
                 <a:solidFill>
                   <a:srgbClr val="111111"/>
                 </a:solidFill>
-                <a:latin typeface="Times New Roman" pitchFamily="34" charset="0"/>
-                <a:ea typeface="Times New Roman" pitchFamily="34" charset="-122"/>
-                <a:cs typeface="Times New Roman" pitchFamily="34" charset="-120"/>
-              </a:rPr>
-              <a:t>Real-life situation and action to take</a:t>
-            </a:r>
-            <a:endParaRPr lang="en-US" sz="4000" dirty="0"/>
+                <a:latin typeface="Calibri" pitchFamily="34" charset="0"/>
+                <a:ea typeface="Calibri" pitchFamily="34" charset="-122"/>
+                <a:cs typeface="Calibri" pitchFamily="34" charset="-120"/>
+              </a:rPr>
+              <a:t>Photo, Activity 2: “Fishermen, Lake Tana” by A.Davey, CC BY 2.0, via Flickr (https://www.flickr.com/photos/40595948@N00/2260748777)</a:t>
+            </a:r>
+            <a:endParaRPr lang="en-US" sz="1800" dirty="0"/>
           </a:p>
           <a:p>
             <a:pPr algn="l" marL="342900" indent="-342900">
@@ -23385,65 +25210,20 @@
                 <a:spcPts val="800"/>
               </a:spcAft>
               <a:buSzPct val="100000"/>
-              <a:buFont typeface="+mj-lt"/>
-              <a:buAutoNum type="arabicPeriod" startAt="1"/>
-            </a:pPr>
-            <a:r>
-              <a:rPr lang="en-US" sz="4000" dirty="0">
+              <a:buChar char="•"/>
+            </a:pPr>
+            <a:r>
+              <a:rPr lang="en-US" sz="1800" dirty="0">
                 <a:solidFill>
                   <a:srgbClr val="111111"/>
                 </a:solidFill>
-                <a:latin typeface="Times New Roman" pitchFamily="34" charset="0"/>
-                <a:ea typeface="Times New Roman" pitchFamily="34" charset="-122"/>
-                <a:cs typeface="Times New Roman" pitchFamily="34" charset="-120"/>
-              </a:rPr>
-              <a:t>Learning activities</a:t>
-            </a:r>
-            <a:endParaRPr lang="en-US" sz="4000" dirty="0"/>
-          </a:p>
-          <a:p>
-            <a:pPr algn="l" marL="342900" indent="-342900">
-              <a:spcAft>
-                <a:spcPts val="800"/>
-              </a:spcAft>
-              <a:buSzPct val="100000"/>
-              <a:buFont typeface="+mj-lt"/>
-              <a:buAutoNum type="arabicPeriod" startAt="1"/>
-            </a:pPr>
-            <a:r>
-              <a:rPr lang="en-US" sz="4000" dirty="0">
-                <a:solidFill>
-                  <a:srgbClr val="111111"/>
-                </a:solidFill>
-                <a:latin typeface="Times New Roman" pitchFamily="34" charset="0"/>
-                <a:ea typeface="Times New Roman" pitchFamily="34" charset="-122"/>
-                <a:cs typeface="Times New Roman" pitchFamily="34" charset="-120"/>
-              </a:rPr>
-              <a:t>Board summary</a:t>
-            </a:r>
-            <a:endParaRPr lang="en-US" sz="4000" dirty="0"/>
-          </a:p>
-          <a:p>
-            <a:pPr algn="l" marL="342900" indent="-342900">
-              <a:spcAft>
-                <a:spcPts val="800"/>
-              </a:spcAft>
-              <a:buSzPct val="100000"/>
-              <a:buFont typeface="+mj-lt"/>
-              <a:buAutoNum type="arabicPeriod" startAt="1"/>
-            </a:pPr>
-            <a:r>
-              <a:rPr lang="en-US" sz="4000" dirty="0">
-                <a:solidFill>
-                  <a:srgbClr val="111111"/>
-                </a:solidFill>
-                <a:latin typeface="Times New Roman" pitchFamily="34" charset="0"/>
-                <a:ea typeface="Times New Roman" pitchFamily="34" charset="-122"/>
-                <a:cs typeface="Times New Roman" pitchFamily="34" charset="-120"/>
-              </a:rPr>
-              <a:t>Evaluation, remediation and homework</a:t>
-            </a:r>
-            <a:endParaRPr lang="en-US" sz="4000" dirty="0"/>
+                <a:latin typeface="Calibri" pitchFamily="34" charset="0"/>
+                <a:ea typeface="Calibri" pitchFamily="34" charset="-122"/>
+                <a:cs typeface="Calibri" pitchFamily="34" charset="-120"/>
+              </a:rPr>
+              <a:t>Diagrams and animations: drawn for this lesson (Geography Department).</a:t>
+            </a:r>
+            <a:endParaRPr lang="en-US" sz="1800" dirty="0"/>
           </a:p>
         </p:txBody>
       </p:sp>
@@ -23489,290 +25269,7 @@
             <a:pPr algn="ctr"/>
             <a:fld id="{F7021451-1387-4CA6-816F-3879F97B5CBC}" type="slidenum">
               <a:rPr b="1" lang="en-US"/>
-              <a:t>6</a:t>
-            </a:fld>
-            <a:endParaRPr lang="en-US"/>
-          </a:p>
-        </p:txBody>
-      </p:sp>
-    </p:spTree>
-  </p:cSld>
-  <p:clrMapOvr>
-    <a:masterClrMapping/>
-  </p:clrMapOvr>
-</p:sld>
-</file>
-
-<file path=ppt/slides/slide60.xml><?xml version="1.0" encoding="utf-8"?>
-<p:sld xmlns:a="http://schemas.openxmlformats.org/drawingml/2006/main" xmlns:r="http://schemas.openxmlformats.org/officeDocument/2006/relationships" xmlns:p="http://schemas.openxmlformats.org/presentationml/2006/main">
-  <p:cSld name="Slide 60">
-    <p:spTree>
-      <p:nvGrpSpPr>
-        <p:cNvPr id="1" name=""/>
-        <p:cNvGrpSpPr/>
-        <p:nvPr/>
-      </p:nvGrpSpPr>
-      <p:grpSpPr>
-        <a:xfrm>
-          <a:off x="0" y="0"/>
-          <a:ext cx="0" cy="0"/>
-          <a:chOff x="0" y="0"/>
-          <a:chExt cx="0" cy="0"/>
-        </a:xfrm>
-      </p:grpSpPr>
-      <p:sp>
-        <p:nvSpPr>
-          <p:cNvPr id="2" name="Text 0"/>
-          <p:cNvSpPr/>
-          <p:nvPr/>
-        </p:nvSpPr>
-        <p:spPr>
-          <a:xfrm>
-            <a:off x="457200" y="713232"/>
-            <a:ext cx="11368735" cy="274320"/>
-          </a:xfrm>
-          <a:prstGeom prst="rect">
-            <a:avLst/>
-          </a:prstGeom>
-          <a:noFill/>
-          <a:ln/>
-        </p:spPr>
-        <p:txBody>
-          <a:bodyPr wrap="square" lIns="0" tIns="0" rIns="0" bIns="0" rtlCol="0" anchor="ctr"/>
-          <a:lstStyle/>
-          <a:p>
-            <a:pPr algn="r" indent="0" marL="0">
-              <a:buNone/>
-            </a:pPr>
-            <a:r>
-              <a:rPr lang="en-US" sz="1400" b="1" dirty="0">
-                <a:solidFill>
-                  <a:srgbClr val="1C3F6E"/>
-                </a:solidFill>
-                <a:latin typeface="Calibri" pitchFamily="34" charset="0"/>
-                <a:ea typeface="Calibri" pitchFamily="34" charset="-122"/>
-                <a:cs typeface="Calibri" pitchFamily="34" charset="-120"/>
-              </a:rPr>
-              <a:t>REFERENCES</a:t>
-            </a:r>
-            <a:endParaRPr lang="en-US" sz="1400" dirty="0"/>
-          </a:p>
-        </p:txBody>
-      </p:sp>
-      <p:pic>
-        <p:nvPicPr>
-          <p:cNvPr id="3" name="Image 0" descr="/home/claude/f4/img/minesec_sheet.png">    </p:cNvPr>
-          <p:cNvPicPr>
-            <a:picLocks noChangeAspect="1"/>
-          </p:cNvPicPr>
-          <p:nvPr/>
-        </p:nvPicPr>
-        <p:blipFill>
-          <a:blip r:embed="rId1"/>
-          <a:stretch>
-            <a:fillRect/>
-          </a:stretch>
-        </p:blipFill>
-        <p:spPr>
-          <a:xfrm>
-            <a:off x="0" y="658368"/>
-            <a:ext cx="5120640" cy="5833872"/>
-          </a:xfrm>
-          <a:prstGeom prst="rect">
-            <a:avLst/>
-          </a:prstGeom>
-        </p:spPr>
-      </p:pic>
-      <p:sp>
-        <p:nvSpPr>
-          <p:cNvPr id="4" name="Text 1"/>
-          <p:cNvSpPr/>
-          <p:nvPr/>
-        </p:nvSpPr>
-        <p:spPr>
-          <a:xfrm>
-            <a:off x="5349240" y="1005840"/>
-            <a:ext cx="6522415" cy="731520"/>
-          </a:xfrm>
-          <a:prstGeom prst="rect">
-            <a:avLst/>
-          </a:prstGeom>
-          <a:noFill/>
-          <a:ln/>
-        </p:spPr>
-        <p:txBody>
-          <a:bodyPr wrap="square" lIns="0" tIns="0" rIns="0" bIns="0" rtlCol="0" anchor="ctr">
-            <a:normAutofit/>
-          </a:bodyPr>
-          <a:lstStyle/>
-          <a:p>
-            <a:pPr algn="ctr" indent="0" marL="0">
-              <a:buNone/>
-            </a:pPr>
-            <a:r>
-              <a:rPr lang="en-US" sz="3600" b="1" dirty="0">
-                <a:solidFill>
-                  <a:srgbClr val="990011"/>
-                </a:solidFill>
-                <a:latin typeface="Times New Roman" pitchFamily="34" charset="0"/>
-                <a:ea typeface="Times New Roman" pitchFamily="34" charset="-122"/>
-                <a:cs typeface="Times New Roman" pitchFamily="34" charset="-120"/>
-              </a:rPr>
-              <a:t>References</a:t>
-            </a:r>
-            <a:endParaRPr lang="en-US" sz="3600" dirty="0"/>
-          </a:p>
-        </p:txBody>
-      </p:sp>
-      <p:sp>
-        <p:nvSpPr>
-          <p:cNvPr id="5" name="Text 2"/>
-          <p:cNvSpPr/>
-          <p:nvPr/>
-        </p:nvSpPr>
-        <p:spPr>
-          <a:xfrm>
-            <a:off x="5349240" y="1783080"/>
-            <a:ext cx="6522415" cy="4663440"/>
-          </a:xfrm>
-          <a:prstGeom prst="rect">
-            <a:avLst/>
-          </a:prstGeom>
-          <a:noFill/>
-          <a:ln/>
-        </p:spPr>
-        <p:txBody>
-          <a:bodyPr wrap="square" lIns="0" tIns="0" rIns="0" bIns="0" rtlCol="0" anchor="t"/>
-          <a:lstStyle/>
-          <a:p>
-            <a:pPr algn="l" marL="342900" indent="-342900">
-              <a:spcAft>
-                <a:spcPts val="800"/>
-              </a:spcAft>
-              <a:buSzPct val="100000"/>
-              <a:buChar char="•"/>
-            </a:pPr>
-            <a:r>
-              <a:rPr lang="en-US" sz="1800" dirty="0">
-                <a:solidFill>
-                  <a:srgbClr val="111111"/>
-                </a:solidFill>
-                <a:latin typeface="Calibri" pitchFamily="34" charset="0"/>
-                <a:ea typeface="Calibri" pitchFamily="34" charset="-122"/>
-                <a:cs typeface="Calibri" pitchFamily="34" charset="-120"/>
-              </a:rPr>
-              <a:t>Geography Syllabus for Sixth Forms (Lower and Upper Sixth), MINESEC, 2019 — Module 1 (Meteorology, Climatology &amp; Hydrology).</a:t>
-            </a:r>
-            <a:endParaRPr lang="en-US" sz="1800" dirty="0"/>
-          </a:p>
-          <a:p>
-            <a:pPr algn="l" marL="342900" indent="-342900">
-              <a:spcAft>
-                <a:spcPts val="800"/>
-              </a:spcAft>
-              <a:buSzPct val="100000"/>
-              <a:buChar char="•"/>
-            </a:pPr>
-            <a:r>
-              <a:rPr lang="en-US" sz="1800" dirty="0">
-                <a:solidFill>
-                  <a:srgbClr val="111111"/>
-                </a:solidFill>
-                <a:latin typeface="Calibri" pitchFamily="34" charset="0"/>
-                <a:ea typeface="Calibri" pitchFamily="34" charset="-122"/>
-                <a:cs typeface="Calibri" pitchFamily="34" charset="-120"/>
-              </a:rPr>
-              <a:t>Teacher's course notes: Mr KAMDEM E., Meteorology (LSA), GBHS Garoua, 2026.</a:t>
-            </a:r>
-            <a:endParaRPr lang="en-US" sz="1800" dirty="0"/>
-          </a:p>
-          <a:p>
-            <a:pPr algn="l" marL="342900" indent="-342900">
-              <a:spcAft>
-                <a:spcPts val="800"/>
-              </a:spcAft>
-              <a:buSzPct val="100000"/>
-              <a:buChar char="•"/>
-            </a:pPr>
-            <a:r>
-              <a:rPr lang="en-US" sz="1800" dirty="0">
-                <a:solidFill>
-                  <a:srgbClr val="111111"/>
-                </a:solidFill>
-                <a:latin typeface="Calibri" pitchFamily="34" charset="0"/>
-                <a:ea typeface="Calibri" pitchFamily="34" charset="-122"/>
-                <a:cs typeface="Calibri" pitchFamily="34" charset="-120"/>
-              </a:rPr>
-              <a:t>Photo, Activity 2: “Fishermen, Lake Tana” by A.Davey, CC BY 2.0, via Flickr (https://www.flickr.com/photos/40595948@N00/2260748777)</a:t>
-            </a:r>
-            <a:endParaRPr lang="en-US" sz="1800" dirty="0"/>
-          </a:p>
-          <a:p>
-            <a:pPr algn="l" marL="342900" indent="-342900">
-              <a:spcAft>
-                <a:spcPts val="800"/>
-              </a:spcAft>
-              <a:buSzPct val="100000"/>
-              <a:buChar char="•"/>
-            </a:pPr>
-            <a:r>
-              <a:rPr lang="en-US" sz="1800" dirty="0">
-                <a:solidFill>
-                  <a:srgbClr val="111111"/>
-                </a:solidFill>
-                <a:latin typeface="Calibri" pitchFamily="34" charset="0"/>
-                <a:ea typeface="Calibri" pitchFamily="34" charset="-122"/>
-                <a:cs typeface="Calibri" pitchFamily="34" charset="-120"/>
-              </a:rPr>
-              <a:t>Diagrams and animations: drawn for this lesson (Geography Department).</a:t>
-            </a:r>
-            <a:endParaRPr lang="en-US" sz="1800" dirty="0"/>
-          </a:p>
-        </p:txBody>
-      </p:sp>
-      <p:sp>
-        <p:nvSpPr>
-          <p:cNvPr id="25" name="Slide Number Placeholder 0"/>
-          <p:cNvSpPr>
-            <a:spLocks noGrp="1"/>
-          </p:cNvSpPr>
-          <p:nvPr>
-            <p:ph type="sldNum" sz="quarter" idx="4294967295"/>
-          </p:nvPr>
-        </p:nvSpPr>
-        <p:spPr>
-          <a:xfrm>
-            <a:off x="27432" y="91440"/>
-            <a:ext cx="585216" cy="475488"/>
-          </a:xfrm>
-          <a:prstGeom prst="rect">
-            <a:avLst/>
-          </a:prstGeom>
-          <a:extLst>
-            <a:ext uri="{C572A759-6A51-4108-AA02-DFA0A04FC94B}">
-              <ma14:wrappingTextBoxFlag xmlns:ma14="http://schemas.microsoft.com/office/mac/drawingml/2011/main" val="0"/>
-            </a:ext>
-          </a:extLst>
-        </p:spPr>
-        <p:txBody>
-          <a:bodyPr/>
-          <a:lstStyle>
-            <a:lvl1pPr>
-              <a:defRPr sz="2000">
-                <a:solidFill>
-                  <a:srgbClr val="FFFFFF"/>
-                </a:solidFill>
-                <a:latin typeface="Calibri"/>
-                <a:ea typeface="Calibri"/>
-                <a:cs typeface="Calibri"/>
-              </a:defRPr>
-            </a:lvl1pPr>
-          </a:lstStyle>
-          <a:p>
-            <a:pPr algn="ctr"/>
-            <a:fld id="{F7021451-1387-4CA6-816F-3879F97B5CBC}" type="slidenum">
-              <a:rPr b="1" lang="en-US"/>
-              <a:t>60</a:t>
+              <a:t>65</a:t>
             </a:fld>
             <a:endParaRPr lang="en-US"/>
           </a:p>
